--- a/public/cours/vtc/B_Gestion_partie_1.pptx
+++ b/public/cours/vtc/B_Gestion_partie_1.pptx
@@ -5,7 +5,7 @@
     <p:sldMasterId id="2147483648" r:id="rId1"/>
   </p:sldMasterIdLst>
   <p:notesMasterIdLst>
-    <p:notesMasterId r:id="rId39"/>
+    <p:notesMasterId r:id="rId40"/>
   </p:notesMasterIdLst>
   <p:sldIdLst>
     <p:sldId id="256" r:id="rId2"/>
@@ -27,24 +27,25 @@
     <p:sldId id="284" r:id="rId18"/>
     <p:sldId id="265" r:id="rId19"/>
     <p:sldId id="266" r:id="rId20"/>
-    <p:sldId id="267" r:id="rId21"/>
-    <p:sldId id="292" r:id="rId22"/>
-    <p:sldId id="268" r:id="rId23"/>
-    <p:sldId id="269" r:id="rId24"/>
-    <p:sldId id="285" r:id="rId25"/>
-    <p:sldId id="270" r:id="rId26"/>
-    <p:sldId id="271" r:id="rId27"/>
-    <p:sldId id="272" r:id="rId28"/>
-    <p:sldId id="273" r:id="rId29"/>
-    <p:sldId id="274" r:id="rId30"/>
-    <p:sldId id="291" r:id="rId31"/>
-    <p:sldId id="275" r:id="rId32"/>
-    <p:sldId id="276" r:id="rId33"/>
-    <p:sldId id="277" r:id="rId34"/>
-    <p:sldId id="278" r:id="rId35"/>
-    <p:sldId id="279" r:id="rId36"/>
-    <p:sldId id="280" r:id="rId37"/>
-    <p:sldId id="281" r:id="rId38"/>
+    <p:sldId id="293" r:id="rId21"/>
+    <p:sldId id="267" r:id="rId22"/>
+    <p:sldId id="292" r:id="rId23"/>
+    <p:sldId id="268" r:id="rId24"/>
+    <p:sldId id="269" r:id="rId25"/>
+    <p:sldId id="285" r:id="rId26"/>
+    <p:sldId id="270" r:id="rId27"/>
+    <p:sldId id="271" r:id="rId28"/>
+    <p:sldId id="272" r:id="rId29"/>
+    <p:sldId id="273" r:id="rId30"/>
+    <p:sldId id="274" r:id="rId31"/>
+    <p:sldId id="291" r:id="rId32"/>
+    <p:sldId id="275" r:id="rId33"/>
+    <p:sldId id="276" r:id="rId34"/>
+    <p:sldId id="277" r:id="rId35"/>
+    <p:sldId id="278" r:id="rId36"/>
+    <p:sldId id="279" r:id="rId37"/>
+    <p:sldId id="280" r:id="rId38"/>
+    <p:sldId id="281" r:id="rId39"/>
   </p:sldIdLst>
   <p:sldSz cx="9144000" cy="5143500" type="screen16x9"/>
   <p:notesSz cx="5143500" cy="9144000"/>
@@ -619,7 +620,7 @@
           <a:p>
             <a:fld id="{F7021451-1387-4CA6-816F-3879F97B5CBC}" type="slidenum">
               <a:rPr lang="en-US"/>
-              <a:t>20</a:t>
+              <a:t>21</a:t>
             </a:fld>
             <a:endParaRPr lang="en-US"/>
           </a:p>
@@ -703,7 +704,7 @@
           <a:p>
             <a:fld id="{F7021451-1387-4CA6-816F-3879F97B5CBC}" type="slidenum">
               <a:rPr lang="en-US"/>
-              <a:t>22</a:t>
+              <a:t>23</a:t>
             </a:fld>
             <a:endParaRPr lang="en-US"/>
           </a:p>
@@ -787,7 +788,7 @@
           <a:p>
             <a:fld id="{F7021451-1387-4CA6-816F-3879F97B5CBC}" type="slidenum">
               <a:rPr lang="en-US"/>
-              <a:t>23</a:t>
+              <a:t>24</a:t>
             </a:fld>
             <a:endParaRPr lang="en-US"/>
           </a:p>
@@ -871,7 +872,7 @@
           <a:p>
             <a:fld id="{F7021451-1387-4CA6-816F-3879F97B5CBC}" type="slidenum">
               <a:rPr lang="en-US"/>
-              <a:t>25</a:t>
+              <a:t>26</a:t>
             </a:fld>
             <a:endParaRPr lang="en-US"/>
           </a:p>
@@ -955,7 +956,7 @@
           <a:p>
             <a:fld id="{F7021451-1387-4CA6-816F-3879F97B5CBC}" type="slidenum">
               <a:rPr lang="en-US"/>
-              <a:t>26</a:t>
+              <a:t>27</a:t>
             </a:fld>
             <a:endParaRPr lang="en-US"/>
           </a:p>
@@ -1039,7 +1040,7 @@
           <a:p>
             <a:fld id="{F7021451-1387-4CA6-816F-3879F97B5CBC}" type="slidenum">
               <a:rPr lang="en-US"/>
-              <a:t>27</a:t>
+              <a:t>28</a:t>
             </a:fld>
             <a:endParaRPr lang="en-US"/>
           </a:p>
@@ -1123,7 +1124,7 @@
           <a:p>
             <a:fld id="{F7021451-1387-4CA6-816F-3879F97B5CBC}" type="slidenum">
               <a:rPr lang="en-US"/>
-              <a:t>28</a:t>
+              <a:t>29</a:t>
             </a:fld>
             <a:endParaRPr lang="en-US"/>
           </a:p>
@@ -1207,7 +1208,7 @@
           <a:p>
             <a:fld id="{F7021451-1387-4CA6-816F-3879F97B5CBC}" type="slidenum">
               <a:rPr lang="en-US"/>
-              <a:t>29</a:t>
+              <a:t>30</a:t>
             </a:fld>
             <a:endParaRPr lang="en-US"/>
           </a:p>
@@ -1375,7 +1376,7 @@
           <a:p>
             <a:fld id="{F7021451-1387-4CA6-816F-3879F97B5CBC}" type="slidenum">
               <a:rPr lang="en-US"/>
-              <a:t>31</a:t>
+              <a:t>32</a:t>
             </a:fld>
             <a:endParaRPr lang="en-US"/>
           </a:p>
@@ -1459,7 +1460,7 @@
           <a:p>
             <a:fld id="{F7021451-1387-4CA6-816F-3879F97B5CBC}" type="slidenum">
               <a:rPr lang="en-US"/>
-              <a:t>32</a:t>
+              <a:t>33</a:t>
             </a:fld>
             <a:endParaRPr lang="en-US"/>
           </a:p>
@@ -1543,7 +1544,7 @@
           <a:p>
             <a:fld id="{F7021451-1387-4CA6-816F-3879F97B5CBC}" type="slidenum">
               <a:rPr lang="en-US"/>
-              <a:t>33</a:t>
+              <a:t>34</a:t>
             </a:fld>
             <a:endParaRPr lang="en-US"/>
           </a:p>
@@ -1627,7 +1628,7 @@
           <a:p>
             <a:fld id="{F7021451-1387-4CA6-816F-3879F97B5CBC}" type="slidenum">
               <a:rPr lang="en-US"/>
-              <a:t>34</a:t>
+              <a:t>35</a:t>
             </a:fld>
             <a:endParaRPr lang="en-US"/>
           </a:p>
@@ -1711,7 +1712,7 @@
           <a:p>
             <a:fld id="{F7021451-1387-4CA6-816F-3879F97B5CBC}" type="slidenum">
               <a:rPr lang="en-US"/>
-              <a:t>35</a:t>
+              <a:t>36</a:t>
             </a:fld>
             <a:endParaRPr lang="en-US"/>
           </a:p>
@@ -1795,7 +1796,7 @@
           <a:p>
             <a:fld id="{F7021451-1387-4CA6-816F-3879F97B5CBC}" type="slidenum">
               <a:rPr lang="en-US"/>
-              <a:t>36</a:t>
+              <a:t>37</a:t>
             </a:fld>
             <a:endParaRPr lang="en-US"/>
           </a:p>
@@ -1879,7 +1880,7 @@
           <a:p>
             <a:fld id="{F7021451-1387-4CA6-816F-3879F97B5CBC}" type="slidenum">
               <a:rPr lang="en-US"/>
-              <a:t>37</a:t>
+              <a:t>38</a:t>
             </a:fld>
             <a:endParaRPr lang="en-US"/>
           </a:p>
@@ -17231,6 +17232,964 @@
 
 <file path=ppt/slides/slide20.xml><?xml version="1.0" encoding="utf-8"?>
 <p:sld xmlns:a="http://schemas.openxmlformats.org/drawingml/2006/main" xmlns:r="http://schemas.openxmlformats.org/officeDocument/2006/relationships" xmlns:p="http://schemas.openxmlformats.org/presentationml/2006/main">
+  <p:cSld name="Slide 11">
+    <p:spTree>
+      <p:nvGrpSpPr>
+        <p:cNvPr id="1" name=""/>
+        <p:cNvGrpSpPr/>
+        <p:nvPr/>
+      </p:nvGrpSpPr>
+      <p:grpSpPr>
+        <a:xfrm>
+          <a:off x="0" y="0"/>
+          <a:ext cx="0" cy="0"/>
+          <a:chOff x="0" y="0"/>
+          <a:chExt cx="0" cy="0"/>
+        </a:xfrm>
+      </p:grpSpPr>
+      <p:sp>
+        <p:nvSpPr>
+          <p:cNvPr id="2" name="Shape 0"/>
+          <p:cNvSpPr/>
+          <p:nvPr/>
+        </p:nvSpPr>
+        <p:spPr>
+          <a:xfrm>
+            <a:off x="0" y="0"/>
+            <a:ext cx="9144000" cy="5148072"/>
+          </a:xfrm>
+          <a:prstGeom prst="rect">
+            <a:avLst/>
+          </a:prstGeom>
+          <a:solidFill>
+            <a:srgbClr val="F4F7FB"/>
+          </a:solidFill>
+          <a:ln w="12700">
+            <a:solidFill>
+              <a:srgbClr val="F4F7FB"/>
+            </a:solidFill>
+            <a:prstDash val="solid"/>
+          </a:ln>
+        </p:spPr>
+        <p:txBody>
+          <a:bodyPr/>
+          <a:lstStyle/>
+          <a:p>
+            <a:endParaRPr lang="fr-FR"/>
+          </a:p>
+        </p:txBody>
+      </p:sp>
+      <p:sp>
+        <p:nvSpPr>
+          <p:cNvPr id="3" name="Shape 1"/>
+          <p:cNvSpPr/>
+          <p:nvPr/>
+        </p:nvSpPr>
+        <p:spPr>
+          <a:xfrm>
+            <a:off x="0" y="0"/>
+            <a:ext cx="9144000" cy="969264"/>
+          </a:xfrm>
+          <a:prstGeom prst="rect">
+            <a:avLst/>
+          </a:prstGeom>
+          <a:solidFill>
+            <a:srgbClr val="E87722"/>
+          </a:solidFill>
+          <a:ln w="12700">
+            <a:solidFill>
+              <a:srgbClr val="E87722"/>
+            </a:solidFill>
+            <a:prstDash val="solid"/>
+          </a:ln>
+        </p:spPr>
+        <p:txBody>
+          <a:bodyPr/>
+          <a:lstStyle/>
+          <a:p>
+            <a:endParaRPr lang="fr-FR"/>
+          </a:p>
+        </p:txBody>
+      </p:sp>
+      <p:sp>
+        <p:nvSpPr>
+          <p:cNvPr id="4" name="Text 2"/>
+          <p:cNvSpPr/>
+          <p:nvPr/>
+        </p:nvSpPr>
+        <p:spPr>
+          <a:xfrm>
+            <a:off x="365760" y="0"/>
+            <a:ext cx="8412480" cy="603504"/>
+          </a:xfrm>
+          <a:prstGeom prst="rect">
+            <a:avLst/>
+          </a:prstGeom>
+          <a:noFill/>
+          <a:ln/>
+        </p:spPr>
+        <p:txBody>
+          <a:bodyPr wrap="square" rtlCol="0" anchor="b"/>
+          <a:lstStyle/>
+          <a:p>
+            <a:pPr marL="0" indent="0">
+              <a:buNone/>
+            </a:pPr>
+            <a:r>
+              <a:rPr lang="en-US" sz="1900" b="1" dirty="0">
+                <a:solidFill>
+                  <a:srgbClr val="FFFFFF"/>
+                </a:solidFill>
+                <a:latin typeface="Calibri" pitchFamily="34" charset="0"/>
+                <a:ea typeface="Calibri" pitchFamily="34" charset="-122"/>
+                <a:cs typeface="Calibri" pitchFamily="34" charset="-120"/>
+              </a:rPr>
+              <a:t>Le capital social : libération, dépôt et durée de vie</a:t>
+            </a:r>
+            <a:endParaRPr lang="en-US" sz="1900" dirty="0"/>
+          </a:p>
+        </p:txBody>
+      </p:sp>
+      <p:sp>
+        <p:nvSpPr>
+          <p:cNvPr id="5" name="Text 3"/>
+          <p:cNvSpPr/>
+          <p:nvPr/>
+        </p:nvSpPr>
+        <p:spPr>
+          <a:xfrm>
+            <a:off x="365760" y="621792"/>
+            <a:ext cx="8412480" cy="329184"/>
+          </a:xfrm>
+          <a:prstGeom prst="rect">
+            <a:avLst/>
+          </a:prstGeom>
+          <a:noFill/>
+          <a:ln/>
+        </p:spPr>
+        <p:txBody>
+          <a:bodyPr wrap="square" rtlCol="0" anchor="ctr"/>
+          <a:lstStyle/>
+          <a:p>
+            <a:pPr marL="0" indent="0">
+              <a:buNone/>
+            </a:pPr>
+            <a:r>
+              <a:rPr lang="en-US" sz="1050" i="1" dirty="0">
+                <a:solidFill>
+                  <a:srgbClr val="CADCFC"/>
+                </a:solidFill>
+                <a:latin typeface="Calibri" pitchFamily="34" charset="0"/>
+                <a:ea typeface="Calibri" pitchFamily="34" charset="-122"/>
+                <a:cs typeface="Calibri" pitchFamily="34" charset="-120"/>
+              </a:rPr>
+              <a:t>Comment se libère le capital, où sont déposés les fonds, et combien de temps dure une société</a:t>
+            </a:r>
+            <a:endParaRPr lang="en-US" sz="1050" dirty="0"/>
+          </a:p>
+        </p:txBody>
+      </p:sp>
+      <p:sp>
+        <p:nvSpPr>
+          <p:cNvPr id="6" name="Text 4"/>
+          <p:cNvSpPr/>
+          <p:nvPr/>
+        </p:nvSpPr>
+        <p:spPr>
+          <a:xfrm>
+            <a:off x="274320" y="4892040"/>
+            <a:ext cx="8046720" cy="201168"/>
+          </a:xfrm>
+          <a:prstGeom prst="rect">
+            <a:avLst/>
+          </a:prstGeom>
+          <a:noFill/>
+          <a:ln/>
+        </p:spPr>
+        <p:txBody>
+          <a:bodyPr wrap="square" rtlCol="0" anchor="ctr"/>
+          <a:lstStyle/>
+          <a:p>
+            <a:pPr marL="0" indent="0" algn="ctr">
+              <a:buNone/>
+            </a:pPr>
+            <a:r>
+              <a:rPr lang="en-US" sz="750" dirty="0">
+                <a:solidFill>
+                  <a:srgbClr val="9AAABB"/>
+                </a:solidFill>
+                <a:latin typeface="Calibri" pitchFamily="34" charset="0"/>
+                <a:ea typeface="Calibri" pitchFamily="34" charset="-122"/>
+                <a:cs typeface="Calibri" pitchFamily="34" charset="-120"/>
+              </a:rPr>
+              <a:t>FTRANSPORT - SERVICES PRO  •  Formation certifiée Qualiopi  •  Éligible CPF  •  Lyon</a:t>
+            </a:r>
+            <a:endParaRPr lang="en-US" sz="750" dirty="0"/>
+          </a:p>
+        </p:txBody>
+      </p:sp>
+      <p:sp>
+        <p:nvSpPr>
+          <p:cNvPr id="7" name="Shape 5"/>
+          <p:cNvSpPr/>
+          <p:nvPr/>
+        </p:nvSpPr>
+        <p:spPr>
+          <a:xfrm>
+            <a:off x="256032" y="1024128"/>
+            <a:ext cx="2816352" cy="3547872"/>
+          </a:xfrm>
+          <a:prstGeom prst="rect">
+            <a:avLst/>
+          </a:prstGeom>
+          <a:solidFill>
+            <a:srgbClr val="FFF8F0"/>
+          </a:solidFill>
+          <a:ln w="6350">
+            <a:solidFill>
+              <a:srgbClr val="D0DCE8"/>
+            </a:solidFill>
+            <a:prstDash val="solid"/>
+          </a:ln>
+        </p:spPr>
+        <p:txBody>
+          <a:bodyPr/>
+          <a:lstStyle/>
+          <a:p>
+            <a:endParaRPr lang="fr-FR"/>
+          </a:p>
+        </p:txBody>
+      </p:sp>
+      <p:sp>
+        <p:nvSpPr>
+          <p:cNvPr id="8" name="Shape 6"/>
+          <p:cNvSpPr/>
+          <p:nvPr/>
+        </p:nvSpPr>
+        <p:spPr>
+          <a:xfrm>
+            <a:off x="256032" y="1024128"/>
+            <a:ext cx="2816352" cy="310896"/>
+          </a:xfrm>
+          <a:prstGeom prst="rect">
+            <a:avLst/>
+          </a:prstGeom>
+          <a:solidFill>
+            <a:srgbClr val="E87722"/>
+          </a:solidFill>
+          <a:ln w="12700">
+            <a:solidFill>
+              <a:srgbClr val="E87722"/>
+            </a:solidFill>
+            <a:prstDash val="solid"/>
+          </a:ln>
+        </p:spPr>
+        <p:txBody>
+          <a:bodyPr/>
+          <a:lstStyle/>
+          <a:p>
+            <a:endParaRPr lang="fr-FR"/>
+          </a:p>
+        </p:txBody>
+      </p:sp>
+      <p:sp>
+        <p:nvSpPr>
+          <p:cNvPr id="9" name="Text 7"/>
+          <p:cNvSpPr/>
+          <p:nvPr/>
+        </p:nvSpPr>
+        <p:spPr>
+          <a:xfrm>
+            <a:off x="329184" y="1024128"/>
+            <a:ext cx="2670048" cy="310896"/>
+          </a:xfrm>
+          <a:prstGeom prst="rect">
+            <a:avLst/>
+          </a:prstGeom>
+          <a:noFill/>
+          <a:ln/>
+        </p:spPr>
+        <p:txBody>
+          <a:bodyPr wrap="square" rtlCol="0" anchor="ctr"/>
+          <a:lstStyle/>
+          <a:p>
+            <a:pPr marL="0" indent="0">
+              <a:buNone/>
+            </a:pPr>
+            <a:r>
+              <a:rPr lang="en-US" sz="1050" b="1" dirty="0">
+                <a:solidFill>
+                  <a:srgbClr val="FFFFFF"/>
+                </a:solidFill>
+                <a:latin typeface="Calibri" pitchFamily="34" charset="0"/>
+                <a:ea typeface="Calibri" pitchFamily="34" charset="-122"/>
+                <a:cs typeface="Calibri" pitchFamily="34" charset="-120"/>
+              </a:rPr>
+              <a:t>💧 Libération du capital</a:t>
+            </a:r>
+            <a:endParaRPr lang="en-US" sz="1050" dirty="0"/>
+          </a:p>
+        </p:txBody>
+      </p:sp>
+      <p:sp>
+        <p:nvSpPr>
+          <p:cNvPr id="10" name="Text 8"/>
+          <p:cNvSpPr/>
+          <p:nvPr/>
+        </p:nvSpPr>
+        <p:spPr>
+          <a:xfrm>
+            <a:off x="347472" y="1371600"/>
+            <a:ext cx="2633472" cy="3163824"/>
+          </a:xfrm>
+          <a:prstGeom prst="rect">
+            <a:avLst/>
+          </a:prstGeom>
+          <a:noFill/>
+          <a:ln/>
+        </p:spPr>
+        <p:txBody>
+          <a:bodyPr wrap="square" rtlCol="0" anchor="t"/>
+          <a:lstStyle/>
+          <a:p>
+            <a:pPr marL="0" indent="0">
+              <a:buNone/>
+            </a:pPr>
+            <a:r>
+              <a:rPr lang="en-US" sz="950" dirty="0">
+                <a:solidFill>
+                  <a:srgbClr val="1E2D3D"/>
+                </a:solidFill>
+                <a:latin typeface="Calibri" pitchFamily="34" charset="0"/>
+                <a:ea typeface="Calibri" pitchFamily="34" charset="-122"/>
+                <a:cs typeface="Calibri" pitchFamily="34" charset="-120"/>
+              </a:rPr>
+              <a:t>Capital SOUSCRIT = montant total promis. Capital LIBÉRÉ = part réellement versée par les associés.</a:t>
+            </a:r>
+            <a:endParaRPr lang="en-US" sz="950" dirty="0"/>
+          </a:p>
+          <a:p>
+            <a:pPr marL="0" indent="0">
+              <a:buNone/>
+            </a:pPr>
+            <a:r>
+              <a:rPr lang="en-US" sz="950" dirty="0">
+                <a:solidFill>
+                  <a:srgbClr val="1E2D3D"/>
+                </a:solidFill>
+                <a:latin typeface="Calibri" pitchFamily="34" charset="0"/>
+                <a:ea typeface="Calibri" pitchFamily="34" charset="-122"/>
+                <a:cs typeface="Calibri" pitchFamily="34" charset="-120"/>
+              </a:rPr>
+              <a:t>SARL / EURL : au moins 20% versé à la création, le solde (80%) dans les 5 ans.</a:t>
+            </a:r>
+            <a:endParaRPr lang="en-US" sz="950" dirty="0"/>
+          </a:p>
+          <a:p>
+            <a:pPr marL="0" indent="0">
+              <a:buNone/>
+            </a:pPr>
+            <a:r>
+              <a:rPr lang="en-US" sz="950" dirty="0">
+                <a:solidFill>
+                  <a:srgbClr val="1E2D3D"/>
+                </a:solidFill>
+                <a:latin typeface="Calibri" pitchFamily="34" charset="0"/>
+                <a:ea typeface="Calibri" pitchFamily="34" charset="-122"/>
+                <a:cs typeface="Calibri" pitchFamily="34" charset="-120"/>
+              </a:rPr>
+              <a:t>SASU / SAS / SA : au moins 50% versé à la création, le solde dans les 5 ans.</a:t>
+            </a:r>
+            <a:endParaRPr lang="en-US" sz="950" dirty="0"/>
+          </a:p>
+          <a:p>
+            <a:pPr marL="0" indent="0">
+              <a:buNone/>
+            </a:pPr>
+            <a:r>
+              <a:rPr lang="en-US" sz="950" dirty="0">
+                <a:solidFill>
+                  <a:srgbClr val="1E2D3D"/>
+                </a:solidFill>
+                <a:latin typeface="Calibri" pitchFamily="34" charset="0"/>
+                <a:ea typeface="Calibri" pitchFamily="34" charset="-122"/>
+                <a:cs typeface="Calibri" pitchFamily="34" charset="-120"/>
+              </a:rPr>
+              <a:t>Exemple : capital de 10 000 € en SARL → 2 000 € minimum versés à la création.</a:t>
+            </a:r>
+            <a:endParaRPr lang="en-US" sz="950" dirty="0"/>
+          </a:p>
+        </p:txBody>
+      </p:sp>
+      <p:sp>
+        <p:nvSpPr>
+          <p:cNvPr id="11" name="Shape 9"/>
+          <p:cNvSpPr/>
+          <p:nvPr/>
+        </p:nvSpPr>
+        <p:spPr>
+          <a:xfrm>
+            <a:off x="3154680" y="1024128"/>
+            <a:ext cx="2816352" cy="3547872"/>
+          </a:xfrm>
+          <a:prstGeom prst="rect">
+            <a:avLst/>
+          </a:prstGeom>
+          <a:solidFill>
+            <a:srgbClr val="EBF4FC"/>
+          </a:solidFill>
+          <a:ln w="6350">
+            <a:solidFill>
+              <a:srgbClr val="D0DCE8"/>
+            </a:solidFill>
+            <a:prstDash val="solid"/>
+          </a:ln>
+        </p:spPr>
+        <p:txBody>
+          <a:bodyPr/>
+          <a:lstStyle/>
+          <a:p>
+            <a:endParaRPr lang="fr-FR"/>
+          </a:p>
+        </p:txBody>
+      </p:sp>
+      <p:sp>
+        <p:nvSpPr>
+          <p:cNvPr id="12" name="Shape 10"/>
+          <p:cNvSpPr/>
+          <p:nvPr/>
+        </p:nvSpPr>
+        <p:spPr>
+          <a:xfrm>
+            <a:off x="3154680" y="1024128"/>
+            <a:ext cx="2816352" cy="310896"/>
+          </a:xfrm>
+          <a:prstGeom prst="rect">
+            <a:avLst/>
+          </a:prstGeom>
+          <a:solidFill>
+            <a:srgbClr val="1A3A5C"/>
+          </a:solidFill>
+          <a:ln w="12700">
+            <a:solidFill>
+              <a:srgbClr val="1A3A5C"/>
+            </a:solidFill>
+            <a:prstDash val="solid"/>
+          </a:ln>
+        </p:spPr>
+        <p:txBody>
+          <a:bodyPr/>
+          <a:lstStyle/>
+          <a:p>
+            <a:endParaRPr lang="fr-FR"/>
+          </a:p>
+        </p:txBody>
+      </p:sp>
+      <p:sp>
+        <p:nvSpPr>
+          <p:cNvPr id="13" name="Text 11"/>
+          <p:cNvSpPr/>
+          <p:nvPr/>
+        </p:nvSpPr>
+        <p:spPr>
+          <a:xfrm>
+            <a:off x="3227832" y="1024128"/>
+            <a:ext cx="2670048" cy="310896"/>
+          </a:xfrm>
+          <a:prstGeom prst="rect">
+            <a:avLst/>
+          </a:prstGeom>
+          <a:noFill/>
+          <a:ln/>
+        </p:spPr>
+        <p:txBody>
+          <a:bodyPr wrap="square" rtlCol="0" anchor="ctr"/>
+          <a:lstStyle/>
+          <a:p>
+            <a:pPr marL="0" indent="0">
+              <a:buNone/>
+            </a:pPr>
+            <a:r>
+              <a:rPr lang="en-US" sz="1050" b="1" dirty="0">
+                <a:solidFill>
+                  <a:srgbClr val="FFFFFF"/>
+                </a:solidFill>
+                <a:latin typeface="Calibri" pitchFamily="34" charset="0"/>
+                <a:ea typeface="Calibri" pitchFamily="34" charset="-122"/>
+                <a:cs typeface="Calibri" pitchFamily="34" charset="-120"/>
+              </a:rPr>
+              <a:t>🏦 Créer le capital : comment et où ?</a:t>
+            </a:r>
+            <a:endParaRPr lang="en-US" sz="1050" dirty="0"/>
+          </a:p>
+        </p:txBody>
+      </p:sp>
+      <p:sp>
+        <p:nvSpPr>
+          <p:cNvPr id="14" name="Text 12"/>
+          <p:cNvSpPr/>
+          <p:nvPr/>
+        </p:nvSpPr>
+        <p:spPr>
+          <a:xfrm>
+            <a:off x="3246120" y="1371600"/>
+            <a:ext cx="2633472" cy="3163824"/>
+          </a:xfrm>
+          <a:prstGeom prst="rect">
+            <a:avLst/>
+          </a:prstGeom>
+          <a:noFill/>
+          <a:ln/>
+        </p:spPr>
+        <p:txBody>
+          <a:bodyPr wrap="square" rtlCol="0" anchor="t"/>
+          <a:lstStyle/>
+          <a:p>
+            <a:pPr marL="0" indent="0">
+              <a:buNone/>
+            </a:pPr>
+            <a:r>
+              <a:rPr lang="en-US" sz="950" dirty="0">
+                <a:solidFill>
+                  <a:srgbClr val="1E2D3D"/>
+                </a:solidFill>
+                <a:latin typeface="Calibri" pitchFamily="34" charset="0"/>
+                <a:ea typeface="Calibri" pitchFamily="34" charset="-122"/>
+                <a:cs typeface="Calibri" pitchFamily="34" charset="-120"/>
+              </a:rPr>
+              <a:t>Les apports en numéraire sont déposés sur un compte BLOQUÉ : banque, notaire, ou Caisse des Dépôts.</a:t>
+            </a:r>
+            <a:endParaRPr lang="en-US" sz="950" dirty="0"/>
+          </a:p>
+          <a:p>
+            <a:pPr marL="0" indent="0">
+              <a:buNone/>
+            </a:pPr>
+            <a:r>
+              <a:rPr lang="en-US" sz="950" dirty="0">
+                <a:solidFill>
+                  <a:srgbClr val="1E2D3D"/>
+                </a:solidFill>
+                <a:latin typeface="Calibri" pitchFamily="34" charset="0"/>
+                <a:ea typeface="Calibri" pitchFamily="34" charset="-122"/>
+                <a:cs typeface="Calibri" pitchFamily="34" charset="-120"/>
+              </a:rPr>
+              <a:t>Les fonds restent bloqués jusqu'à l'immatriculation de la société au RCS.</a:t>
+            </a:r>
+            <a:endParaRPr lang="en-US" sz="950" dirty="0"/>
+          </a:p>
+          <a:p>
+            <a:pPr marL="0" indent="0">
+              <a:buNone/>
+            </a:pPr>
+            <a:r>
+              <a:rPr lang="en-US" sz="950" dirty="0">
+                <a:solidFill>
+                  <a:srgbClr val="1E2D3D"/>
+                </a:solidFill>
+                <a:latin typeface="Calibri" pitchFamily="34" charset="0"/>
+                <a:ea typeface="Calibri" pitchFamily="34" charset="-122"/>
+                <a:cs typeface="Calibri" pitchFamily="34" charset="-120"/>
+              </a:rPr>
+              <a:t>Un certificat de dépôt des fonds est délivré — nécessaire au dossier d'immatriculation.</a:t>
+            </a:r>
+            <a:endParaRPr lang="en-US" sz="950" dirty="0"/>
+          </a:p>
+          <a:p>
+            <a:pPr marL="0" indent="0">
+              <a:buNone/>
+            </a:pPr>
+            <a:r>
+              <a:rPr lang="en-US" sz="950" dirty="0">
+                <a:solidFill>
+                  <a:srgbClr val="1E2D3D"/>
+                </a:solidFill>
+                <a:latin typeface="Calibri" pitchFamily="34" charset="0"/>
+                <a:ea typeface="Calibri" pitchFamily="34" charset="-122"/>
+                <a:cs typeface="Calibri" pitchFamily="34" charset="-120"/>
+              </a:rPr>
+              <a:t>Une fois le Kbis obtenu, les fonds sont débloqués sur le compte de la société.</a:t>
+            </a:r>
+            <a:endParaRPr lang="en-US" sz="950" dirty="0"/>
+          </a:p>
+        </p:txBody>
+      </p:sp>
+      <p:sp>
+        <p:nvSpPr>
+          <p:cNvPr id="15" name="Shape 13"/>
+          <p:cNvSpPr/>
+          <p:nvPr/>
+        </p:nvSpPr>
+        <p:spPr>
+          <a:xfrm>
+            <a:off x="6053328" y="1024128"/>
+            <a:ext cx="2816352" cy="3547872"/>
+          </a:xfrm>
+          <a:prstGeom prst="rect">
+            <a:avLst/>
+          </a:prstGeom>
+          <a:solidFill>
+            <a:srgbClr val="E8F5E9"/>
+          </a:solidFill>
+          <a:ln w="6350">
+            <a:solidFill>
+              <a:srgbClr val="D0DCE8"/>
+            </a:solidFill>
+            <a:prstDash val="solid"/>
+          </a:ln>
+        </p:spPr>
+        <p:txBody>
+          <a:bodyPr/>
+          <a:lstStyle/>
+          <a:p>
+            <a:endParaRPr lang="fr-FR"/>
+          </a:p>
+        </p:txBody>
+      </p:sp>
+      <p:sp>
+        <p:nvSpPr>
+          <p:cNvPr id="16" name="Shape 14"/>
+          <p:cNvSpPr/>
+          <p:nvPr/>
+        </p:nvSpPr>
+        <p:spPr>
+          <a:xfrm>
+            <a:off x="6053328" y="1024128"/>
+            <a:ext cx="2816352" cy="310896"/>
+          </a:xfrm>
+          <a:prstGeom prst="rect">
+            <a:avLst/>
+          </a:prstGeom>
+          <a:solidFill>
+            <a:srgbClr val="2E7D32"/>
+          </a:solidFill>
+          <a:ln w="12700">
+            <a:solidFill>
+              <a:srgbClr val="2E7D32"/>
+            </a:solidFill>
+            <a:prstDash val="solid"/>
+          </a:ln>
+        </p:spPr>
+        <p:txBody>
+          <a:bodyPr/>
+          <a:lstStyle/>
+          <a:p>
+            <a:endParaRPr lang="fr-FR"/>
+          </a:p>
+        </p:txBody>
+      </p:sp>
+      <p:sp>
+        <p:nvSpPr>
+          <p:cNvPr id="17" name="Text 15"/>
+          <p:cNvSpPr/>
+          <p:nvPr/>
+        </p:nvSpPr>
+        <p:spPr>
+          <a:xfrm>
+            <a:off x="6126480" y="1024128"/>
+            <a:ext cx="2670048" cy="310896"/>
+          </a:xfrm>
+          <a:prstGeom prst="rect">
+            <a:avLst/>
+          </a:prstGeom>
+          <a:noFill/>
+          <a:ln/>
+        </p:spPr>
+        <p:txBody>
+          <a:bodyPr wrap="square" rtlCol="0" anchor="ctr"/>
+          <a:lstStyle/>
+          <a:p>
+            <a:pPr marL="0" indent="0">
+              <a:buNone/>
+            </a:pPr>
+            <a:r>
+              <a:rPr lang="en-US" sz="1050" b="1" dirty="0">
+                <a:solidFill>
+                  <a:srgbClr val="FFFFFF"/>
+                </a:solidFill>
+                <a:latin typeface="Calibri" pitchFamily="34" charset="0"/>
+                <a:ea typeface="Calibri" pitchFamily="34" charset="-122"/>
+                <a:cs typeface="Calibri" pitchFamily="34" charset="-120"/>
+              </a:rPr>
+              <a:t>⏳ Durée de vie d'une société</a:t>
+            </a:r>
+            <a:endParaRPr lang="en-US" sz="1050" dirty="0"/>
+          </a:p>
+        </p:txBody>
+      </p:sp>
+      <p:sp>
+        <p:nvSpPr>
+          <p:cNvPr id="18" name="Text 16"/>
+          <p:cNvSpPr/>
+          <p:nvPr/>
+        </p:nvSpPr>
+        <p:spPr>
+          <a:xfrm>
+            <a:off x="6144768" y="1371600"/>
+            <a:ext cx="2633472" cy="3163824"/>
+          </a:xfrm>
+          <a:prstGeom prst="rect">
+            <a:avLst/>
+          </a:prstGeom>
+          <a:noFill/>
+          <a:ln/>
+        </p:spPr>
+        <p:txBody>
+          <a:bodyPr wrap="square" rtlCol="0" anchor="t"/>
+          <a:lstStyle/>
+          <a:p>
+            <a:pPr marL="0" indent="0">
+              <a:buNone/>
+            </a:pPr>
+            <a:r>
+              <a:rPr lang="en-US" sz="950" dirty="0">
+                <a:solidFill>
+                  <a:srgbClr val="1E2D3D"/>
+                </a:solidFill>
+                <a:latin typeface="Calibri" pitchFamily="34" charset="0"/>
+                <a:ea typeface="Calibri" pitchFamily="34" charset="-122"/>
+                <a:cs typeface="Calibri" pitchFamily="34" charset="-120"/>
+              </a:rPr>
+              <a:t>Durée fixée dans les statuts : 99 ANS MAXIMUM (article 1838 du Code civil).</a:t>
+            </a:r>
+            <a:endParaRPr lang="en-US" sz="950" dirty="0"/>
+          </a:p>
+          <a:p>
+            <a:pPr marL="0" indent="0">
+              <a:buNone/>
+            </a:pPr>
+            <a:r>
+              <a:rPr lang="en-US" sz="950" dirty="0">
+                <a:solidFill>
+                  <a:srgbClr val="1E2D3D"/>
+                </a:solidFill>
+                <a:latin typeface="Calibri" pitchFamily="34" charset="0"/>
+                <a:ea typeface="Calibri" pitchFamily="34" charset="-122"/>
+                <a:cs typeface="Calibri" pitchFamily="34" charset="-120"/>
+              </a:rPr>
+              <a:t>Renouvelable indéfiniment, par décision des associés avant l'échéance.</a:t>
+            </a:r>
+            <a:endParaRPr lang="en-US" sz="950" dirty="0"/>
+          </a:p>
+          <a:p>
+            <a:pPr marL="0" indent="0">
+              <a:buNone/>
+            </a:pPr>
+            <a:r>
+              <a:rPr lang="en-US" sz="950" dirty="0">
+                <a:solidFill>
+                  <a:srgbClr val="1E2D3D"/>
+                </a:solidFill>
+                <a:latin typeface="Calibri" pitchFamily="34" charset="0"/>
+                <a:ea typeface="Calibri" pitchFamily="34" charset="-122"/>
+                <a:cs typeface="Calibri" pitchFamily="34" charset="-120"/>
+              </a:rPr>
+              <a:t>Si la durée n'est pas prorogée à temps → dissolution automatique de la société.</a:t>
+            </a:r>
+            <a:endParaRPr lang="en-US" sz="950" dirty="0"/>
+          </a:p>
+          <a:p>
+            <a:pPr marL="0" indent="0">
+              <a:buNone/>
+            </a:pPr>
+            <a:r>
+              <a:rPr lang="en-US" sz="950" dirty="0">
+                <a:solidFill>
+                  <a:srgbClr val="1E2D3D"/>
+                </a:solidFill>
+                <a:latin typeface="Calibri" pitchFamily="34" charset="0"/>
+                <a:ea typeface="Calibri" pitchFamily="34" charset="-122"/>
+                <a:cs typeface="Calibri" pitchFamily="34" charset="-120"/>
+              </a:rPr>
+              <a:t>L'EI n'a pas de durée fixée : elle dure tant que l'entrepreneur est en activité.</a:t>
+            </a:r>
+            <a:endParaRPr lang="en-US" sz="950" dirty="0"/>
+          </a:p>
+        </p:txBody>
+      </p:sp>
+      <p:sp>
+        <p:nvSpPr>
+          <p:cNvPr id="19" name="Shape 17"/>
+          <p:cNvSpPr/>
+          <p:nvPr/>
+        </p:nvSpPr>
+        <p:spPr>
+          <a:xfrm>
+            <a:off x="256032" y="4645152"/>
+            <a:ext cx="8631936" cy="402336"/>
+          </a:xfrm>
+          <a:prstGeom prst="rect">
+            <a:avLst/>
+          </a:prstGeom>
+          <a:solidFill>
+            <a:srgbClr val="EBF4FC"/>
+          </a:solidFill>
+          <a:ln w="10160">
+            <a:solidFill>
+              <a:srgbClr val="4A90C4"/>
+            </a:solidFill>
+            <a:prstDash val="solid"/>
+          </a:ln>
+        </p:spPr>
+        <p:txBody>
+          <a:bodyPr/>
+          <a:lstStyle/>
+          <a:p>
+            <a:endParaRPr lang="fr-FR"/>
+          </a:p>
+        </p:txBody>
+      </p:sp>
+      <p:sp>
+        <p:nvSpPr>
+          <p:cNvPr id="20" name="Text 18"/>
+          <p:cNvSpPr/>
+          <p:nvPr/>
+        </p:nvSpPr>
+        <p:spPr>
+          <a:xfrm>
+            <a:off x="384048" y="4663440"/>
+            <a:ext cx="8321040" cy="347472"/>
+          </a:xfrm>
+          <a:prstGeom prst="rect">
+            <a:avLst/>
+          </a:prstGeom>
+          <a:noFill/>
+          <a:ln/>
+        </p:spPr>
+        <p:txBody>
+          <a:bodyPr wrap="square" rtlCol="0" anchor="ctr"/>
+          <a:lstStyle/>
+          <a:p>
+            <a:pPr marL="0" indent="0">
+              <a:buNone/>
+            </a:pPr>
+            <a:r>
+              <a:rPr lang="en-US" sz="900" i="1" dirty="0">
+                <a:solidFill>
+                  <a:srgbClr val="1A3A5C"/>
+                </a:solidFill>
+                <a:latin typeface="Calibri" pitchFamily="34" charset="0"/>
+                <a:ea typeface="Calibri" pitchFamily="34" charset="-122"/>
+                <a:cs typeface="Calibri" pitchFamily="34" charset="-120"/>
+              </a:rPr>
+              <a:t>📌 Le non-respect du calendrier de libération du capital, ou de la durée de vie de la société, peut entraîner la nullité de certains actes ou la dissolution judiciaire.</a:t>
+            </a:r>
+            <a:endParaRPr lang="en-US" sz="900" dirty="0"/>
+          </a:p>
+        </p:txBody>
+      </p:sp>
+      <p:sp>
+        <p:nvSpPr>
+          <p:cNvPr id="21" name="Rectangle 20"/>
+          <p:cNvSpPr/>
+          <p:nvPr/>
+        </p:nvSpPr>
+        <p:spPr>
+          <a:xfrm>
+            <a:off x="0" y="0"/>
+            <a:ext cx="9144000" cy="251999"/>
+          </a:xfrm>
+          <a:prstGeom prst="rect">
+            <a:avLst/>
+          </a:prstGeom>
+          <a:solidFill>
+            <a:srgbClr val="0D2540"/>
+          </a:solidFill>
+          <a:ln>
+            <a:noFill/>
+          </a:ln>
+        </p:spPr>
+        <p:style>
+          <a:lnRef idx="1">
+            <a:schemeClr val="accent1"/>
+          </a:lnRef>
+          <a:fillRef idx="3">
+            <a:schemeClr val="accent1"/>
+          </a:fillRef>
+          <a:effectRef idx="2">
+            <a:schemeClr val="accent1"/>
+          </a:effectRef>
+          <a:fontRef idx="minor">
+            <a:schemeClr val="lt1"/>
+          </a:fontRef>
+        </p:style>
+        <p:txBody>
+          <a:bodyPr wrap="square" rtlCol="0" anchor="ctr"/>
+          <a:lstStyle/>
+          <a:p>
+            <a:pPr algn="ctr"/>
+            <a:r>
+              <a:rPr sz="1000" b="1">
+                <a:solidFill>
+                  <a:srgbClr val="00B4D8"/>
+                </a:solidFill>
+              </a:rPr>
+              <a:t>ÉPREUVE GESTION — Partie 1</a:t>
+            </a:r>
+          </a:p>
+        </p:txBody>
+      </p:sp>
+      <p:sp>
+        <p:nvSpPr>
+          <p:cNvPr id="22" name="Rectangle 21"/>
+          <p:cNvSpPr/>
+          <p:nvPr/>
+        </p:nvSpPr>
+        <p:spPr>
+          <a:xfrm>
+            <a:off x="0" y="0"/>
+            <a:ext cx="9144000" cy="251999"/>
+          </a:xfrm>
+          <a:prstGeom prst="rect">
+            <a:avLst/>
+          </a:prstGeom>
+          <a:solidFill>
+            <a:srgbClr val="0D2540"/>
+          </a:solidFill>
+          <a:ln>
+            <a:noFill/>
+          </a:ln>
+        </p:spPr>
+        <p:style>
+          <a:lnRef idx="1">
+            <a:schemeClr val="accent1"/>
+          </a:lnRef>
+          <a:fillRef idx="3">
+            <a:schemeClr val="accent1"/>
+          </a:fillRef>
+          <a:effectRef idx="2">
+            <a:schemeClr val="accent1"/>
+          </a:effectRef>
+          <a:fontRef idx="minor">
+            <a:schemeClr val="lt1"/>
+          </a:fontRef>
+        </p:style>
+        <p:txBody>
+          <a:bodyPr wrap="square" rtlCol="0" anchor="ctr"/>
+          <a:lstStyle/>
+          <a:p>
+            <a:pPr algn="ctr"/>
+            <a:r>
+              <a:rPr sz="1000" b="1">
+                <a:solidFill>
+                  <a:srgbClr val="00B4D8"/>
+                </a:solidFill>
+              </a:rPr>
+              <a:t>ÉPREUVE GESTION — Partie 1 sur 3</a:t>
+            </a:r>
+          </a:p>
+        </p:txBody>
+      </p:sp>
+    </p:spTree>
+  </p:cSld>
+  <p:clrMapOvr>
+    <a:masterClrMapping/>
+  </p:clrMapOvr>
+</p:sld>
+</file>
+
+<file path=ppt/slides/slide21.xml><?xml version="1.0" encoding="utf-8"?>
+<p:sld xmlns:a="http://schemas.openxmlformats.org/drawingml/2006/main" xmlns:r="http://schemas.openxmlformats.org/officeDocument/2006/relationships" xmlns:p="http://schemas.openxmlformats.org/presentationml/2006/main">
   <p:cSld name="Slide 12">
     <p:spTree>
       <p:nvGrpSpPr>
@@ -18312,7 +19271,7 @@
 </p:sld>
 </file>
 
-<file path=ppt/slides/slide21.xml><?xml version="1.0" encoding="utf-8"?>
+<file path=ppt/slides/slide22.xml><?xml version="1.0" encoding="utf-8"?>
 <p:sld xmlns:a="http://schemas.openxmlformats.org/drawingml/2006/main" xmlns:r="http://schemas.openxmlformats.org/officeDocument/2006/relationships" xmlns:p="http://schemas.openxmlformats.org/presentationml/2006/main">
   <p:cSld name="Slide 6">
     <p:spTree>
@@ -19167,7 +20126,7 @@
 </p:sld>
 </file>
 
-<file path=ppt/slides/slide22.xml><?xml version="1.0" encoding="utf-8"?>
+<file path=ppt/slides/slide23.xml><?xml version="1.0" encoding="utf-8"?>
 <p:sld xmlns:a="http://schemas.openxmlformats.org/drawingml/2006/main" xmlns:r="http://schemas.openxmlformats.org/officeDocument/2006/relationships" xmlns:p="http://schemas.openxmlformats.org/presentationml/2006/main">
   <p:cSld name="Slide 13">
     <p:spTree>
@@ -20306,7 +21265,7 @@
 </p:sld>
 </file>
 
-<file path=ppt/slides/slide23.xml><?xml version="1.0" encoding="utf-8"?>
+<file path=ppt/slides/slide24.xml><?xml version="1.0" encoding="utf-8"?>
 <p:sld xmlns:a="http://schemas.openxmlformats.org/drawingml/2006/main" xmlns:r="http://schemas.openxmlformats.org/officeDocument/2006/relationships" xmlns:p="http://schemas.openxmlformats.org/presentationml/2006/main">
   <p:cSld name="Slide 14">
     <p:spTree>
@@ -21466,7 +22425,7 @@
 </p:sld>
 </file>
 
-<file path=ppt/slides/slide24.xml><?xml version="1.0" encoding="utf-8"?>
+<file path=ppt/slides/slide25.xml><?xml version="1.0" encoding="utf-8"?>
 <p:sld xmlns:a="http://schemas.openxmlformats.org/drawingml/2006/main" xmlns:r="http://schemas.openxmlformats.org/officeDocument/2006/relationships" xmlns:p="http://schemas.openxmlformats.org/presentationml/2006/main">
   <p:cSld name="Slide 6">
     <p:spTree>
@@ -22253,7 +23212,7 @@
 </p:sld>
 </file>
 
-<file path=ppt/slides/slide25.xml><?xml version="1.0" encoding="utf-8"?>
+<file path=ppt/slides/slide26.xml><?xml version="1.0" encoding="utf-8"?>
 <p:sld xmlns:a="http://schemas.openxmlformats.org/drawingml/2006/main" xmlns:r="http://schemas.openxmlformats.org/officeDocument/2006/relationships" xmlns:p="http://schemas.openxmlformats.org/presentationml/2006/main">
   <p:cSld name="Slide 15">
     <p:spTree>
@@ -23194,7 +24153,7 @@
 </p:sld>
 </file>
 
-<file path=ppt/slides/slide26.xml><?xml version="1.0" encoding="utf-8"?>
+<file path=ppt/slides/slide27.xml><?xml version="1.0" encoding="utf-8"?>
 <p:sld xmlns:a="http://schemas.openxmlformats.org/drawingml/2006/main" xmlns:r="http://schemas.openxmlformats.org/officeDocument/2006/relationships" xmlns:p="http://schemas.openxmlformats.org/presentationml/2006/main">
   <p:cSld name="Slide 16">
     <p:spTree>
@@ -24839,7 +25798,7 @@
 </p:sld>
 </file>
 
-<file path=ppt/slides/slide27.xml><?xml version="1.0" encoding="utf-8"?>
+<file path=ppt/slides/slide28.xml><?xml version="1.0" encoding="utf-8"?>
 <p:sld xmlns:a="http://schemas.openxmlformats.org/drawingml/2006/main" xmlns:r="http://schemas.openxmlformats.org/officeDocument/2006/relationships" xmlns:p="http://schemas.openxmlformats.org/presentationml/2006/main">
   <p:cSld name="Slide 17">
     <p:spTree>
@@ -28867,7 +29826,7 @@
 </p:sld>
 </file>
 
-<file path=ppt/slides/slide28.xml><?xml version="1.0" encoding="utf-8"?>
+<file path=ppt/slides/slide29.xml><?xml version="1.0" encoding="utf-8"?>
 <p:sld xmlns:a="http://schemas.openxmlformats.org/drawingml/2006/main" xmlns:r="http://schemas.openxmlformats.org/officeDocument/2006/relationships" xmlns:p="http://schemas.openxmlformats.org/presentationml/2006/main">
   <p:cSld name="Slide 18">
     <p:spTree>
@@ -30099,894 +31058,6 @@
       <p:sp>
         <p:nvSpPr>
           <p:cNvPr id="31" name="Rectangle 30"/>
-          <p:cNvSpPr/>
-          <p:nvPr/>
-        </p:nvSpPr>
-        <p:spPr>
-          <a:xfrm>
-            <a:off x="0" y="0"/>
-            <a:ext cx="9144000" cy="251999"/>
-          </a:xfrm>
-          <a:prstGeom prst="rect">
-            <a:avLst/>
-          </a:prstGeom>
-          <a:solidFill>
-            <a:srgbClr val="0D2540"/>
-          </a:solidFill>
-          <a:ln>
-            <a:noFill/>
-          </a:ln>
-        </p:spPr>
-        <p:style>
-          <a:lnRef idx="1">
-            <a:schemeClr val="accent1"/>
-          </a:lnRef>
-          <a:fillRef idx="3">
-            <a:schemeClr val="accent1"/>
-          </a:fillRef>
-          <a:effectRef idx="2">
-            <a:schemeClr val="accent1"/>
-          </a:effectRef>
-          <a:fontRef idx="minor">
-            <a:schemeClr val="lt1"/>
-          </a:fontRef>
-        </p:style>
-        <p:txBody>
-          <a:bodyPr wrap="square" rtlCol="0" anchor="ctr"/>
-          <a:lstStyle/>
-          <a:p>
-            <a:pPr algn="ctr"/>
-            <a:r>
-              <a:rPr sz="1000" b="1">
-                <a:solidFill>
-                  <a:srgbClr val="00B4D8"/>
-                </a:solidFill>
-              </a:rPr>
-              <a:t>ÉPREUVE GESTION — Partie 1 sur 3</a:t>
-            </a:r>
-          </a:p>
-        </p:txBody>
-      </p:sp>
-    </p:spTree>
-  </p:cSld>
-  <p:clrMapOvr>
-    <a:masterClrMapping/>
-  </p:clrMapOvr>
-</p:sld>
-</file>
-
-<file path=ppt/slides/slide29.xml><?xml version="1.0" encoding="utf-8"?>
-<p:sld xmlns:a="http://schemas.openxmlformats.org/drawingml/2006/main" xmlns:r="http://schemas.openxmlformats.org/officeDocument/2006/relationships" xmlns:p="http://schemas.openxmlformats.org/presentationml/2006/main">
-  <p:cSld name="Slide 19">
-    <p:spTree>
-      <p:nvGrpSpPr>
-        <p:cNvPr id="1" name=""/>
-        <p:cNvGrpSpPr/>
-        <p:nvPr/>
-      </p:nvGrpSpPr>
-      <p:grpSpPr>
-        <a:xfrm>
-          <a:off x="0" y="0"/>
-          <a:ext cx="0" cy="0"/>
-          <a:chOff x="0" y="0"/>
-          <a:chExt cx="0" cy="0"/>
-        </a:xfrm>
-      </p:grpSpPr>
-      <p:sp>
-        <p:nvSpPr>
-          <p:cNvPr id="2" name="Shape 0"/>
-          <p:cNvSpPr/>
-          <p:nvPr/>
-        </p:nvSpPr>
-        <p:spPr>
-          <a:xfrm>
-            <a:off x="0" y="0"/>
-            <a:ext cx="9144000" cy="5148072"/>
-          </a:xfrm>
-          <a:prstGeom prst="rect">
-            <a:avLst/>
-          </a:prstGeom>
-          <a:solidFill>
-            <a:srgbClr val="F4F7FB"/>
-          </a:solidFill>
-          <a:ln w="12700">
-            <a:solidFill>
-              <a:srgbClr val="F4F7FB"/>
-            </a:solidFill>
-            <a:prstDash val="solid"/>
-          </a:ln>
-        </p:spPr>
-        <p:txBody>
-          <a:bodyPr/>
-          <a:lstStyle/>
-          <a:p>
-            <a:endParaRPr lang="fr-FR"/>
-          </a:p>
-        </p:txBody>
-      </p:sp>
-      <p:sp>
-        <p:nvSpPr>
-          <p:cNvPr id="3" name="Shape 1"/>
-          <p:cNvSpPr/>
-          <p:nvPr/>
-        </p:nvSpPr>
-        <p:spPr>
-          <a:xfrm>
-            <a:off x="0" y="0"/>
-            <a:ext cx="9144000" cy="969264"/>
-          </a:xfrm>
-          <a:prstGeom prst="rect">
-            <a:avLst/>
-          </a:prstGeom>
-          <a:solidFill>
-            <a:srgbClr val="E87722"/>
-          </a:solidFill>
-          <a:ln w="12700">
-            <a:solidFill>
-              <a:srgbClr val="E87722"/>
-            </a:solidFill>
-            <a:prstDash val="solid"/>
-          </a:ln>
-        </p:spPr>
-        <p:txBody>
-          <a:bodyPr/>
-          <a:lstStyle/>
-          <a:p>
-            <a:endParaRPr lang="fr-FR"/>
-          </a:p>
-        </p:txBody>
-      </p:sp>
-      <p:sp>
-        <p:nvSpPr>
-          <p:cNvPr id="4" name="Text 2"/>
-          <p:cNvSpPr/>
-          <p:nvPr/>
-        </p:nvSpPr>
-        <p:spPr>
-          <a:xfrm>
-            <a:off x="365760" y="0"/>
-            <a:ext cx="8412480" cy="603504"/>
-          </a:xfrm>
-          <a:prstGeom prst="rect">
-            <a:avLst/>
-          </a:prstGeom>
-          <a:noFill/>
-          <a:ln/>
-        </p:spPr>
-        <p:txBody>
-          <a:bodyPr wrap="square" rtlCol="0" anchor="b"/>
-          <a:lstStyle/>
-          <a:p>
-            <a:pPr marL="0" indent="0">
-              <a:buNone/>
-            </a:pPr>
-            <a:r>
-              <a:rPr lang="en-US" sz="1900" b="1" dirty="0">
-                <a:solidFill>
-                  <a:srgbClr val="FFFFFF"/>
-                </a:solidFill>
-                <a:latin typeface="Calibri" pitchFamily="34" charset="0"/>
-                <a:ea typeface="Calibri" pitchFamily="34" charset="-122"/>
-                <a:cs typeface="Calibri" pitchFamily="34" charset="-120"/>
-              </a:rPr>
-              <a:t>Le bilan — À quoi ça sert ?</a:t>
-            </a:r>
-            <a:endParaRPr lang="en-US" sz="1900" dirty="0"/>
-          </a:p>
-        </p:txBody>
-      </p:sp>
-      <p:sp>
-        <p:nvSpPr>
-          <p:cNvPr id="5" name="Text 3"/>
-          <p:cNvSpPr/>
-          <p:nvPr/>
-        </p:nvSpPr>
-        <p:spPr>
-          <a:xfrm>
-            <a:off x="365760" y="621792"/>
-            <a:ext cx="8412480" cy="329184"/>
-          </a:xfrm>
-          <a:prstGeom prst="rect">
-            <a:avLst/>
-          </a:prstGeom>
-          <a:noFill/>
-          <a:ln/>
-        </p:spPr>
-        <p:txBody>
-          <a:bodyPr wrap="square" rtlCol="0" anchor="ctr"/>
-          <a:lstStyle/>
-          <a:p>
-            <a:pPr marL="0" indent="0">
-              <a:buNone/>
-            </a:pPr>
-            <a:r>
-              <a:rPr lang="en-US" sz="1050" i="1" dirty="0">
-                <a:solidFill>
-                  <a:srgbClr val="CADCFC"/>
-                </a:solidFill>
-                <a:latin typeface="Calibri" pitchFamily="34" charset="0"/>
-                <a:ea typeface="Calibri" pitchFamily="34" charset="-122"/>
-                <a:cs typeface="Calibri" pitchFamily="34" charset="-120"/>
-              </a:rPr>
-              <a:t>Mesurer la SANTÉ FINANCIÈRE de l'entreprise à un instant T</a:t>
-            </a:r>
-            <a:endParaRPr lang="en-US" sz="1050" dirty="0"/>
-          </a:p>
-        </p:txBody>
-      </p:sp>
-      <p:sp>
-        <p:nvSpPr>
-          <p:cNvPr id="6" name="Text 4"/>
-          <p:cNvSpPr/>
-          <p:nvPr/>
-        </p:nvSpPr>
-        <p:spPr>
-          <a:xfrm>
-            <a:off x="274320" y="4892040"/>
-            <a:ext cx="8046720" cy="201168"/>
-          </a:xfrm>
-          <a:prstGeom prst="rect">
-            <a:avLst/>
-          </a:prstGeom>
-          <a:noFill/>
-          <a:ln/>
-        </p:spPr>
-        <p:txBody>
-          <a:bodyPr wrap="square" rtlCol="0" anchor="ctr"/>
-          <a:lstStyle/>
-          <a:p>
-            <a:pPr marL="0" indent="0" algn="ctr">
-              <a:buNone/>
-            </a:pPr>
-            <a:r>
-              <a:rPr lang="en-US" sz="750" dirty="0">
-                <a:solidFill>
-                  <a:srgbClr val="9AAABB"/>
-                </a:solidFill>
-                <a:latin typeface="Calibri" pitchFamily="34" charset="0"/>
-                <a:ea typeface="Calibri" pitchFamily="34" charset="-122"/>
-                <a:cs typeface="Calibri" pitchFamily="34" charset="-120"/>
-              </a:rPr>
-              <a:t>FTRANSPORT - SERVICES PRO  •  Formation certifiée Qualiopi  •  Éligible CPF  •  Lyon</a:t>
-            </a:r>
-            <a:endParaRPr lang="en-US" sz="750" dirty="0"/>
-          </a:p>
-        </p:txBody>
-      </p:sp>
-      <p:sp>
-        <p:nvSpPr>
-          <p:cNvPr id="7" name="Shape 5"/>
-          <p:cNvSpPr/>
-          <p:nvPr/>
-        </p:nvSpPr>
-        <p:spPr>
-          <a:xfrm>
-            <a:off x="274320" y="987552"/>
-            <a:ext cx="8595360" cy="585216"/>
-          </a:xfrm>
-          <a:prstGeom prst="rect">
-            <a:avLst/>
-          </a:prstGeom>
-          <a:solidFill>
-            <a:srgbClr val="EBF4FC"/>
-          </a:solidFill>
-          <a:ln w="12700">
-            <a:solidFill>
-              <a:srgbClr val="4A90C4"/>
-            </a:solidFill>
-            <a:prstDash val="solid"/>
-          </a:ln>
-        </p:spPr>
-        <p:txBody>
-          <a:bodyPr/>
-          <a:lstStyle/>
-          <a:p>
-            <a:endParaRPr lang="fr-FR"/>
-          </a:p>
-        </p:txBody>
-      </p:sp>
-      <p:sp>
-        <p:nvSpPr>
-          <p:cNvPr id="8" name="Text 6"/>
-          <p:cNvSpPr/>
-          <p:nvPr/>
-        </p:nvSpPr>
-        <p:spPr>
-          <a:xfrm>
-            <a:off x="402336" y="1005840"/>
-            <a:ext cx="8321040" cy="548640"/>
-          </a:xfrm>
-          <a:prstGeom prst="rect">
-            <a:avLst/>
-          </a:prstGeom>
-          <a:noFill/>
-          <a:ln/>
-        </p:spPr>
-        <p:txBody>
-          <a:bodyPr wrap="square" rtlCol="0" anchor="ctr"/>
-          <a:lstStyle/>
-          <a:p>
-            <a:pPr marL="0" indent="0">
-              <a:buNone/>
-            </a:pPr>
-            <a:r>
-              <a:rPr lang="en-US" sz="950" b="1" dirty="0">
-                <a:solidFill>
-                  <a:srgbClr val="1A3A5C"/>
-                </a:solidFill>
-                <a:latin typeface="Calibri" pitchFamily="34" charset="0"/>
-                <a:ea typeface="Calibri" pitchFamily="34" charset="-122"/>
-                <a:cs typeface="Calibri" pitchFamily="34" charset="-120"/>
-              </a:rPr>
-              <a:t>Le bilan est une PHOTOGRAPHIE PATRIMONIALE de l'entreprise à une date précise (31/12 en général). Il sert à mesurer la santé financière : ce que l'entreprise POSSÈDE (actif) et ce qu'elle DOIT (passif). Il permet aux banques, associés et investisseurs d'évaluer la solidité de l'entreprise. TOTAL ACTIF = TOTAL PASSIF.</a:t>
-            </a:r>
-            <a:endParaRPr lang="en-US" sz="950" dirty="0"/>
-          </a:p>
-        </p:txBody>
-      </p:sp>
-      <p:sp>
-        <p:nvSpPr>
-          <p:cNvPr id="9" name="Shape 7"/>
-          <p:cNvSpPr/>
-          <p:nvPr/>
-        </p:nvSpPr>
-        <p:spPr>
-          <a:xfrm>
-            <a:off x="274320" y="1572768"/>
-            <a:ext cx="4160520" cy="3200400"/>
-          </a:xfrm>
-          <a:prstGeom prst="rect">
-            <a:avLst/>
-          </a:prstGeom>
-          <a:solidFill>
-            <a:srgbClr val="EBF4FC"/>
-          </a:solidFill>
-          <a:ln w="10160">
-            <a:solidFill>
-              <a:srgbClr val="4A90C4"/>
-            </a:solidFill>
-            <a:prstDash val="solid"/>
-          </a:ln>
-        </p:spPr>
-        <p:txBody>
-          <a:bodyPr/>
-          <a:lstStyle/>
-          <a:p>
-            <a:endParaRPr lang="fr-FR"/>
-          </a:p>
-        </p:txBody>
-      </p:sp>
-      <p:sp>
-        <p:nvSpPr>
-          <p:cNvPr id="10" name="Shape 8"/>
-          <p:cNvSpPr/>
-          <p:nvPr/>
-        </p:nvSpPr>
-        <p:spPr>
-          <a:xfrm>
-            <a:off x="274320" y="1572768"/>
-            <a:ext cx="4160520" cy="329184"/>
-          </a:xfrm>
-          <a:prstGeom prst="rect">
-            <a:avLst/>
-          </a:prstGeom>
-          <a:solidFill>
-            <a:srgbClr val="1A3A5C"/>
-          </a:solidFill>
-          <a:ln w="12700">
-            <a:solidFill>
-              <a:srgbClr val="1A3A5C"/>
-            </a:solidFill>
-            <a:prstDash val="solid"/>
-          </a:ln>
-        </p:spPr>
-        <p:txBody>
-          <a:bodyPr/>
-          <a:lstStyle/>
-          <a:p>
-            <a:endParaRPr lang="fr-FR"/>
-          </a:p>
-        </p:txBody>
-      </p:sp>
-      <p:sp>
-        <p:nvSpPr>
-          <p:cNvPr id="11" name="Text 9"/>
-          <p:cNvSpPr/>
-          <p:nvPr/>
-        </p:nvSpPr>
-        <p:spPr>
-          <a:xfrm>
-            <a:off x="365760" y="1572768"/>
-            <a:ext cx="3977640" cy="329184"/>
-          </a:xfrm>
-          <a:prstGeom prst="rect">
-            <a:avLst/>
-          </a:prstGeom>
-          <a:noFill/>
-          <a:ln/>
-        </p:spPr>
-        <p:txBody>
-          <a:bodyPr wrap="square" rtlCol="0" anchor="ctr"/>
-          <a:lstStyle/>
-          <a:p>
-            <a:pPr marL="0" indent="0">
-              <a:buNone/>
-            </a:pPr>
-            <a:r>
-              <a:rPr lang="en-US" sz="1100" b="1" dirty="0">
-                <a:solidFill>
-                  <a:srgbClr val="FFFFFF"/>
-                </a:solidFill>
-                <a:latin typeface="Calibri" pitchFamily="34" charset="0"/>
-                <a:ea typeface="Calibri" pitchFamily="34" charset="-122"/>
-                <a:cs typeface="Calibri" pitchFamily="34" charset="-120"/>
-              </a:rPr>
-              <a:t>📦 L'actif</a:t>
-            </a:r>
-            <a:endParaRPr lang="en-US" sz="1100" dirty="0"/>
-          </a:p>
-        </p:txBody>
-      </p:sp>
-      <p:sp>
-        <p:nvSpPr>
-          <p:cNvPr id="12" name="Text 10"/>
-          <p:cNvSpPr/>
-          <p:nvPr/>
-        </p:nvSpPr>
-        <p:spPr>
-          <a:xfrm>
-            <a:off x="384048" y="1938528"/>
-            <a:ext cx="3931920" cy="2779776"/>
-          </a:xfrm>
-          <a:prstGeom prst="rect">
-            <a:avLst/>
-          </a:prstGeom>
-          <a:noFill/>
-          <a:ln/>
-        </p:spPr>
-        <p:txBody>
-          <a:bodyPr wrap="square" rtlCol="0" anchor="t"/>
-          <a:lstStyle/>
-          <a:p>
-            <a:pPr marL="0" indent="0">
-              <a:buNone/>
-            </a:pPr>
-            <a:r>
-              <a:rPr lang="en-US" sz="920" dirty="0">
-                <a:solidFill>
-                  <a:srgbClr val="1E2D3D"/>
-                </a:solidFill>
-                <a:latin typeface="Calibri" pitchFamily="34" charset="0"/>
-                <a:ea typeface="Calibri" pitchFamily="34" charset="-122"/>
-                <a:cs typeface="Calibri" pitchFamily="34" charset="-120"/>
-              </a:rPr>
-              <a:t>Les actifs sont les éléments en POSSESSION de l'entreprise :</a:t>
-            </a:r>
-            <a:endParaRPr lang="en-US" sz="920" dirty="0"/>
-          </a:p>
-          <a:p>
-            <a:pPr marL="0" indent="0">
-              <a:buNone/>
-            </a:pPr>
-            <a:r>
-              <a:rPr lang="en-US" sz="920" dirty="0">
-                <a:solidFill>
-                  <a:srgbClr val="1E2D3D"/>
-                </a:solidFill>
-                <a:latin typeface="Calibri" pitchFamily="34" charset="0"/>
-                <a:ea typeface="Calibri" pitchFamily="34" charset="-122"/>
-                <a:cs typeface="Calibri" pitchFamily="34" charset="-120"/>
-              </a:rPr>
-              <a:t>→ Immobilisations, bien stocks, créances sur débiteurs…</a:t>
-            </a:r>
-            <a:endParaRPr lang="en-US" sz="920" dirty="0"/>
-          </a:p>
-          <a:p>
-            <a:pPr marL="0" indent="0">
-              <a:buNone/>
-            </a:pPr>
-            <a:endParaRPr lang="en-US" sz="920" dirty="0"/>
-          </a:p>
-          <a:p>
-            <a:pPr marL="0" indent="0">
-              <a:buNone/>
-            </a:pPr>
-            <a:r>
-              <a:rPr lang="en-US" sz="920" dirty="0">
-                <a:solidFill>
-                  <a:srgbClr val="1E2D3D"/>
-                </a:solidFill>
-                <a:latin typeface="Calibri" pitchFamily="34" charset="0"/>
-                <a:ea typeface="Calibri" pitchFamily="34" charset="-122"/>
-                <a:cs typeface="Calibri" pitchFamily="34" charset="-120"/>
-              </a:rPr>
-              <a:t>L'actif se décompose en 2 parties :</a:t>
-            </a:r>
-            <a:endParaRPr lang="en-US" sz="920" dirty="0"/>
-          </a:p>
-          <a:p>
-            <a:pPr marL="0" indent="0">
-              <a:buNone/>
-            </a:pPr>
-            <a:r>
-              <a:rPr lang="en-US" sz="920" dirty="0">
-                <a:solidFill>
-                  <a:srgbClr val="1E2D3D"/>
-                </a:solidFill>
-                <a:latin typeface="Calibri" pitchFamily="34" charset="0"/>
-                <a:ea typeface="Calibri" pitchFamily="34" charset="-122"/>
-                <a:cs typeface="Calibri" pitchFamily="34" charset="-120"/>
-              </a:rPr>
-              <a:t>• Actif immobilisé (durée min. 1 an) : éléments destinés à servir de façon durable</a:t>
-            </a:r>
-            <a:endParaRPr lang="en-US" sz="920" dirty="0"/>
-          </a:p>
-          <a:p>
-            <a:pPr marL="0" indent="0">
-              <a:buNone/>
-            </a:pPr>
-            <a:r>
-              <a:rPr lang="en-US" sz="920" dirty="0">
-                <a:solidFill>
-                  <a:srgbClr val="1E2D3D"/>
-                </a:solidFill>
-                <a:latin typeface="Calibri" pitchFamily="34" charset="0"/>
-                <a:ea typeface="Calibri" pitchFamily="34" charset="-122"/>
-                <a:cs typeface="Calibri" pitchFamily="34" charset="-120"/>
-              </a:rPr>
-              <a:t>• Actif circulant : stocks, créances clients, disponibilités (banque)</a:t>
-            </a:r>
-            <a:endParaRPr lang="en-US" sz="920" dirty="0"/>
-          </a:p>
-        </p:txBody>
-      </p:sp>
-      <p:sp>
-        <p:nvSpPr>
-          <p:cNvPr id="13" name="Shape 11"/>
-          <p:cNvSpPr/>
-          <p:nvPr/>
-        </p:nvSpPr>
-        <p:spPr>
-          <a:xfrm>
-            <a:off x="4709160" y="1572768"/>
-            <a:ext cx="4160520" cy="3200400"/>
-          </a:xfrm>
-          <a:prstGeom prst="rect">
-            <a:avLst/>
-          </a:prstGeom>
-          <a:solidFill>
-            <a:srgbClr val="FFF8F0"/>
-          </a:solidFill>
-          <a:ln w="10160">
-            <a:solidFill>
-              <a:srgbClr val="E87722"/>
-            </a:solidFill>
-            <a:prstDash val="solid"/>
-          </a:ln>
-        </p:spPr>
-        <p:txBody>
-          <a:bodyPr/>
-          <a:lstStyle/>
-          <a:p>
-            <a:endParaRPr lang="fr-FR"/>
-          </a:p>
-        </p:txBody>
-      </p:sp>
-      <p:sp>
-        <p:nvSpPr>
-          <p:cNvPr id="14" name="Shape 12"/>
-          <p:cNvSpPr/>
-          <p:nvPr/>
-        </p:nvSpPr>
-        <p:spPr>
-          <a:xfrm>
-            <a:off x="4709160" y="1572768"/>
-            <a:ext cx="4160520" cy="329184"/>
-          </a:xfrm>
-          <a:prstGeom prst="rect">
-            <a:avLst/>
-          </a:prstGeom>
-          <a:solidFill>
-            <a:srgbClr val="E87722"/>
-          </a:solidFill>
-          <a:ln w="12700">
-            <a:solidFill>
-              <a:srgbClr val="E87722"/>
-            </a:solidFill>
-            <a:prstDash val="solid"/>
-          </a:ln>
-        </p:spPr>
-        <p:txBody>
-          <a:bodyPr/>
-          <a:lstStyle/>
-          <a:p>
-            <a:endParaRPr lang="fr-FR"/>
-          </a:p>
-        </p:txBody>
-      </p:sp>
-      <p:sp>
-        <p:nvSpPr>
-          <p:cNvPr id="15" name="Text 13"/>
-          <p:cNvSpPr/>
-          <p:nvPr/>
-        </p:nvSpPr>
-        <p:spPr>
-          <a:xfrm>
-            <a:off x="4800600" y="1572768"/>
-            <a:ext cx="3977640" cy="329184"/>
-          </a:xfrm>
-          <a:prstGeom prst="rect">
-            <a:avLst/>
-          </a:prstGeom>
-          <a:noFill/>
-          <a:ln/>
-        </p:spPr>
-        <p:txBody>
-          <a:bodyPr wrap="square" rtlCol="0" anchor="ctr"/>
-          <a:lstStyle/>
-          <a:p>
-            <a:pPr marL="0" indent="0">
-              <a:buNone/>
-            </a:pPr>
-            <a:r>
-              <a:rPr lang="en-US" sz="1100" b="1" dirty="0">
-                <a:solidFill>
-                  <a:srgbClr val="FFFFFF"/>
-                </a:solidFill>
-                <a:latin typeface="Calibri" pitchFamily="34" charset="0"/>
-                <a:ea typeface="Calibri" pitchFamily="34" charset="-122"/>
-                <a:cs typeface="Calibri" pitchFamily="34" charset="-120"/>
-              </a:rPr>
-              <a:t>💳 Le passif</a:t>
-            </a:r>
-            <a:endParaRPr lang="en-US" sz="1100" dirty="0"/>
-          </a:p>
-        </p:txBody>
-      </p:sp>
-      <p:sp>
-        <p:nvSpPr>
-          <p:cNvPr id="16" name="Text 14"/>
-          <p:cNvSpPr/>
-          <p:nvPr/>
-        </p:nvSpPr>
-        <p:spPr>
-          <a:xfrm>
-            <a:off x="4818888" y="1938528"/>
-            <a:ext cx="3931920" cy="2779776"/>
-          </a:xfrm>
-          <a:prstGeom prst="rect">
-            <a:avLst/>
-          </a:prstGeom>
-          <a:noFill/>
-          <a:ln/>
-        </p:spPr>
-        <p:txBody>
-          <a:bodyPr wrap="square" rtlCol="0" anchor="t"/>
-          <a:lstStyle/>
-          <a:p>
-            <a:pPr marL="0" indent="0">
-              <a:buNone/>
-            </a:pPr>
-            <a:r>
-              <a:rPr lang="en-US" sz="920" dirty="0">
-                <a:solidFill>
-                  <a:srgbClr val="1E2D3D"/>
-                </a:solidFill>
-                <a:latin typeface="Calibri" pitchFamily="34" charset="0"/>
-                <a:ea typeface="Calibri" pitchFamily="34" charset="-122"/>
-                <a:cs typeface="Calibri" pitchFamily="34" charset="-120"/>
-              </a:rPr>
-              <a:t>Le passif est composé des RESSOURCES de l'entreprise :</a:t>
-            </a:r>
-            <a:endParaRPr lang="en-US" sz="920" dirty="0"/>
-          </a:p>
-          <a:p>
-            <a:pPr marL="0" indent="0">
-              <a:buNone/>
-            </a:pPr>
-            <a:r>
-              <a:rPr lang="en-US" sz="920" dirty="0">
-                <a:solidFill>
-                  <a:srgbClr val="1E2D3D"/>
-                </a:solidFill>
-                <a:latin typeface="Calibri" pitchFamily="34" charset="0"/>
-                <a:ea typeface="Calibri" pitchFamily="34" charset="-122"/>
-                <a:cs typeface="Calibri" pitchFamily="34" charset="-120"/>
-              </a:rPr>
-              <a:t>→ Apports, dettes, bénéfices…</a:t>
-            </a:r>
-            <a:endParaRPr lang="en-US" sz="920" dirty="0"/>
-          </a:p>
-          <a:p>
-            <a:pPr marL="0" indent="0">
-              <a:buNone/>
-            </a:pPr>
-            <a:endParaRPr lang="en-US" sz="920" dirty="0"/>
-          </a:p>
-          <a:p>
-            <a:pPr marL="0" indent="0">
-              <a:buNone/>
-            </a:pPr>
-            <a:r>
-              <a:rPr lang="en-US" sz="920" dirty="0">
-                <a:solidFill>
-                  <a:srgbClr val="1E2D3D"/>
-                </a:solidFill>
-                <a:latin typeface="Calibri" pitchFamily="34" charset="0"/>
-                <a:ea typeface="Calibri" pitchFamily="34" charset="-122"/>
-                <a:cs typeface="Calibri" pitchFamily="34" charset="-120"/>
-              </a:rPr>
-              <a:t>• Capitaux propres : capital social + résultat de l'exercice</a:t>
-            </a:r>
-            <a:endParaRPr lang="en-US" sz="920" dirty="0"/>
-          </a:p>
-          <a:p>
-            <a:pPr marL="0" indent="0">
-              <a:buNone/>
-            </a:pPr>
-            <a:r>
-              <a:rPr lang="en-US" sz="920" dirty="0">
-                <a:solidFill>
-                  <a:srgbClr val="1E2D3D"/>
-                </a:solidFill>
-                <a:latin typeface="Calibri" pitchFamily="34" charset="0"/>
-                <a:ea typeface="Calibri" pitchFamily="34" charset="-122"/>
-                <a:cs typeface="Calibri" pitchFamily="34" charset="-120"/>
-              </a:rPr>
-              <a:t>• Dettes : fournisseurs, emprunts, dettes fiscales et sociales</a:t>
-            </a:r>
-            <a:endParaRPr lang="en-US" sz="920" dirty="0"/>
-          </a:p>
-          <a:p>
-            <a:pPr marL="0" indent="0">
-              <a:buNone/>
-            </a:pPr>
-            <a:endParaRPr lang="en-US" sz="920" dirty="0"/>
-          </a:p>
-          <a:p>
-            <a:pPr marL="0" indent="0">
-              <a:buNone/>
-            </a:pPr>
-            <a:r>
-              <a:rPr lang="en-US" sz="920" dirty="0">
-                <a:solidFill>
-                  <a:srgbClr val="1E2D3D"/>
-                </a:solidFill>
-                <a:latin typeface="Calibri" pitchFamily="34" charset="0"/>
-                <a:ea typeface="Calibri" pitchFamily="34" charset="-122"/>
-                <a:cs typeface="Calibri" pitchFamily="34" charset="-120"/>
-              </a:rPr>
-              <a:t>Le capital social est effectivement une dette pour l'entreprise car il appartient aux associés.</a:t>
-            </a:r>
-            <a:endParaRPr lang="en-US" sz="920" dirty="0"/>
-          </a:p>
-        </p:txBody>
-      </p:sp>
-      <p:sp>
-        <p:nvSpPr>
-          <p:cNvPr id="17" name="Shape 15"/>
-          <p:cNvSpPr/>
-          <p:nvPr/>
-        </p:nvSpPr>
-        <p:spPr>
-          <a:xfrm>
-            <a:off x="274320" y="4828032"/>
-            <a:ext cx="8595360" cy="201168"/>
-          </a:xfrm>
-          <a:prstGeom prst="rect">
-            <a:avLst/>
-          </a:prstGeom>
-          <a:solidFill>
-            <a:srgbClr val="1A3A5C"/>
-          </a:solidFill>
-          <a:ln w="12700">
-            <a:solidFill>
-              <a:srgbClr val="1A3A5C"/>
-            </a:solidFill>
-            <a:prstDash val="solid"/>
-          </a:ln>
-        </p:spPr>
-        <p:txBody>
-          <a:bodyPr/>
-          <a:lstStyle/>
-          <a:p>
-            <a:endParaRPr lang="fr-FR"/>
-          </a:p>
-        </p:txBody>
-      </p:sp>
-      <p:sp>
-        <p:nvSpPr>
-          <p:cNvPr id="18" name="Text 16"/>
-          <p:cNvSpPr/>
-          <p:nvPr/>
-        </p:nvSpPr>
-        <p:spPr>
-          <a:xfrm>
-            <a:off x="365760" y="4828032"/>
-            <a:ext cx="8412480" cy="201168"/>
-          </a:xfrm>
-          <a:prstGeom prst="rect">
-            <a:avLst/>
-          </a:prstGeom>
-          <a:noFill/>
-          <a:ln/>
-        </p:spPr>
-        <p:txBody>
-          <a:bodyPr wrap="square" rtlCol="0" anchor="ctr"/>
-          <a:lstStyle/>
-          <a:p>
-            <a:pPr marL="0" indent="0" algn="ctr">
-              <a:buNone/>
-            </a:pPr>
-            <a:r>
-              <a:rPr lang="en-US" sz="900" b="1" dirty="0">
-                <a:solidFill>
-                  <a:srgbClr val="FFFFFF"/>
-                </a:solidFill>
-                <a:latin typeface="Calibri" pitchFamily="34" charset="0"/>
-                <a:ea typeface="Calibri" pitchFamily="34" charset="-122"/>
-                <a:cs typeface="Calibri" pitchFamily="34" charset="-120"/>
-              </a:rPr>
-              <a:t>Le passif finance l'actif. C'est pour cela que TOTAL ACTIF = TOTAL PASSIF (toujours équilibré).</a:t>
-            </a:r>
-            <a:endParaRPr lang="en-US" sz="900" dirty="0"/>
-          </a:p>
-        </p:txBody>
-      </p:sp>
-      <p:sp>
-        <p:nvSpPr>
-          <p:cNvPr id="19" name="Rectangle 18"/>
-          <p:cNvSpPr/>
-          <p:nvPr/>
-        </p:nvSpPr>
-        <p:spPr>
-          <a:xfrm>
-            <a:off x="0" y="0"/>
-            <a:ext cx="9144000" cy="251999"/>
-          </a:xfrm>
-          <a:prstGeom prst="rect">
-            <a:avLst/>
-          </a:prstGeom>
-          <a:solidFill>
-            <a:srgbClr val="0D2540"/>
-          </a:solidFill>
-          <a:ln>
-            <a:noFill/>
-          </a:ln>
-        </p:spPr>
-        <p:style>
-          <a:lnRef idx="1">
-            <a:schemeClr val="accent1"/>
-          </a:lnRef>
-          <a:fillRef idx="3">
-            <a:schemeClr val="accent1"/>
-          </a:fillRef>
-          <a:effectRef idx="2">
-            <a:schemeClr val="accent1"/>
-          </a:effectRef>
-          <a:fontRef idx="minor">
-            <a:schemeClr val="lt1"/>
-          </a:fontRef>
-        </p:style>
-        <p:txBody>
-          <a:bodyPr wrap="square" rtlCol="0" anchor="ctr"/>
-          <a:lstStyle/>
-          <a:p>
-            <a:pPr algn="ctr"/>
-            <a:r>
-              <a:rPr sz="1000" b="1">
-                <a:solidFill>
-                  <a:srgbClr val="00B4D8"/>
-                </a:solidFill>
-              </a:rPr>
-              <a:t>ÉPREUVE GESTION — Partie 1</a:t>
-            </a:r>
-          </a:p>
-        </p:txBody>
-      </p:sp>
-      <p:sp>
-        <p:nvSpPr>
-          <p:cNvPr id="20" name="Rectangle 19"/>
           <p:cNvSpPr/>
           <p:nvPr/>
         </p:nvSpPr>
@@ -31392,6 +31463,894 @@
 
 <file path=ppt/slides/slide30.xml><?xml version="1.0" encoding="utf-8"?>
 <p:sld xmlns:a="http://schemas.openxmlformats.org/drawingml/2006/main" xmlns:r="http://schemas.openxmlformats.org/officeDocument/2006/relationships" xmlns:p="http://schemas.openxmlformats.org/presentationml/2006/main">
+  <p:cSld name="Slide 19">
+    <p:spTree>
+      <p:nvGrpSpPr>
+        <p:cNvPr id="1" name=""/>
+        <p:cNvGrpSpPr/>
+        <p:nvPr/>
+      </p:nvGrpSpPr>
+      <p:grpSpPr>
+        <a:xfrm>
+          <a:off x="0" y="0"/>
+          <a:ext cx="0" cy="0"/>
+          <a:chOff x="0" y="0"/>
+          <a:chExt cx="0" cy="0"/>
+        </a:xfrm>
+      </p:grpSpPr>
+      <p:sp>
+        <p:nvSpPr>
+          <p:cNvPr id="2" name="Shape 0"/>
+          <p:cNvSpPr/>
+          <p:nvPr/>
+        </p:nvSpPr>
+        <p:spPr>
+          <a:xfrm>
+            <a:off x="0" y="0"/>
+            <a:ext cx="9144000" cy="5148072"/>
+          </a:xfrm>
+          <a:prstGeom prst="rect">
+            <a:avLst/>
+          </a:prstGeom>
+          <a:solidFill>
+            <a:srgbClr val="F4F7FB"/>
+          </a:solidFill>
+          <a:ln w="12700">
+            <a:solidFill>
+              <a:srgbClr val="F4F7FB"/>
+            </a:solidFill>
+            <a:prstDash val="solid"/>
+          </a:ln>
+        </p:spPr>
+        <p:txBody>
+          <a:bodyPr/>
+          <a:lstStyle/>
+          <a:p>
+            <a:endParaRPr lang="fr-FR"/>
+          </a:p>
+        </p:txBody>
+      </p:sp>
+      <p:sp>
+        <p:nvSpPr>
+          <p:cNvPr id="3" name="Shape 1"/>
+          <p:cNvSpPr/>
+          <p:nvPr/>
+        </p:nvSpPr>
+        <p:spPr>
+          <a:xfrm>
+            <a:off x="0" y="0"/>
+            <a:ext cx="9144000" cy="969264"/>
+          </a:xfrm>
+          <a:prstGeom prst="rect">
+            <a:avLst/>
+          </a:prstGeom>
+          <a:solidFill>
+            <a:srgbClr val="E87722"/>
+          </a:solidFill>
+          <a:ln w="12700">
+            <a:solidFill>
+              <a:srgbClr val="E87722"/>
+            </a:solidFill>
+            <a:prstDash val="solid"/>
+          </a:ln>
+        </p:spPr>
+        <p:txBody>
+          <a:bodyPr/>
+          <a:lstStyle/>
+          <a:p>
+            <a:endParaRPr lang="fr-FR"/>
+          </a:p>
+        </p:txBody>
+      </p:sp>
+      <p:sp>
+        <p:nvSpPr>
+          <p:cNvPr id="4" name="Text 2"/>
+          <p:cNvSpPr/>
+          <p:nvPr/>
+        </p:nvSpPr>
+        <p:spPr>
+          <a:xfrm>
+            <a:off x="365760" y="0"/>
+            <a:ext cx="8412480" cy="603504"/>
+          </a:xfrm>
+          <a:prstGeom prst="rect">
+            <a:avLst/>
+          </a:prstGeom>
+          <a:noFill/>
+          <a:ln/>
+        </p:spPr>
+        <p:txBody>
+          <a:bodyPr wrap="square" rtlCol="0" anchor="b"/>
+          <a:lstStyle/>
+          <a:p>
+            <a:pPr marL="0" indent="0">
+              <a:buNone/>
+            </a:pPr>
+            <a:r>
+              <a:rPr lang="en-US" sz="1900" b="1" dirty="0">
+                <a:solidFill>
+                  <a:srgbClr val="FFFFFF"/>
+                </a:solidFill>
+                <a:latin typeface="Calibri" pitchFamily="34" charset="0"/>
+                <a:ea typeface="Calibri" pitchFamily="34" charset="-122"/>
+                <a:cs typeface="Calibri" pitchFamily="34" charset="-120"/>
+              </a:rPr>
+              <a:t>Le bilan — À quoi ça sert ?</a:t>
+            </a:r>
+            <a:endParaRPr lang="en-US" sz="1900" dirty="0"/>
+          </a:p>
+        </p:txBody>
+      </p:sp>
+      <p:sp>
+        <p:nvSpPr>
+          <p:cNvPr id="5" name="Text 3"/>
+          <p:cNvSpPr/>
+          <p:nvPr/>
+        </p:nvSpPr>
+        <p:spPr>
+          <a:xfrm>
+            <a:off x="365760" y="621792"/>
+            <a:ext cx="8412480" cy="329184"/>
+          </a:xfrm>
+          <a:prstGeom prst="rect">
+            <a:avLst/>
+          </a:prstGeom>
+          <a:noFill/>
+          <a:ln/>
+        </p:spPr>
+        <p:txBody>
+          <a:bodyPr wrap="square" rtlCol="0" anchor="ctr"/>
+          <a:lstStyle/>
+          <a:p>
+            <a:pPr marL="0" indent="0">
+              <a:buNone/>
+            </a:pPr>
+            <a:r>
+              <a:rPr lang="en-US" sz="1050" i="1" dirty="0">
+                <a:solidFill>
+                  <a:srgbClr val="CADCFC"/>
+                </a:solidFill>
+                <a:latin typeface="Calibri" pitchFamily="34" charset="0"/>
+                <a:ea typeface="Calibri" pitchFamily="34" charset="-122"/>
+                <a:cs typeface="Calibri" pitchFamily="34" charset="-120"/>
+              </a:rPr>
+              <a:t>Mesurer la SANTÉ FINANCIÈRE de l'entreprise à un instant T</a:t>
+            </a:r>
+            <a:endParaRPr lang="en-US" sz="1050" dirty="0"/>
+          </a:p>
+        </p:txBody>
+      </p:sp>
+      <p:sp>
+        <p:nvSpPr>
+          <p:cNvPr id="6" name="Text 4"/>
+          <p:cNvSpPr/>
+          <p:nvPr/>
+        </p:nvSpPr>
+        <p:spPr>
+          <a:xfrm>
+            <a:off x="274320" y="4892040"/>
+            <a:ext cx="8046720" cy="201168"/>
+          </a:xfrm>
+          <a:prstGeom prst="rect">
+            <a:avLst/>
+          </a:prstGeom>
+          <a:noFill/>
+          <a:ln/>
+        </p:spPr>
+        <p:txBody>
+          <a:bodyPr wrap="square" rtlCol="0" anchor="ctr"/>
+          <a:lstStyle/>
+          <a:p>
+            <a:pPr marL="0" indent="0" algn="ctr">
+              <a:buNone/>
+            </a:pPr>
+            <a:r>
+              <a:rPr lang="en-US" sz="750" dirty="0">
+                <a:solidFill>
+                  <a:srgbClr val="9AAABB"/>
+                </a:solidFill>
+                <a:latin typeface="Calibri" pitchFamily="34" charset="0"/>
+                <a:ea typeface="Calibri" pitchFamily="34" charset="-122"/>
+                <a:cs typeface="Calibri" pitchFamily="34" charset="-120"/>
+              </a:rPr>
+              <a:t>FTRANSPORT - SERVICES PRO  •  Formation certifiée Qualiopi  •  Éligible CPF  •  Lyon</a:t>
+            </a:r>
+            <a:endParaRPr lang="en-US" sz="750" dirty="0"/>
+          </a:p>
+        </p:txBody>
+      </p:sp>
+      <p:sp>
+        <p:nvSpPr>
+          <p:cNvPr id="7" name="Shape 5"/>
+          <p:cNvSpPr/>
+          <p:nvPr/>
+        </p:nvSpPr>
+        <p:spPr>
+          <a:xfrm>
+            <a:off x="274320" y="987552"/>
+            <a:ext cx="8595360" cy="585216"/>
+          </a:xfrm>
+          <a:prstGeom prst="rect">
+            <a:avLst/>
+          </a:prstGeom>
+          <a:solidFill>
+            <a:srgbClr val="EBF4FC"/>
+          </a:solidFill>
+          <a:ln w="12700">
+            <a:solidFill>
+              <a:srgbClr val="4A90C4"/>
+            </a:solidFill>
+            <a:prstDash val="solid"/>
+          </a:ln>
+        </p:spPr>
+        <p:txBody>
+          <a:bodyPr/>
+          <a:lstStyle/>
+          <a:p>
+            <a:endParaRPr lang="fr-FR"/>
+          </a:p>
+        </p:txBody>
+      </p:sp>
+      <p:sp>
+        <p:nvSpPr>
+          <p:cNvPr id="8" name="Text 6"/>
+          <p:cNvSpPr/>
+          <p:nvPr/>
+        </p:nvSpPr>
+        <p:spPr>
+          <a:xfrm>
+            <a:off x="402336" y="1005840"/>
+            <a:ext cx="8321040" cy="548640"/>
+          </a:xfrm>
+          <a:prstGeom prst="rect">
+            <a:avLst/>
+          </a:prstGeom>
+          <a:noFill/>
+          <a:ln/>
+        </p:spPr>
+        <p:txBody>
+          <a:bodyPr wrap="square" rtlCol="0" anchor="ctr"/>
+          <a:lstStyle/>
+          <a:p>
+            <a:pPr marL="0" indent="0">
+              <a:buNone/>
+            </a:pPr>
+            <a:r>
+              <a:rPr lang="en-US" sz="950" b="1" dirty="0">
+                <a:solidFill>
+                  <a:srgbClr val="1A3A5C"/>
+                </a:solidFill>
+                <a:latin typeface="Calibri" pitchFamily="34" charset="0"/>
+                <a:ea typeface="Calibri" pitchFamily="34" charset="-122"/>
+                <a:cs typeface="Calibri" pitchFamily="34" charset="-120"/>
+              </a:rPr>
+              <a:t>Le bilan est une PHOTOGRAPHIE PATRIMONIALE de l'entreprise à une date précise (31/12 en général). Il sert à mesurer la santé financière : ce que l'entreprise POSSÈDE (actif) et ce qu'elle DOIT (passif). Il permet aux banques, associés et investisseurs d'évaluer la solidité de l'entreprise. TOTAL ACTIF = TOTAL PASSIF.</a:t>
+            </a:r>
+            <a:endParaRPr lang="en-US" sz="950" dirty="0"/>
+          </a:p>
+        </p:txBody>
+      </p:sp>
+      <p:sp>
+        <p:nvSpPr>
+          <p:cNvPr id="9" name="Shape 7"/>
+          <p:cNvSpPr/>
+          <p:nvPr/>
+        </p:nvSpPr>
+        <p:spPr>
+          <a:xfrm>
+            <a:off x="274320" y="1572768"/>
+            <a:ext cx="4160520" cy="3200400"/>
+          </a:xfrm>
+          <a:prstGeom prst="rect">
+            <a:avLst/>
+          </a:prstGeom>
+          <a:solidFill>
+            <a:srgbClr val="EBF4FC"/>
+          </a:solidFill>
+          <a:ln w="10160">
+            <a:solidFill>
+              <a:srgbClr val="4A90C4"/>
+            </a:solidFill>
+            <a:prstDash val="solid"/>
+          </a:ln>
+        </p:spPr>
+        <p:txBody>
+          <a:bodyPr/>
+          <a:lstStyle/>
+          <a:p>
+            <a:endParaRPr lang="fr-FR"/>
+          </a:p>
+        </p:txBody>
+      </p:sp>
+      <p:sp>
+        <p:nvSpPr>
+          <p:cNvPr id="10" name="Shape 8"/>
+          <p:cNvSpPr/>
+          <p:nvPr/>
+        </p:nvSpPr>
+        <p:spPr>
+          <a:xfrm>
+            <a:off x="274320" y="1572768"/>
+            <a:ext cx="4160520" cy="329184"/>
+          </a:xfrm>
+          <a:prstGeom prst="rect">
+            <a:avLst/>
+          </a:prstGeom>
+          <a:solidFill>
+            <a:srgbClr val="1A3A5C"/>
+          </a:solidFill>
+          <a:ln w="12700">
+            <a:solidFill>
+              <a:srgbClr val="1A3A5C"/>
+            </a:solidFill>
+            <a:prstDash val="solid"/>
+          </a:ln>
+        </p:spPr>
+        <p:txBody>
+          <a:bodyPr/>
+          <a:lstStyle/>
+          <a:p>
+            <a:endParaRPr lang="fr-FR"/>
+          </a:p>
+        </p:txBody>
+      </p:sp>
+      <p:sp>
+        <p:nvSpPr>
+          <p:cNvPr id="11" name="Text 9"/>
+          <p:cNvSpPr/>
+          <p:nvPr/>
+        </p:nvSpPr>
+        <p:spPr>
+          <a:xfrm>
+            <a:off x="365760" y="1572768"/>
+            <a:ext cx="3977640" cy="329184"/>
+          </a:xfrm>
+          <a:prstGeom prst="rect">
+            <a:avLst/>
+          </a:prstGeom>
+          <a:noFill/>
+          <a:ln/>
+        </p:spPr>
+        <p:txBody>
+          <a:bodyPr wrap="square" rtlCol="0" anchor="ctr"/>
+          <a:lstStyle/>
+          <a:p>
+            <a:pPr marL="0" indent="0">
+              <a:buNone/>
+            </a:pPr>
+            <a:r>
+              <a:rPr lang="en-US" sz="1100" b="1" dirty="0">
+                <a:solidFill>
+                  <a:srgbClr val="FFFFFF"/>
+                </a:solidFill>
+                <a:latin typeface="Calibri" pitchFamily="34" charset="0"/>
+                <a:ea typeface="Calibri" pitchFamily="34" charset="-122"/>
+                <a:cs typeface="Calibri" pitchFamily="34" charset="-120"/>
+              </a:rPr>
+              <a:t>📦 L'actif</a:t>
+            </a:r>
+            <a:endParaRPr lang="en-US" sz="1100" dirty="0"/>
+          </a:p>
+        </p:txBody>
+      </p:sp>
+      <p:sp>
+        <p:nvSpPr>
+          <p:cNvPr id="12" name="Text 10"/>
+          <p:cNvSpPr/>
+          <p:nvPr/>
+        </p:nvSpPr>
+        <p:spPr>
+          <a:xfrm>
+            <a:off x="384048" y="1938528"/>
+            <a:ext cx="3931920" cy="2779776"/>
+          </a:xfrm>
+          <a:prstGeom prst="rect">
+            <a:avLst/>
+          </a:prstGeom>
+          <a:noFill/>
+          <a:ln/>
+        </p:spPr>
+        <p:txBody>
+          <a:bodyPr wrap="square" rtlCol="0" anchor="t"/>
+          <a:lstStyle/>
+          <a:p>
+            <a:pPr marL="0" indent="0">
+              <a:buNone/>
+            </a:pPr>
+            <a:r>
+              <a:rPr lang="en-US" sz="920" dirty="0">
+                <a:solidFill>
+                  <a:srgbClr val="1E2D3D"/>
+                </a:solidFill>
+                <a:latin typeface="Calibri" pitchFamily="34" charset="0"/>
+                <a:ea typeface="Calibri" pitchFamily="34" charset="-122"/>
+                <a:cs typeface="Calibri" pitchFamily="34" charset="-120"/>
+              </a:rPr>
+              <a:t>Les actifs sont les éléments en POSSESSION de l'entreprise :</a:t>
+            </a:r>
+            <a:endParaRPr lang="en-US" sz="920" dirty="0"/>
+          </a:p>
+          <a:p>
+            <a:pPr marL="0" indent="0">
+              <a:buNone/>
+            </a:pPr>
+            <a:r>
+              <a:rPr lang="en-US" sz="920" dirty="0">
+                <a:solidFill>
+                  <a:srgbClr val="1E2D3D"/>
+                </a:solidFill>
+                <a:latin typeface="Calibri" pitchFamily="34" charset="0"/>
+                <a:ea typeface="Calibri" pitchFamily="34" charset="-122"/>
+                <a:cs typeface="Calibri" pitchFamily="34" charset="-120"/>
+              </a:rPr>
+              <a:t>→ Immobilisations, bien stocks, créances sur débiteurs…</a:t>
+            </a:r>
+            <a:endParaRPr lang="en-US" sz="920" dirty="0"/>
+          </a:p>
+          <a:p>
+            <a:pPr marL="0" indent="0">
+              <a:buNone/>
+            </a:pPr>
+            <a:endParaRPr lang="en-US" sz="920" dirty="0"/>
+          </a:p>
+          <a:p>
+            <a:pPr marL="0" indent="0">
+              <a:buNone/>
+            </a:pPr>
+            <a:r>
+              <a:rPr lang="en-US" sz="920" dirty="0">
+                <a:solidFill>
+                  <a:srgbClr val="1E2D3D"/>
+                </a:solidFill>
+                <a:latin typeface="Calibri" pitchFamily="34" charset="0"/>
+                <a:ea typeface="Calibri" pitchFamily="34" charset="-122"/>
+                <a:cs typeface="Calibri" pitchFamily="34" charset="-120"/>
+              </a:rPr>
+              <a:t>L'actif se décompose en 2 parties :</a:t>
+            </a:r>
+            <a:endParaRPr lang="en-US" sz="920" dirty="0"/>
+          </a:p>
+          <a:p>
+            <a:pPr marL="0" indent="0">
+              <a:buNone/>
+            </a:pPr>
+            <a:r>
+              <a:rPr lang="en-US" sz="920" dirty="0">
+                <a:solidFill>
+                  <a:srgbClr val="1E2D3D"/>
+                </a:solidFill>
+                <a:latin typeface="Calibri" pitchFamily="34" charset="0"/>
+                <a:ea typeface="Calibri" pitchFamily="34" charset="-122"/>
+                <a:cs typeface="Calibri" pitchFamily="34" charset="-120"/>
+              </a:rPr>
+              <a:t>• Actif immobilisé (durée min. 1 an) : éléments destinés à servir de façon durable</a:t>
+            </a:r>
+            <a:endParaRPr lang="en-US" sz="920" dirty="0"/>
+          </a:p>
+          <a:p>
+            <a:pPr marL="0" indent="0">
+              <a:buNone/>
+            </a:pPr>
+            <a:r>
+              <a:rPr lang="en-US" sz="920" dirty="0">
+                <a:solidFill>
+                  <a:srgbClr val="1E2D3D"/>
+                </a:solidFill>
+                <a:latin typeface="Calibri" pitchFamily="34" charset="0"/>
+                <a:ea typeface="Calibri" pitchFamily="34" charset="-122"/>
+                <a:cs typeface="Calibri" pitchFamily="34" charset="-120"/>
+              </a:rPr>
+              <a:t>• Actif circulant : stocks, créances clients, disponibilités (banque)</a:t>
+            </a:r>
+            <a:endParaRPr lang="en-US" sz="920" dirty="0"/>
+          </a:p>
+        </p:txBody>
+      </p:sp>
+      <p:sp>
+        <p:nvSpPr>
+          <p:cNvPr id="13" name="Shape 11"/>
+          <p:cNvSpPr/>
+          <p:nvPr/>
+        </p:nvSpPr>
+        <p:spPr>
+          <a:xfrm>
+            <a:off x="4709160" y="1572768"/>
+            <a:ext cx="4160520" cy="3200400"/>
+          </a:xfrm>
+          <a:prstGeom prst="rect">
+            <a:avLst/>
+          </a:prstGeom>
+          <a:solidFill>
+            <a:srgbClr val="FFF8F0"/>
+          </a:solidFill>
+          <a:ln w="10160">
+            <a:solidFill>
+              <a:srgbClr val="E87722"/>
+            </a:solidFill>
+            <a:prstDash val="solid"/>
+          </a:ln>
+        </p:spPr>
+        <p:txBody>
+          <a:bodyPr/>
+          <a:lstStyle/>
+          <a:p>
+            <a:endParaRPr lang="fr-FR"/>
+          </a:p>
+        </p:txBody>
+      </p:sp>
+      <p:sp>
+        <p:nvSpPr>
+          <p:cNvPr id="14" name="Shape 12"/>
+          <p:cNvSpPr/>
+          <p:nvPr/>
+        </p:nvSpPr>
+        <p:spPr>
+          <a:xfrm>
+            <a:off x="4709160" y="1572768"/>
+            <a:ext cx="4160520" cy="329184"/>
+          </a:xfrm>
+          <a:prstGeom prst="rect">
+            <a:avLst/>
+          </a:prstGeom>
+          <a:solidFill>
+            <a:srgbClr val="E87722"/>
+          </a:solidFill>
+          <a:ln w="12700">
+            <a:solidFill>
+              <a:srgbClr val="E87722"/>
+            </a:solidFill>
+            <a:prstDash val="solid"/>
+          </a:ln>
+        </p:spPr>
+        <p:txBody>
+          <a:bodyPr/>
+          <a:lstStyle/>
+          <a:p>
+            <a:endParaRPr lang="fr-FR"/>
+          </a:p>
+        </p:txBody>
+      </p:sp>
+      <p:sp>
+        <p:nvSpPr>
+          <p:cNvPr id="15" name="Text 13"/>
+          <p:cNvSpPr/>
+          <p:nvPr/>
+        </p:nvSpPr>
+        <p:spPr>
+          <a:xfrm>
+            <a:off x="4800600" y="1572768"/>
+            <a:ext cx="3977640" cy="329184"/>
+          </a:xfrm>
+          <a:prstGeom prst="rect">
+            <a:avLst/>
+          </a:prstGeom>
+          <a:noFill/>
+          <a:ln/>
+        </p:spPr>
+        <p:txBody>
+          <a:bodyPr wrap="square" rtlCol="0" anchor="ctr"/>
+          <a:lstStyle/>
+          <a:p>
+            <a:pPr marL="0" indent="0">
+              <a:buNone/>
+            </a:pPr>
+            <a:r>
+              <a:rPr lang="en-US" sz="1100" b="1" dirty="0">
+                <a:solidFill>
+                  <a:srgbClr val="FFFFFF"/>
+                </a:solidFill>
+                <a:latin typeface="Calibri" pitchFamily="34" charset="0"/>
+                <a:ea typeface="Calibri" pitchFamily="34" charset="-122"/>
+                <a:cs typeface="Calibri" pitchFamily="34" charset="-120"/>
+              </a:rPr>
+              <a:t>💳 Le passif</a:t>
+            </a:r>
+            <a:endParaRPr lang="en-US" sz="1100" dirty="0"/>
+          </a:p>
+        </p:txBody>
+      </p:sp>
+      <p:sp>
+        <p:nvSpPr>
+          <p:cNvPr id="16" name="Text 14"/>
+          <p:cNvSpPr/>
+          <p:nvPr/>
+        </p:nvSpPr>
+        <p:spPr>
+          <a:xfrm>
+            <a:off x="4818888" y="1938528"/>
+            <a:ext cx="3931920" cy="2779776"/>
+          </a:xfrm>
+          <a:prstGeom prst="rect">
+            <a:avLst/>
+          </a:prstGeom>
+          <a:noFill/>
+          <a:ln/>
+        </p:spPr>
+        <p:txBody>
+          <a:bodyPr wrap="square" rtlCol="0" anchor="t"/>
+          <a:lstStyle/>
+          <a:p>
+            <a:pPr marL="0" indent="0">
+              <a:buNone/>
+            </a:pPr>
+            <a:r>
+              <a:rPr lang="en-US" sz="920" dirty="0">
+                <a:solidFill>
+                  <a:srgbClr val="1E2D3D"/>
+                </a:solidFill>
+                <a:latin typeface="Calibri" pitchFamily="34" charset="0"/>
+                <a:ea typeface="Calibri" pitchFamily="34" charset="-122"/>
+                <a:cs typeface="Calibri" pitchFamily="34" charset="-120"/>
+              </a:rPr>
+              <a:t>Le passif est composé des RESSOURCES de l'entreprise :</a:t>
+            </a:r>
+            <a:endParaRPr lang="en-US" sz="920" dirty="0"/>
+          </a:p>
+          <a:p>
+            <a:pPr marL="0" indent="0">
+              <a:buNone/>
+            </a:pPr>
+            <a:r>
+              <a:rPr lang="en-US" sz="920" dirty="0">
+                <a:solidFill>
+                  <a:srgbClr val="1E2D3D"/>
+                </a:solidFill>
+                <a:latin typeface="Calibri" pitchFamily="34" charset="0"/>
+                <a:ea typeface="Calibri" pitchFamily="34" charset="-122"/>
+                <a:cs typeface="Calibri" pitchFamily="34" charset="-120"/>
+              </a:rPr>
+              <a:t>→ Apports, dettes, bénéfices…</a:t>
+            </a:r>
+            <a:endParaRPr lang="en-US" sz="920" dirty="0"/>
+          </a:p>
+          <a:p>
+            <a:pPr marL="0" indent="0">
+              <a:buNone/>
+            </a:pPr>
+            <a:endParaRPr lang="en-US" sz="920" dirty="0"/>
+          </a:p>
+          <a:p>
+            <a:pPr marL="0" indent="0">
+              <a:buNone/>
+            </a:pPr>
+            <a:r>
+              <a:rPr lang="en-US" sz="920" dirty="0">
+                <a:solidFill>
+                  <a:srgbClr val="1E2D3D"/>
+                </a:solidFill>
+                <a:latin typeface="Calibri" pitchFamily="34" charset="0"/>
+                <a:ea typeface="Calibri" pitchFamily="34" charset="-122"/>
+                <a:cs typeface="Calibri" pitchFamily="34" charset="-120"/>
+              </a:rPr>
+              <a:t>• Capitaux propres : capital social + résultat de l'exercice</a:t>
+            </a:r>
+            <a:endParaRPr lang="en-US" sz="920" dirty="0"/>
+          </a:p>
+          <a:p>
+            <a:pPr marL="0" indent="0">
+              <a:buNone/>
+            </a:pPr>
+            <a:r>
+              <a:rPr lang="en-US" sz="920" dirty="0">
+                <a:solidFill>
+                  <a:srgbClr val="1E2D3D"/>
+                </a:solidFill>
+                <a:latin typeface="Calibri" pitchFamily="34" charset="0"/>
+                <a:ea typeface="Calibri" pitchFamily="34" charset="-122"/>
+                <a:cs typeface="Calibri" pitchFamily="34" charset="-120"/>
+              </a:rPr>
+              <a:t>• Dettes : fournisseurs, emprunts, dettes fiscales et sociales</a:t>
+            </a:r>
+            <a:endParaRPr lang="en-US" sz="920" dirty="0"/>
+          </a:p>
+          <a:p>
+            <a:pPr marL="0" indent="0">
+              <a:buNone/>
+            </a:pPr>
+            <a:endParaRPr lang="en-US" sz="920" dirty="0"/>
+          </a:p>
+          <a:p>
+            <a:pPr marL="0" indent="0">
+              <a:buNone/>
+            </a:pPr>
+            <a:r>
+              <a:rPr lang="en-US" sz="920" dirty="0">
+                <a:solidFill>
+                  <a:srgbClr val="1E2D3D"/>
+                </a:solidFill>
+                <a:latin typeface="Calibri" pitchFamily="34" charset="0"/>
+                <a:ea typeface="Calibri" pitchFamily="34" charset="-122"/>
+                <a:cs typeface="Calibri" pitchFamily="34" charset="-120"/>
+              </a:rPr>
+              <a:t>Le capital social est effectivement une dette pour l'entreprise car il appartient aux associés.</a:t>
+            </a:r>
+            <a:endParaRPr lang="en-US" sz="920" dirty="0"/>
+          </a:p>
+        </p:txBody>
+      </p:sp>
+      <p:sp>
+        <p:nvSpPr>
+          <p:cNvPr id="17" name="Shape 15"/>
+          <p:cNvSpPr/>
+          <p:nvPr/>
+        </p:nvSpPr>
+        <p:spPr>
+          <a:xfrm>
+            <a:off x="274320" y="4828032"/>
+            <a:ext cx="8595360" cy="201168"/>
+          </a:xfrm>
+          <a:prstGeom prst="rect">
+            <a:avLst/>
+          </a:prstGeom>
+          <a:solidFill>
+            <a:srgbClr val="1A3A5C"/>
+          </a:solidFill>
+          <a:ln w="12700">
+            <a:solidFill>
+              <a:srgbClr val="1A3A5C"/>
+            </a:solidFill>
+            <a:prstDash val="solid"/>
+          </a:ln>
+        </p:spPr>
+        <p:txBody>
+          <a:bodyPr/>
+          <a:lstStyle/>
+          <a:p>
+            <a:endParaRPr lang="fr-FR"/>
+          </a:p>
+        </p:txBody>
+      </p:sp>
+      <p:sp>
+        <p:nvSpPr>
+          <p:cNvPr id="18" name="Text 16"/>
+          <p:cNvSpPr/>
+          <p:nvPr/>
+        </p:nvSpPr>
+        <p:spPr>
+          <a:xfrm>
+            <a:off x="365760" y="4828032"/>
+            <a:ext cx="8412480" cy="201168"/>
+          </a:xfrm>
+          <a:prstGeom prst="rect">
+            <a:avLst/>
+          </a:prstGeom>
+          <a:noFill/>
+          <a:ln/>
+        </p:spPr>
+        <p:txBody>
+          <a:bodyPr wrap="square" rtlCol="0" anchor="ctr"/>
+          <a:lstStyle/>
+          <a:p>
+            <a:pPr marL="0" indent="0" algn="ctr">
+              <a:buNone/>
+            </a:pPr>
+            <a:r>
+              <a:rPr lang="en-US" sz="900" b="1" dirty="0">
+                <a:solidFill>
+                  <a:srgbClr val="FFFFFF"/>
+                </a:solidFill>
+                <a:latin typeface="Calibri" pitchFamily="34" charset="0"/>
+                <a:ea typeface="Calibri" pitchFamily="34" charset="-122"/>
+                <a:cs typeface="Calibri" pitchFamily="34" charset="-120"/>
+              </a:rPr>
+              <a:t>Le passif finance l'actif. C'est pour cela que TOTAL ACTIF = TOTAL PASSIF (toujours équilibré).</a:t>
+            </a:r>
+            <a:endParaRPr lang="en-US" sz="900" dirty="0"/>
+          </a:p>
+        </p:txBody>
+      </p:sp>
+      <p:sp>
+        <p:nvSpPr>
+          <p:cNvPr id="19" name="Rectangle 18"/>
+          <p:cNvSpPr/>
+          <p:nvPr/>
+        </p:nvSpPr>
+        <p:spPr>
+          <a:xfrm>
+            <a:off x="0" y="0"/>
+            <a:ext cx="9144000" cy="251999"/>
+          </a:xfrm>
+          <a:prstGeom prst="rect">
+            <a:avLst/>
+          </a:prstGeom>
+          <a:solidFill>
+            <a:srgbClr val="0D2540"/>
+          </a:solidFill>
+          <a:ln>
+            <a:noFill/>
+          </a:ln>
+        </p:spPr>
+        <p:style>
+          <a:lnRef idx="1">
+            <a:schemeClr val="accent1"/>
+          </a:lnRef>
+          <a:fillRef idx="3">
+            <a:schemeClr val="accent1"/>
+          </a:fillRef>
+          <a:effectRef idx="2">
+            <a:schemeClr val="accent1"/>
+          </a:effectRef>
+          <a:fontRef idx="minor">
+            <a:schemeClr val="lt1"/>
+          </a:fontRef>
+        </p:style>
+        <p:txBody>
+          <a:bodyPr wrap="square" rtlCol="0" anchor="ctr"/>
+          <a:lstStyle/>
+          <a:p>
+            <a:pPr algn="ctr"/>
+            <a:r>
+              <a:rPr sz="1000" b="1">
+                <a:solidFill>
+                  <a:srgbClr val="00B4D8"/>
+                </a:solidFill>
+              </a:rPr>
+              <a:t>ÉPREUVE GESTION — Partie 1</a:t>
+            </a:r>
+          </a:p>
+        </p:txBody>
+      </p:sp>
+      <p:sp>
+        <p:nvSpPr>
+          <p:cNvPr id="20" name="Rectangle 19"/>
+          <p:cNvSpPr/>
+          <p:nvPr/>
+        </p:nvSpPr>
+        <p:spPr>
+          <a:xfrm>
+            <a:off x="0" y="0"/>
+            <a:ext cx="9144000" cy="251999"/>
+          </a:xfrm>
+          <a:prstGeom prst="rect">
+            <a:avLst/>
+          </a:prstGeom>
+          <a:solidFill>
+            <a:srgbClr val="0D2540"/>
+          </a:solidFill>
+          <a:ln>
+            <a:noFill/>
+          </a:ln>
+        </p:spPr>
+        <p:style>
+          <a:lnRef idx="1">
+            <a:schemeClr val="accent1"/>
+          </a:lnRef>
+          <a:fillRef idx="3">
+            <a:schemeClr val="accent1"/>
+          </a:fillRef>
+          <a:effectRef idx="2">
+            <a:schemeClr val="accent1"/>
+          </a:effectRef>
+          <a:fontRef idx="minor">
+            <a:schemeClr val="lt1"/>
+          </a:fontRef>
+        </p:style>
+        <p:txBody>
+          <a:bodyPr wrap="square" rtlCol="0" anchor="ctr"/>
+          <a:lstStyle/>
+          <a:p>
+            <a:pPr algn="ctr"/>
+            <a:r>
+              <a:rPr sz="1000" b="1">
+                <a:solidFill>
+                  <a:srgbClr val="00B4D8"/>
+                </a:solidFill>
+              </a:rPr>
+              <a:t>ÉPREUVE GESTION — Partie 1 sur 3</a:t>
+            </a:r>
+          </a:p>
+        </p:txBody>
+      </p:sp>
+    </p:spTree>
+  </p:cSld>
+  <p:clrMapOvr>
+    <a:masterClrMapping/>
+  </p:clrMapOvr>
+</p:sld>
+</file>
+
+<file path=ppt/slides/slide31.xml><?xml version="1.0" encoding="utf-8"?>
+<p:sld xmlns:a="http://schemas.openxmlformats.org/drawingml/2006/main" xmlns:r="http://schemas.openxmlformats.org/officeDocument/2006/relationships" xmlns:p="http://schemas.openxmlformats.org/presentationml/2006/main">
   <p:cSld name="Slide 6">
     <p:spTree>
       <p:nvGrpSpPr>
@@ -32215,7 +33174,7 @@
 </p:sld>
 </file>
 
-<file path=ppt/slides/slide31.xml><?xml version="1.0" encoding="utf-8"?>
+<file path=ppt/slides/slide32.xml><?xml version="1.0" encoding="utf-8"?>
 <p:sld xmlns:a="http://schemas.openxmlformats.org/drawingml/2006/main" xmlns:r="http://schemas.openxmlformats.org/officeDocument/2006/relationships" xmlns:p="http://schemas.openxmlformats.org/presentationml/2006/main">
   <p:cSld name="Slide 20">
     <p:spTree>
@@ -35259,7 +36218,7 @@
 </p:sld>
 </file>
 
-<file path=ppt/slides/slide32.xml><?xml version="1.0" encoding="utf-8"?>
+<file path=ppt/slides/slide33.xml><?xml version="1.0" encoding="utf-8"?>
 <p:sld xmlns:a="http://schemas.openxmlformats.org/drawingml/2006/main" xmlns:r="http://schemas.openxmlformats.org/officeDocument/2006/relationships" xmlns:p="http://schemas.openxmlformats.org/presentationml/2006/main">
   <p:cSld name="Slide 21">
     <p:spTree>
@@ -36582,7 +37541,7 @@
 </p:sld>
 </file>
 
-<file path=ppt/slides/slide33.xml><?xml version="1.0" encoding="utf-8"?>
+<file path=ppt/slides/slide34.xml><?xml version="1.0" encoding="utf-8"?>
 <p:sld xmlns:a="http://schemas.openxmlformats.org/drawingml/2006/main" xmlns:r="http://schemas.openxmlformats.org/officeDocument/2006/relationships" xmlns:p="http://schemas.openxmlformats.org/presentationml/2006/main">
   <p:cSld name="Slide 22">
     <p:spTree>
@@ -37387,7 +38346,7 @@
 </p:sld>
 </file>
 
-<file path=ppt/slides/slide34.xml><?xml version="1.0" encoding="utf-8"?>
+<file path=ppt/slides/slide35.xml><?xml version="1.0" encoding="utf-8"?>
 <p:sld xmlns:a="http://schemas.openxmlformats.org/drawingml/2006/main" xmlns:r="http://schemas.openxmlformats.org/officeDocument/2006/relationships" xmlns:p="http://schemas.openxmlformats.org/presentationml/2006/main">
   <p:cSld name="Slide 23">
     <p:spTree>
@@ -38154,7 +39113,7 @@
 </p:sld>
 </file>
 
-<file path=ppt/slides/slide35.xml><?xml version="1.0" encoding="utf-8"?>
+<file path=ppt/slides/slide36.xml><?xml version="1.0" encoding="utf-8"?>
 <p:sld xmlns:a="http://schemas.openxmlformats.org/drawingml/2006/main" xmlns:r="http://schemas.openxmlformats.org/officeDocument/2006/relationships" xmlns:p="http://schemas.openxmlformats.org/presentationml/2006/main">
   <p:cSld name="Slide 24">
     <p:spTree>
@@ -38898,7 +39857,7 @@
 </p:sld>
 </file>
 
-<file path=ppt/slides/slide36.xml><?xml version="1.0" encoding="utf-8"?>
+<file path=ppt/slides/slide37.xml><?xml version="1.0" encoding="utf-8"?>
 <p:sld xmlns:a="http://schemas.openxmlformats.org/drawingml/2006/main" xmlns:r="http://schemas.openxmlformats.org/officeDocument/2006/relationships" xmlns:p="http://schemas.openxmlformats.org/presentationml/2006/main">
   <p:cSld name="Slide 25">
     <p:spTree>
@@ -39766,7 +40725,7 @@
 </p:sld>
 </file>
 
-<file path=ppt/slides/slide37.xml><?xml version="1.0" encoding="utf-8"?>
+<file path=ppt/slides/slide38.xml><?xml version="1.0" encoding="utf-8"?>
 <p:sld xmlns:a="http://schemas.openxmlformats.org/drawingml/2006/main" xmlns:r="http://schemas.openxmlformats.org/officeDocument/2006/relationships" xmlns:p="http://schemas.openxmlformats.org/presentationml/2006/main">
   <p:cSld name="Slide 26">
     <p:spTree>
@@ -43938,8 +44897,35 @@
                 <a:ea typeface="Calibri" pitchFamily="34" charset="-122"/>
                 <a:cs typeface="Calibri" pitchFamily="34" charset="-120"/>
               </a:rPr>
-              <a:t>(architecte, ostéopathe, moniteur de ski…) → CIPAV pour la retraite, régime général pour la maladie.</a:t>
-            </a:r>
+              <a:t>(architecte, ostéopathe, moniteur de ski…) → CIPAV pour la retraite, régime général pour la </a:t>
+            </a:r>
+            <a:r>
+              <a:rPr lang="en-US" sz="1000" dirty="0" err="1">
+                <a:solidFill>
+                  <a:srgbClr val="1E2D3D"/>
+                </a:solidFill>
+                <a:latin typeface="Calibri" pitchFamily="34" charset="0"/>
+                <a:ea typeface="Calibri" pitchFamily="34" charset="-122"/>
+                <a:cs typeface="Calibri" pitchFamily="34" charset="-120"/>
+              </a:rPr>
+              <a:t>maladie</a:t>
+            </a:r>
+            <a:r>
+              <a:rPr lang="en-US" sz="1000">
+                <a:solidFill>
+                  <a:srgbClr val="1E2D3D"/>
+                </a:solidFill>
+                <a:latin typeface="Calibri" pitchFamily="34" charset="0"/>
+                <a:ea typeface="Calibri" pitchFamily="34" charset="-122"/>
+                <a:cs typeface="Calibri" pitchFamily="34" charset="-120"/>
+              </a:rPr>
+              <a:t>.</a:t>
+            </a:r>
+          </a:p>
+          <a:p>
+            <a:pPr marL="0" indent="0">
+              <a:buNone/>
+            </a:pPr>
             <a:endParaRPr lang="en-US" sz="1000" dirty="0"/>
           </a:p>
           <a:p>
@@ -47735,7 +48721,7 @@
               <a:buNone/>
             </a:pPr>
             <a:r>
-              <a:rPr lang="en-US" sz="750" dirty="0">
+              <a:rPr lang="en-US" sz="700" dirty="0">
                 <a:solidFill>
                   <a:srgbClr val="9AAABB"/>
                 </a:solidFill>
@@ -47745,7 +48731,7 @@
               </a:rPr>
               <a:t>FTRANSPORT - SERVICES PRO  •  Formation certifiée Qualiopi  •  Éligible CPF  •  Lyon</a:t>
             </a:r>
-            <a:endParaRPr lang="en-US" sz="750" dirty="0"/>
+            <a:endParaRPr lang="en-US" sz="700" dirty="0"/>
           </a:p>
         </p:txBody>
       </p:sp>
@@ -47804,7 +48790,7 @@
         </p:nvGraphicFramePr>
         <p:xfrm>
           <a:off x="219456" y="1005840"/>
-          <a:ext cx="7406640" cy="4322660"/>
+          <a:ext cx="7406640" cy="4132440"/>
         </p:xfrm>
         <a:graphic>
           <a:graphicData uri="http://schemas.openxmlformats.org/drawingml/2006/table">
@@ -47868,7 +48854,7 @@
                   </a:extLst>
                 </a:gridCol>
               </a:tblGrid>
-              <a:tr h="353000">
+              <a:tr h="322000">
                 <a:tc>
                   <a:txBody>
                     <a:bodyPr/>
@@ -47878,7 +48864,7 @@
                         <a:buNone/>
                       </a:pPr>
                       <a:r>
-                        <a:rPr lang="en-US" sz="750" dirty="0">
+                        <a:rPr lang="en-US" sz="700" dirty="0">
                           <a:solidFill>
                             <a:srgbClr val="FFFFFF"/>
                           </a:solidFill>
@@ -47888,7 +48874,7 @@
                         </a:rPr>
                         <a:t>Critère</a:t>
                       </a:r>
-                      <a:endParaRPr lang="en-US" sz="750" dirty="0">
+                      <a:endParaRPr lang="en-US" sz="700" dirty="0">
                         <a:latin typeface="Calibri" charset="0"/>
                         <a:ea typeface="Calibri" charset="0"/>
                         <a:cs typeface="Calibri" charset="0"/>
@@ -47946,7 +48932,7 @@
                         <a:buNone/>
                       </a:pPr>
                       <a:r>
-                        <a:rPr lang="en-US" sz="750" dirty="0">
+                        <a:rPr lang="en-US" sz="700" dirty="0">
                           <a:solidFill>
                             <a:srgbClr val="FFFFFF"/>
                           </a:solidFill>
@@ -47956,7 +48942,7 @@
                         </a:rPr>
                         <a:t>Micro-Ent.</a:t>
                       </a:r>
-                      <a:endParaRPr lang="en-US" sz="750" dirty="0">
+                      <a:endParaRPr lang="en-US" sz="700" dirty="0">
                         <a:latin typeface="Calibri" charset="0"/>
                         <a:ea typeface="Calibri" charset="0"/>
                         <a:cs typeface="Calibri" charset="0"/>
@@ -48014,7 +49000,7 @@
                         <a:buNone/>
                       </a:pPr>
                       <a:r>
-                        <a:rPr lang="en-US" sz="750" dirty="0">
+                        <a:rPr lang="en-US" sz="700" dirty="0">
                           <a:solidFill>
                             <a:srgbClr val="FFFFFF"/>
                           </a:solidFill>
@@ -48024,7 +49010,7 @@
                         </a:rPr>
                         <a:t>EI</a:t>
                       </a:r>
-                      <a:endParaRPr lang="en-US" sz="750" dirty="0">
+                      <a:endParaRPr lang="en-US" sz="700" dirty="0">
                         <a:latin typeface="Calibri" charset="0"/>
                         <a:ea typeface="Calibri" charset="0"/>
                         <a:cs typeface="Calibri" charset="0"/>
@@ -48082,7 +49068,7 @@
                         <a:buNone/>
                       </a:pPr>
                       <a:r>
-                        <a:rPr lang="en-US" sz="750" dirty="0">
+                        <a:rPr lang="en-US" sz="700" dirty="0">
                           <a:solidFill>
                             <a:srgbClr val="FFFFFF"/>
                           </a:solidFill>
@@ -48092,7 +49078,7 @@
                         </a:rPr>
                         <a:t>EURL</a:t>
                       </a:r>
-                      <a:endParaRPr lang="en-US" sz="750" dirty="0">
+                      <a:endParaRPr lang="en-US" sz="700" dirty="0">
                         <a:latin typeface="Calibri" charset="0"/>
                         <a:ea typeface="Calibri" charset="0"/>
                         <a:cs typeface="Calibri" charset="0"/>
@@ -48150,7 +49136,7 @@
                         <a:buNone/>
                       </a:pPr>
                       <a:r>
-                        <a:rPr lang="en-US" sz="750" dirty="0">
+                        <a:rPr lang="en-US" sz="700" dirty="0">
                           <a:solidFill>
                             <a:srgbClr val="FFFFFF"/>
                           </a:solidFill>
@@ -48160,7 +49146,7 @@
                         </a:rPr>
                         <a:t>SARL</a:t>
                       </a:r>
-                      <a:endParaRPr lang="en-US" sz="750" dirty="0">
+                      <a:endParaRPr lang="en-US" sz="700" dirty="0">
                         <a:latin typeface="Calibri" charset="0"/>
                         <a:ea typeface="Calibri" charset="0"/>
                         <a:cs typeface="Calibri" charset="0"/>
@@ -48218,7 +49204,7 @@
                         <a:buNone/>
                       </a:pPr>
                       <a:r>
-                        <a:rPr lang="en-US" sz="750" dirty="0">
+                        <a:rPr lang="en-US" sz="700" dirty="0">
                           <a:solidFill>
                             <a:srgbClr val="FFFFFF"/>
                           </a:solidFill>
@@ -48228,7 +49214,7 @@
                         </a:rPr>
                         <a:t>SASU</a:t>
                       </a:r>
-                      <a:endParaRPr lang="en-US" sz="750" dirty="0">
+                      <a:endParaRPr lang="en-US" sz="700" dirty="0">
                         <a:latin typeface="Calibri" charset="0"/>
                         <a:ea typeface="Calibri" charset="0"/>
                         <a:cs typeface="Calibri" charset="0"/>
@@ -48286,7 +49272,7 @@
                         <a:buNone/>
                       </a:pPr>
                       <a:r>
-                        <a:rPr lang="en-US" sz="750" dirty="0">
+                        <a:rPr lang="en-US" sz="700" dirty="0">
                           <a:solidFill>
                             <a:srgbClr val="FFFFFF"/>
                           </a:solidFill>
@@ -48296,7 +49282,7 @@
                         </a:rPr>
                         <a:t>SAS</a:t>
                       </a:r>
-                      <a:endParaRPr lang="en-US" sz="750" dirty="0">
+                      <a:endParaRPr lang="en-US" sz="700" dirty="0">
                         <a:latin typeface="Calibri" charset="0"/>
                         <a:ea typeface="Calibri" charset="0"/>
                         <a:cs typeface="Calibri" charset="0"/>
@@ -48354,7 +49340,7 @@
                         <a:buNone/>
                       </a:pPr>
                       <a:r>
-                        <a:rPr lang="en-US" sz="750" dirty="0">
+                        <a:rPr lang="en-US" sz="700" dirty="0">
                           <a:solidFill>
                             <a:srgbClr val="FFFFFF"/>
                           </a:solidFill>
@@ -48364,7 +49350,7 @@
                         </a:rPr>
                         <a:t>SA</a:t>
                       </a:r>
-                      <a:endParaRPr lang="en-US" sz="750" dirty="0">
+                      <a:endParaRPr lang="en-US" sz="700" dirty="0">
                         <a:latin typeface="Calibri" charset="0"/>
                         <a:ea typeface="Calibri" charset="0"/>
                         <a:cs typeface="Calibri" charset="0"/>
@@ -48419,7 +49405,7 @@
                   </a:ext>
                 </a:extLst>
               </a:tr>
-              <a:tr h="353000">
+              <a:tr h="322000">
                 <a:tc>
                   <a:txBody>
                     <a:bodyPr/>
@@ -48429,7 +49415,7 @@
                         <a:buNone/>
                       </a:pPr>
                       <a:r>
-                        <a:rPr lang="en-US" sz="750" dirty="0">
+                        <a:rPr lang="en-US" sz="700" dirty="0">
                           <a:solidFill>
                             <a:srgbClr val="1E2D3D"/>
                           </a:solidFill>
@@ -48439,7 +49425,7 @@
                         </a:rPr>
                         <a:t>Statut</a:t>
                       </a:r>
-                      <a:endParaRPr lang="en-US" sz="750" dirty="0">
+                      <a:endParaRPr lang="en-US" sz="700" dirty="0">
                         <a:latin typeface="Calibri" charset="0"/>
                         <a:ea typeface="Calibri" charset="0"/>
                         <a:cs typeface="Calibri" charset="0"/>
@@ -48497,7 +49483,7 @@
                         <a:buNone/>
                       </a:pPr>
                       <a:r>
-                        <a:rPr lang="en-US" sz="750" dirty="0">
+                        <a:rPr lang="en-US" sz="700" dirty="0">
                           <a:solidFill>
                             <a:srgbClr val="1E2D3D"/>
                           </a:solidFill>
@@ -48505,51 +49491,8 @@
                           <a:ea typeface="Calibri" pitchFamily="34" charset="-122"/>
                           <a:cs typeface="Calibri" pitchFamily="34" charset="-120"/>
                         </a:rPr>
-                        <a:t>Pers. Physique</a:t>
+                        <a:t>Pers. physique (entreprise indiv.)</a:t>
                       </a:r>
-                    </a:p>
-                    <a:p>
-                      <a:pPr marL="0" indent="0" algn="ctr">
-                        <a:buNone/>
-                      </a:pPr>
-                      <a:r>
-                        <a:rPr lang="en-US" sz="750" dirty="0" err="1">
-                          <a:solidFill>
-                            <a:srgbClr val="1E2D3D"/>
-                          </a:solidFill>
-                          <a:latin typeface="Calibri" pitchFamily="34" charset="0"/>
-                          <a:ea typeface="Calibri" pitchFamily="34" charset="-122"/>
-                          <a:cs typeface="Calibri" pitchFamily="34" charset="-120"/>
-                        </a:rPr>
-                        <a:t>Entreprise</a:t>
-                      </a:r>
-                      <a:r>
-                        <a:rPr lang="en-US" sz="750" dirty="0">
-                          <a:solidFill>
-                            <a:srgbClr val="1E2D3D"/>
-                          </a:solidFill>
-                          <a:latin typeface="Calibri" pitchFamily="34" charset="0"/>
-                          <a:ea typeface="Calibri" pitchFamily="34" charset="-122"/>
-                          <a:cs typeface="Calibri" pitchFamily="34" charset="-120"/>
-                        </a:rPr>
-                        <a:t> </a:t>
-                      </a:r>
-                      <a:r>
-                        <a:rPr lang="en-US" sz="750" dirty="0" err="1">
-                          <a:solidFill>
-                            <a:srgbClr val="1E2D3D"/>
-                          </a:solidFill>
-                          <a:latin typeface="Calibri" pitchFamily="34" charset="0"/>
-                          <a:ea typeface="Calibri" pitchFamily="34" charset="-122"/>
-                          <a:cs typeface="Calibri" pitchFamily="34" charset="-120"/>
-                        </a:rPr>
-                        <a:t>individuelle</a:t>
-                      </a:r>
-                      <a:endParaRPr lang="en-US" sz="750" dirty="0">
-                        <a:latin typeface="Calibri" charset="0"/>
-                        <a:ea typeface="Calibri" charset="0"/>
-                        <a:cs typeface="Calibri" charset="0"/>
-                      </a:endParaRPr>
                     </a:p>
                   </a:txBody>
                   <a:tcPr>
@@ -48603,7 +49546,7 @@
                         <a:buNone/>
                       </a:pPr>
                       <a:r>
-                        <a:rPr lang="en-US" sz="750" dirty="0">
+                        <a:rPr lang="en-US" sz="700" dirty="0">
                           <a:solidFill>
                             <a:srgbClr val="1E2D3D"/>
                           </a:solidFill>
@@ -48611,75 +49554,8 @@
                           <a:ea typeface="Calibri" pitchFamily="34" charset="-122"/>
                           <a:cs typeface="Calibri" pitchFamily="34" charset="-120"/>
                         </a:rPr>
-                        <a:t>Pers. Physique</a:t>
+                        <a:t>Pers. physique (entreprise indiv.)</a:t>
                       </a:r>
-                    </a:p>
-                    <a:p>
-                      <a:pPr marL="0" marR="0" lvl="0" indent="0" algn="ctr" defTabSz="914400" rtl="0" eaLnBrk="1" fontAlgn="auto" latinLnBrk="0" hangingPunct="1">
-                        <a:lnSpc>
-                          <a:spcPct val="100000"/>
-                        </a:lnSpc>
-                        <a:spcBef>
-                          <a:spcPts val="0"/>
-                        </a:spcBef>
-                        <a:spcAft>
-                          <a:spcPts val="0"/>
-                        </a:spcAft>
-                        <a:buClrTx/>
-                        <a:buSzTx/>
-                        <a:buFontTx/>
-                        <a:buNone/>
-                        <a:tabLst/>
-                        <a:defRPr/>
-                      </a:pPr>
-                      <a:r>
-                        <a:rPr lang="en-US" sz="750" dirty="0" err="1">
-                          <a:solidFill>
-                            <a:srgbClr val="1E2D3D"/>
-                          </a:solidFill>
-                          <a:latin typeface="Calibri" pitchFamily="34" charset="0"/>
-                          <a:ea typeface="Calibri" pitchFamily="34" charset="-122"/>
-                          <a:cs typeface="Calibri" pitchFamily="34" charset="-120"/>
-                        </a:rPr>
-                        <a:t>Entreprise</a:t>
-                      </a:r>
-                      <a:r>
-                        <a:rPr lang="en-US" sz="750" dirty="0">
-                          <a:solidFill>
-                            <a:srgbClr val="1E2D3D"/>
-                          </a:solidFill>
-                          <a:latin typeface="Calibri" pitchFamily="34" charset="0"/>
-                          <a:ea typeface="Calibri" pitchFamily="34" charset="-122"/>
-                          <a:cs typeface="Calibri" pitchFamily="34" charset="-120"/>
-                        </a:rPr>
-                        <a:t> </a:t>
-                      </a:r>
-                      <a:r>
-                        <a:rPr lang="en-US" sz="750" dirty="0" err="1">
-                          <a:solidFill>
-                            <a:srgbClr val="1E2D3D"/>
-                          </a:solidFill>
-                          <a:latin typeface="Calibri" pitchFamily="34" charset="0"/>
-                          <a:ea typeface="Calibri" pitchFamily="34" charset="-122"/>
-                          <a:cs typeface="Calibri" pitchFamily="34" charset="-120"/>
-                        </a:rPr>
-                        <a:t>individuelle</a:t>
-                      </a:r>
-                      <a:endParaRPr lang="en-US" sz="750" dirty="0">
-                        <a:latin typeface="Calibri" charset="0"/>
-                        <a:ea typeface="Calibri" charset="0"/>
-                        <a:cs typeface="Calibri" charset="0"/>
-                      </a:endParaRPr>
-                    </a:p>
-                    <a:p>
-                      <a:pPr marL="0" indent="0" algn="ctr">
-                        <a:buNone/>
-                      </a:pPr>
-                      <a:endParaRPr lang="en-US" sz="750" dirty="0">
-                        <a:latin typeface="Calibri" charset="0"/>
-                        <a:ea typeface="Calibri" charset="0"/>
-                        <a:cs typeface="Calibri" charset="0"/>
-                      </a:endParaRPr>
                     </a:p>
                   </a:txBody>
                   <a:tcPr>
@@ -48733,7 +49609,7 @@
                         <a:buNone/>
                       </a:pPr>
                       <a:r>
-                        <a:rPr lang="en-US" sz="750" dirty="0">
+                        <a:rPr lang="en-US" sz="700" dirty="0">
                           <a:solidFill>
                             <a:srgbClr val="1E2D3D"/>
                           </a:solidFill>
@@ -48741,29 +49617,8 @@
                           <a:ea typeface="Calibri" pitchFamily="34" charset="-122"/>
                           <a:cs typeface="Calibri" pitchFamily="34" charset="-120"/>
                         </a:rPr>
-                        <a:t>Pers. Morale</a:t>
+                        <a:t>Pers. morale (société)</a:t>
                       </a:r>
-                    </a:p>
-                    <a:p>
-                      <a:pPr marL="0" indent="0" algn="ctr">
-                        <a:buNone/>
-                      </a:pPr>
-                      <a:r>
-                        <a:rPr lang="en-US" sz="750" dirty="0">
-                          <a:solidFill>
-                            <a:srgbClr val="1E2D3D"/>
-                          </a:solidFill>
-                          <a:latin typeface="Calibri" pitchFamily="34" charset="0"/>
-                          <a:ea typeface="Calibri" pitchFamily="34" charset="-122"/>
-                          <a:cs typeface="Calibri" pitchFamily="34" charset="-120"/>
-                        </a:rPr>
-                        <a:t>Société</a:t>
-                      </a:r>
-                      <a:endParaRPr lang="en-US" sz="750" dirty="0">
-                        <a:latin typeface="Calibri" charset="0"/>
-                        <a:ea typeface="Calibri" charset="0"/>
-                        <a:cs typeface="Calibri" charset="0"/>
-                      </a:endParaRPr>
                     </a:p>
                   </a:txBody>
                   <a:tcPr>
@@ -48817,7 +49672,7 @@
                         <a:buNone/>
                       </a:pPr>
                       <a:r>
-                        <a:rPr lang="en-US" sz="750" dirty="0">
+                        <a:rPr lang="en-US" sz="700" dirty="0">
                           <a:solidFill>
                             <a:srgbClr val="1E2D3D"/>
                           </a:solidFill>
@@ -48825,53 +49680,8 @@
                           <a:ea typeface="Calibri" pitchFamily="34" charset="-122"/>
                           <a:cs typeface="Calibri" pitchFamily="34" charset="-120"/>
                         </a:rPr>
-                        <a:t>Pers. Morale</a:t>
+                        <a:t>Pers. morale (société)</a:t>
                       </a:r>
-                    </a:p>
-                    <a:p>
-                      <a:pPr marL="0" marR="0" lvl="0" indent="0" algn="ctr" defTabSz="914400" rtl="0" eaLnBrk="1" fontAlgn="auto" latinLnBrk="0" hangingPunct="1">
-                        <a:lnSpc>
-                          <a:spcPct val="100000"/>
-                        </a:lnSpc>
-                        <a:spcBef>
-                          <a:spcPts val="0"/>
-                        </a:spcBef>
-                        <a:spcAft>
-                          <a:spcPts val="0"/>
-                        </a:spcAft>
-                        <a:buClrTx/>
-                        <a:buSzTx/>
-                        <a:buFontTx/>
-                        <a:buNone/>
-                        <a:tabLst/>
-                        <a:defRPr/>
-                      </a:pPr>
-                      <a:r>
-                        <a:rPr lang="en-US" sz="750" dirty="0">
-                          <a:solidFill>
-                            <a:srgbClr val="1E2D3D"/>
-                          </a:solidFill>
-                          <a:latin typeface="Calibri" pitchFamily="34" charset="0"/>
-                          <a:ea typeface="Calibri" pitchFamily="34" charset="-122"/>
-                          <a:cs typeface="Calibri" pitchFamily="34" charset="-120"/>
-                        </a:rPr>
-                        <a:t>Société</a:t>
-                      </a:r>
-                      <a:endParaRPr lang="en-US" sz="750" dirty="0">
-                        <a:latin typeface="Calibri" charset="0"/>
-                        <a:ea typeface="Calibri" charset="0"/>
-                        <a:cs typeface="Calibri" charset="0"/>
-                      </a:endParaRPr>
-                    </a:p>
-                    <a:p>
-                      <a:pPr marL="0" indent="0" algn="ctr">
-                        <a:buNone/>
-                      </a:pPr>
-                      <a:endParaRPr lang="en-US" sz="750" dirty="0">
-                        <a:latin typeface="Calibri" charset="0"/>
-                        <a:ea typeface="Calibri" charset="0"/>
-                        <a:cs typeface="Calibri" charset="0"/>
-                      </a:endParaRPr>
                     </a:p>
                   </a:txBody>
                   <a:tcPr>
@@ -48925,7 +49735,7 @@
                         <a:buNone/>
                       </a:pPr>
                       <a:r>
-                        <a:rPr lang="en-US" sz="750" dirty="0">
+                        <a:rPr lang="en-US" sz="700" dirty="0">
                           <a:solidFill>
                             <a:srgbClr val="1E2D3D"/>
                           </a:solidFill>
@@ -48933,53 +49743,8 @@
                           <a:ea typeface="Calibri" pitchFamily="34" charset="-122"/>
                           <a:cs typeface="Calibri" pitchFamily="34" charset="-120"/>
                         </a:rPr>
-                        <a:t>Pers. Morale</a:t>
+                        <a:t>Pers. morale (société)</a:t>
                       </a:r>
-                    </a:p>
-                    <a:p>
-                      <a:pPr marL="0" marR="0" lvl="0" indent="0" algn="ctr" defTabSz="914400" rtl="0" eaLnBrk="1" fontAlgn="auto" latinLnBrk="0" hangingPunct="1">
-                        <a:lnSpc>
-                          <a:spcPct val="100000"/>
-                        </a:lnSpc>
-                        <a:spcBef>
-                          <a:spcPts val="0"/>
-                        </a:spcBef>
-                        <a:spcAft>
-                          <a:spcPts val="0"/>
-                        </a:spcAft>
-                        <a:buClrTx/>
-                        <a:buSzTx/>
-                        <a:buFontTx/>
-                        <a:buNone/>
-                        <a:tabLst/>
-                        <a:defRPr/>
-                      </a:pPr>
-                      <a:r>
-                        <a:rPr lang="en-US" sz="750" dirty="0">
-                          <a:solidFill>
-                            <a:srgbClr val="1E2D3D"/>
-                          </a:solidFill>
-                          <a:latin typeface="Calibri" pitchFamily="34" charset="0"/>
-                          <a:ea typeface="Calibri" pitchFamily="34" charset="-122"/>
-                          <a:cs typeface="Calibri" pitchFamily="34" charset="-120"/>
-                        </a:rPr>
-                        <a:t>Société</a:t>
-                      </a:r>
-                      <a:endParaRPr lang="en-US" sz="750" dirty="0">
-                        <a:latin typeface="Calibri" charset="0"/>
-                        <a:ea typeface="Calibri" charset="0"/>
-                        <a:cs typeface="Calibri" charset="0"/>
-                      </a:endParaRPr>
-                    </a:p>
-                    <a:p>
-                      <a:pPr marL="0" indent="0" algn="ctr">
-                        <a:buNone/>
-                      </a:pPr>
-                      <a:endParaRPr lang="en-US" sz="750" dirty="0">
-                        <a:latin typeface="Calibri" charset="0"/>
-                        <a:ea typeface="Calibri" charset="0"/>
-                        <a:cs typeface="Calibri" charset="0"/>
-                      </a:endParaRPr>
                     </a:p>
                   </a:txBody>
                   <a:tcPr>
@@ -49033,7 +49798,7 @@
                         <a:buNone/>
                       </a:pPr>
                       <a:r>
-                        <a:rPr lang="en-US" sz="750" dirty="0">
+                        <a:rPr lang="en-US" sz="700" dirty="0">
                           <a:solidFill>
                             <a:srgbClr val="1E2D3D"/>
                           </a:solidFill>
@@ -49041,53 +49806,8 @@
                           <a:ea typeface="Calibri" pitchFamily="34" charset="-122"/>
                           <a:cs typeface="Calibri" pitchFamily="34" charset="-120"/>
                         </a:rPr>
-                        <a:t>Pers. Morale</a:t>
+                        <a:t>Pers. morale (société)</a:t>
                       </a:r>
-                    </a:p>
-                    <a:p>
-                      <a:pPr marL="0" marR="0" lvl="0" indent="0" algn="ctr" defTabSz="914400" rtl="0" eaLnBrk="1" fontAlgn="auto" latinLnBrk="0" hangingPunct="1">
-                        <a:lnSpc>
-                          <a:spcPct val="100000"/>
-                        </a:lnSpc>
-                        <a:spcBef>
-                          <a:spcPts val="0"/>
-                        </a:spcBef>
-                        <a:spcAft>
-                          <a:spcPts val="0"/>
-                        </a:spcAft>
-                        <a:buClrTx/>
-                        <a:buSzTx/>
-                        <a:buFontTx/>
-                        <a:buNone/>
-                        <a:tabLst/>
-                        <a:defRPr/>
-                      </a:pPr>
-                      <a:r>
-                        <a:rPr lang="en-US" sz="750" dirty="0">
-                          <a:solidFill>
-                            <a:srgbClr val="1E2D3D"/>
-                          </a:solidFill>
-                          <a:latin typeface="Calibri" pitchFamily="34" charset="0"/>
-                          <a:ea typeface="Calibri" pitchFamily="34" charset="-122"/>
-                          <a:cs typeface="Calibri" pitchFamily="34" charset="-120"/>
-                        </a:rPr>
-                        <a:t>Société</a:t>
-                      </a:r>
-                      <a:endParaRPr lang="en-US" sz="750" dirty="0">
-                        <a:latin typeface="Calibri" charset="0"/>
-                        <a:ea typeface="Calibri" charset="0"/>
-                        <a:cs typeface="Calibri" charset="0"/>
-                      </a:endParaRPr>
-                    </a:p>
-                    <a:p>
-                      <a:pPr marL="0" indent="0" algn="ctr">
-                        <a:buNone/>
-                      </a:pPr>
-                      <a:endParaRPr lang="en-US" sz="750" dirty="0">
-                        <a:latin typeface="Calibri" charset="0"/>
-                        <a:ea typeface="Calibri" charset="0"/>
-                        <a:cs typeface="Calibri" charset="0"/>
-                      </a:endParaRPr>
                     </a:p>
                   </a:txBody>
                   <a:tcPr>
@@ -49141,7 +49861,7 @@
                         <a:buNone/>
                       </a:pPr>
                       <a:r>
-                        <a:rPr lang="en-US" sz="750" dirty="0">
+                        <a:rPr lang="en-US" sz="700" dirty="0">
                           <a:solidFill>
                             <a:srgbClr val="1E2D3D"/>
                           </a:solidFill>
@@ -49149,53 +49869,8 @@
                           <a:ea typeface="Calibri" pitchFamily="34" charset="-122"/>
                           <a:cs typeface="Calibri" pitchFamily="34" charset="-120"/>
                         </a:rPr>
-                        <a:t>Pers. Morale</a:t>
+                        <a:t>Pers. morale (société)</a:t>
                       </a:r>
-                    </a:p>
-                    <a:p>
-                      <a:pPr marL="0" marR="0" lvl="0" indent="0" algn="ctr" defTabSz="914400" rtl="0" eaLnBrk="1" fontAlgn="auto" latinLnBrk="0" hangingPunct="1">
-                        <a:lnSpc>
-                          <a:spcPct val="100000"/>
-                        </a:lnSpc>
-                        <a:spcBef>
-                          <a:spcPts val="0"/>
-                        </a:spcBef>
-                        <a:spcAft>
-                          <a:spcPts val="0"/>
-                        </a:spcAft>
-                        <a:buClrTx/>
-                        <a:buSzTx/>
-                        <a:buFontTx/>
-                        <a:buNone/>
-                        <a:tabLst/>
-                        <a:defRPr/>
-                      </a:pPr>
-                      <a:r>
-                        <a:rPr lang="en-US" sz="750" dirty="0">
-                          <a:solidFill>
-                            <a:srgbClr val="1E2D3D"/>
-                          </a:solidFill>
-                          <a:latin typeface="Calibri" pitchFamily="34" charset="0"/>
-                          <a:ea typeface="Calibri" pitchFamily="34" charset="-122"/>
-                          <a:cs typeface="Calibri" pitchFamily="34" charset="-120"/>
-                        </a:rPr>
-                        <a:t>Société</a:t>
-                      </a:r>
-                      <a:endParaRPr lang="en-US" sz="750" dirty="0">
-                        <a:latin typeface="Calibri" charset="0"/>
-                        <a:ea typeface="Calibri" charset="0"/>
-                        <a:cs typeface="Calibri" charset="0"/>
-                      </a:endParaRPr>
-                    </a:p>
-                    <a:p>
-                      <a:pPr marL="0" indent="0" algn="ctr">
-                        <a:buNone/>
-                      </a:pPr>
-                      <a:endParaRPr lang="en-US" sz="750" dirty="0">
-                        <a:latin typeface="Calibri" charset="0"/>
-                        <a:ea typeface="Calibri" charset="0"/>
-                        <a:cs typeface="Calibri" charset="0"/>
-                      </a:endParaRPr>
                     </a:p>
                   </a:txBody>
                   <a:tcPr>
@@ -49246,7 +49921,7 @@
                   </a:ext>
                 </a:extLst>
               </a:tr>
-              <a:tr h="353000">
+              <a:tr h="322000">
                 <a:tc>
                   <a:txBody>
                     <a:bodyPr/>
@@ -49256,7 +49931,7 @@
                         <a:buNone/>
                       </a:pPr>
                       <a:r>
-                        <a:rPr lang="en-US" sz="750" dirty="0">
+                        <a:rPr lang="en-US" sz="700" dirty="0">
                           <a:solidFill>
                             <a:srgbClr val="1E2D3D"/>
                           </a:solidFill>
@@ -49264,9 +49939,9 @@
                           <a:ea typeface="Calibri" pitchFamily="34" charset="-122"/>
                           <a:cs typeface="Calibri" pitchFamily="34" charset="-120"/>
                         </a:rPr>
-                        <a:t>Nb associés</a:t>
+                        <a:t>Dirigeant</a:t>
                       </a:r>
-                      <a:endParaRPr lang="en-US" sz="750" dirty="0">
+                      <a:endParaRPr lang="en-US" sz="700" dirty="0">
                         <a:latin typeface="Calibri" charset="0"/>
                         <a:ea typeface="Calibri" charset="0"/>
                         <a:cs typeface="Calibri" charset="0"/>
@@ -49324,7 +49999,7 @@
                         <a:buNone/>
                       </a:pPr>
                       <a:r>
-                        <a:rPr lang="en-US" sz="750" dirty="0">
+                        <a:rPr lang="en-US" sz="700" dirty="0">
                           <a:solidFill>
                             <a:srgbClr val="1E2D3D"/>
                           </a:solidFill>
@@ -49332,9 +50007,457 @@
                           <a:ea typeface="Calibri" pitchFamily="34" charset="-122"/>
                           <a:cs typeface="Calibri" pitchFamily="34" charset="-120"/>
                         </a:rPr>
-                        <a:t>1</a:t>
+                        <a:t>Entrepreneur individuel</a:t>
                       </a:r>
-                      <a:endParaRPr lang="en-US" sz="750" dirty="0">
+                    </a:p>
+                  </a:txBody>
+                  <a:tcPr>
+                    <a:lnL w="6350" cap="flat" cmpd="sng" algn="ctr">
+                      <a:solidFill>
+                        <a:srgbClr val="D0DCE8"/>
+                      </a:solidFill>
+                      <a:prstDash val="solid"/>
+                      <a:round/>
+                      <a:headEnd type="none" w="med" len="med"/>
+                      <a:tailEnd type="none" w="med" len="med"/>
+                    </a:lnL>
+                    <a:lnR w="6350" cap="flat" cmpd="sng" algn="ctr">
+                      <a:solidFill>
+                        <a:srgbClr val="D0DCE8"/>
+                      </a:solidFill>
+                      <a:prstDash val="solid"/>
+                      <a:round/>
+                      <a:headEnd type="none" w="med" len="med"/>
+                      <a:tailEnd type="none" w="med" len="med"/>
+                    </a:lnR>
+                    <a:lnT w="6350" cap="flat" cmpd="sng" algn="ctr">
+                      <a:solidFill>
+                        <a:srgbClr val="D0DCE8"/>
+                      </a:solidFill>
+                      <a:prstDash val="solid"/>
+                      <a:round/>
+                      <a:headEnd type="none" w="med" len="med"/>
+                      <a:tailEnd type="none" w="med" len="med"/>
+                    </a:lnT>
+                    <a:lnB w="6350" cap="flat" cmpd="sng" algn="ctr">
+                      <a:solidFill>
+                        <a:srgbClr val="D0DCE8"/>
+                      </a:solidFill>
+                      <a:prstDash val="solid"/>
+                      <a:round/>
+                      <a:headEnd type="none" w="med" len="med"/>
+                      <a:tailEnd type="none" w="med" len="med"/>
+                    </a:lnB>
+                    <a:solidFill>
+                      <a:srgbClr val="FFF3E6"/>
+                    </a:solidFill>
+                  </a:tcPr>
+                </a:tc>
+                <a:tc>
+                  <a:txBody>
+                    <a:bodyPr/>
+                    <a:lstStyle/>
+                    <a:p>
+                      <a:pPr marL="0" indent="0" algn="ctr">
+                        <a:buNone/>
+                      </a:pPr>
+                      <a:r>
+                        <a:rPr lang="en-US" sz="700" dirty="0">
+                          <a:solidFill>
+                            <a:srgbClr val="1E2D3D"/>
+                          </a:solidFill>
+                          <a:latin typeface="Calibri" pitchFamily="34" charset="0"/>
+                          <a:ea typeface="Calibri" pitchFamily="34" charset="-122"/>
+                          <a:cs typeface="Calibri" pitchFamily="34" charset="-120"/>
+                        </a:rPr>
+                        <a:t>Entrepreneur individuel</a:t>
+                      </a:r>
+                    </a:p>
+                  </a:txBody>
+                  <a:tcPr>
+                    <a:lnL w="6350" cap="flat" cmpd="sng" algn="ctr">
+                      <a:solidFill>
+                        <a:srgbClr val="D0DCE8"/>
+                      </a:solidFill>
+                      <a:prstDash val="solid"/>
+                      <a:round/>
+                      <a:headEnd type="none" w="med" len="med"/>
+                      <a:tailEnd type="none" w="med" len="med"/>
+                    </a:lnL>
+                    <a:lnR w="6350" cap="flat" cmpd="sng" algn="ctr">
+                      <a:solidFill>
+                        <a:srgbClr val="D0DCE8"/>
+                      </a:solidFill>
+                      <a:prstDash val="solid"/>
+                      <a:round/>
+                      <a:headEnd type="none" w="med" len="med"/>
+                      <a:tailEnd type="none" w="med" len="med"/>
+                    </a:lnR>
+                    <a:lnT w="6350" cap="flat" cmpd="sng" algn="ctr">
+                      <a:solidFill>
+                        <a:srgbClr val="D0DCE8"/>
+                      </a:solidFill>
+                      <a:prstDash val="solid"/>
+                      <a:round/>
+                      <a:headEnd type="none" w="med" len="med"/>
+                      <a:tailEnd type="none" w="med" len="med"/>
+                    </a:lnT>
+                    <a:lnB w="6350" cap="flat" cmpd="sng" algn="ctr">
+                      <a:solidFill>
+                        <a:srgbClr val="D0DCE8"/>
+                      </a:solidFill>
+                      <a:prstDash val="solid"/>
+                      <a:round/>
+                      <a:headEnd type="none" w="med" len="med"/>
+                      <a:tailEnd type="none" w="med" len="med"/>
+                    </a:lnB>
+                    <a:solidFill>
+                      <a:srgbClr val="FFF3E6"/>
+                    </a:solidFill>
+                  </a:tcPr>
+                </a:tc>
+                <a:tc>
+                  <a:txBody>
+                    <a:bodyPr/>
+                    <a:lstStyle/>
+                    <a:p>
+                      <a:pPr marL="0" indent="0" algn="ctr">
+                        <a:buNone/>
+                      </a:pPr>
+                      <a:r>
+                        <a:rPr lang="en-US" sz="700" dirty="0">
+                          <a:solidFill>
+                            <a:srgbClr val="1E2D3D"/>
+                          </a:solidFill>
+                          <a:latin typeface="Calibri" pitchFamily="34" charset="0"/>
+                          <a:ea typeface="Calibri" pitchFamily="34" charset="-122"/>
+                          <a:cs typeface="Calibri" pitchFamily="34" charset="-120"/>
+                        </a:rPr>
+                        <a:t>Gérant</a:t>
+                      </a:r>
+                    </a:p>
+                  </a:txBody>
+                  <a:tcPr>
+                    <a:lnL w="6350" cap="flat" cmpd="sng" algn="ctr">
+                      <a:solidFill>
+                        <a:srgbClr val="D0DCE8"/>
+                      </a:solidFill>
+                      <a:prstDash val="solid"/>
+                      <a:round/>
+                      <a:headEnd type="none" w="med" len="med"/>
+                      <a:tailEnd type="none" w="med" len="med"/>
+                    </a:lnL>
+                    <a:lnR w="6350" cap="flat" cmpd="sng" algn="ctr">
+                      <a:solidFill>
+                        <a:srgbClr val="D0DCE8"/>
+                      </a:solidFill>
+                      <a:prstDash val="solid"/>
+                      <a:round/>
+                      <a:headEnd type="none" w="med" len="med"/>
+                      <a:tailEnd type="none" w="med" len="med"/>
+                    </a:lnR>
+                    <a:lnT w="6350" cap="flat" cmpd="sng" algn="ctr">
+                      <a:solidFill>
+                        <a:srgbClr val="D0DCE8"/>
+                      </a:solidFill>
+                      <a:prstDash val="solid"/>
+                      <a:round/>
+                      <a:headEnd type="none" w="med" len="med"/>
+                      <a:tailEnd type="none" w="med" len="med"/>
+                    </a:lnT>
+                    <a:lnB w="6350" cap="flat" cmpd="sng" algn="ctr">
+                      <a:solidFill>
+                        <a:srgbClr val="D0DCE8"/>
+                      </a:solidFill>
+                      <a:prstDash val="solid"/>
+                      <a:round/>
+                      <a:headEnd type="none" w="med" len="med"/>
+                      <a:tailEnd type="none" w="med" len="med"/>
+                    </a:lnB>
+                    <a:solidFill>
+                      <a:srgbClr val="EBF4FC"/>
+                    </a:solidFill>
+                  </a:tcPr>
+                </a:tc>
+                <a:tc>
+                  <a:txBody>
+                    <a:bodyPr/>
+                    <a:lstStyle/>
+                    <a:p>
+                      <a:pPr marL="0" indent="0" algn="ctr">
+                        <a:buNone/>
+                      </a:pPr>
+                      <a:r>
+                        <a:rPr lang="en-US" sz="700" dirty="0">
+                          <a:solidFill>
+                            <a:srgbClr val="1E2D3D"/>
+                          </a:solidFill>
+                          <a:latin typeface="Calibri" pitchFamily="34" charset="0"/>
+                          <a:ea typeface="Calibri" pitchFamily="34" charset="-122"/>
+                          <a:cs typeface="Calibri" pitchFamily="34" charset="-120"/>
+                        </a:rPr>
+                        <a:t>Gérant(s)</a:t>
+                      </a:r>
+                    </a:p>
+                  </a:txBody>
+                  <a:tcPr>
+                    <a:lnL w="6350" cap="flat" cmpd="sng" algn="ctr">
+                      <a:solidFill>
+                        <a:srgbClr val="D0DCE8"/>
+                      </a:solidFill>
+                      <a:prstDash val="solid"/>
+                      <a:round/>
+                      <a:headEnd type="none" w="med" len="med"/>
+                      <a:tailEnd type="none" w="med" len="med"/>
+                    </a:lnL>
+                    <a:lnR w="6350" cap="flat" cmpd="sng" algn="ctr">
+                      <a:solidFill>
+                        <a:srgbClr val="D0DCE8"/>
+                      </a:solidFill>
+                      <a:prstDash val="solid"/>
+                      <a:round/>
+                      <a:headEnd type="none" w="med" len="med"/>
+                      <a:tailEnd type="none" w="med" len="med"/>
+                    </a:lnR>
+                    <a:lnT w="6350" cap="flat" cmpd="sng" algn="ctr">
+                      <a:solidFill>
+                        <a:srgbClr val="D0DCE8"/>
+                      </a:solidFill>
+                      <a:prstDash val="solid"/>
+                      <a:round/>
+                      <a:headEnd type="none" w="med" len="med"/>
+                      <a:tailEnd type="none" w="med" len="med"/>
+                    </a:lnT>
+                    <a:lnB w="6350" cap="flat" cmpd="sng" algn="ctr">
+                      <a:solidFill>
+                        <a:srgbClr val="D0DCE8"/>
+                      </a:solidFill>
+                      <a:prstDash val="solid"/>
+                      <a:round/>
+                      <a:headEnd type="none" w="med" len="med"/>
+                      <a:tailEnd type="none" w="med" len="med"/>
+                    </a:lnB>
+                    <a:solidFill>
+                      <a:srgbClr val="EBF4FC"/>
+                    </a:solidFill>
+                  </a:tcPr>
+                </a:tc>
+                <a:tc>
+                  <a:txBody>
+                    <a:bodyPr/>
+                    <a:lstStyle/>
+                    <a:p>
+                      <a:pPr marL="0" indent="0" algn="ctr">
+                        <a:buNone/>
+                      </a:pPr>
+                      <a:r>
+                        <a:rPr lang="en-US" sz="700" dirty="0">
+                          <a:solidFill>
+                            <a:srgbClr val="1E2D3D"/>
+                          </a:solidFill>
+                          <a:latin typeface="Calibri" pitchFamily="34" charset="0"/>
+                          <a:ea typeface="Calibri" pitchFamily="34" charset="-122"/>
+                          <a:cs typeface="Calibri" pitchFamily="34" charset="-120"/>
+                        </a:rPr>
+                        <a:t>Président</a:t>
+                      </a:r>
+                    </a:p>
+                  </a:txBody>
+                  <a:tcPr>
+                    <a:lnL w="6350" cap="flat" cmpd="sng" algn="ctr">
+                      <a:solidFill>
+                        <a:srgbClr val="D0DCE8"/>
+                      </a:solidFill>
+                      <a:prstDash val="solid"/>
+                      <a:round/>
+                      <a:headEnd type="none" w="med" len="med"/>
+                      <a:tailEnd type="none" w="med" len="med"/>
+                    </a:lnL>
+                    <a:lnR w="6350" cap="flat" cmpd="sng" algn="ctr">
+                      <a:solidFill>
+                        <a:srgbClr val="D0DCE8"/>
+                      </a:solidFill>
+                      <a:prstDash val="solid"/>
+                      <a:round/>
+                      <a:headEnd type="none" w="med" len="med"/>
+                      <a:tailEnd type="none" w="med" len="med"/>
+                    </a:lnR>
+                    <a:lnT w="6350" cap="flat" cmpd="sng" algn="ctr">
+                      <a:solidFill>
+                        <a:srgbClr val="D0DCE8"/>
+                      </a:solidFill>
+                      <a:prstDash val="solid"/>
+                      <a:round/>
+                      <a:headEnd type="none" w="med" len="med"/>
+                      <a:tailEnd type="none" w="med" len="med"/>
+                    </a:lnT>
+                    <a:lnB w="6350" cap="flat" cmpd="sng" algn="ctr">
+                      <a:solidFill>
+                        <a:srgbClr val="D0DCE8"/>
+                      </a:solidFill>
+                      <a:prstDash val="solid"/>
+                      <a:round/>
+                      <a:headEnd type="none" w="med" len="med"/>
+                      <a:tailEnd type="none" w="med" len="med"/>
+                    </a:lnB>
+                    <a:solidFill>
+                      <a:srgbClr val="EBF4FC"/>
+                    </a:solidFill>
+                  </a:tcPr>
+                </a:tc>
+                <a:tc>
+                  <a:txBody>
+                    <a:bodyPr/>
+                    <a:lstStyle/>
+                    <a:p>
+                      <a:pPr marL="0" indent="0" algn="ctr">
+                        <a:buNone/>
+                      </a:pPr>
+                      <a:r>
+                        <a:rPr lang="en-US" sz="700" dirty="0">
+                          <a:solidFill>
+                            <a:srgbClr val="1E2D3D"/>
+                          </a:solidFill>
+                          <a:latin typeface="Calibri" pitchFamily="34" charset="0"/>
+                          <a:ea typeface="Calibri" pitchFamily="34" charset="-122"/>
+                          <a:cs typeface="Calibri" pitchFamily="34" charset="-120"/>
+                        </a:rPr>
+                        <a:t>Président</a:t>
+                      </a:r>
+                    </a:p>
+                  </a:txBody>
+                  <a:tcPr>
+                    <a:lnL w="6350" cap="flat" cmpd="sng" algn="ctr">
+                      <a:solidFill>
+                        <a:srgbClr val="D0DCE8"/>
+                      </a:solidFill>
+                      <a:prstDash val="solid"/>
+                      <a:round/>
+                      <a:headEnd type="none" w="med" len="med"/>
+                      <a:tailEnd type="none" w="med" len="med"/>
+                    </a:lnL>
+                    <a:lnR w="6350" cap="flat" cmpd="sng" algn="ctr">
+                      <a:solidFill>
+                        <a:srgbClr val="D0DCE8"/>
+                      </a:solidFill>
+                      <a:prstDash val="solid"/>
+                      <a:round/>
+                      <a:headEnd type="none" w="med" len="med"/>
+                      <a:tailEnd type="none" w="med" len="med"/>
+                    </a:lnR>
+                    <a:lnT w="6350" cap="flat" cmpd="sng" algn="ctr">
+                      <a:solidFill>
+                        <a:srgbClr val="D0DCE8"/>
+                      </a:solidFill>
+                      <a:prstDash val="solid"/>
+                      <a:round/>
+                      <a:headEnd type="none" w="med" len="med"/>
+                      <a:tailEnd type="none" w="med" len="med"/>
+                    </a:lnT>
+                    <a:lnB w="6350" cap="flat" cmpd="sng" algn="ctr">
+                      <a:solidFill>
+                        <a:srgbClr val="D0DCE8"/>
+                      </a:solidFill>
+                      <a:prstDash val="solid"/>
+                      <a:round/>
+                      <a:headEnd type="none" w="med" len="med"/>
+                      <a:tailEnd type="none" w="med" len="med"/>
+                    </a:lnB>
+                    <a:solidFill>
+                      <a:srgbClr val="EBF4FC"/>
+                    </a:solidFill>
+                  </a:tcPr>
+                </a:tc>
+                <a:tc>
+                  <a:txBody>
+                    <a:bodyPr/>
+                    <a:lstStyle/>
+                    <a:p>
+                      <a:pPr marL="0" indent="0" algn="ctr">
+                        <a:buNone/>
+                      </a:pPr>
+                      <a:r>
+                        <a:rPr lang="en-US" sz="700" dirty="0">
+                          <a:solidFill>
+                            <a:srgbClr val="1E2D3D"/>
+                          </a:solidFill>
+                          <a:latin typeface="Calibri" pitchFamily="34" charset="0"/>
+                          <a:ea typeface="Calibri" pitchFamily="34" charset="-122"/>
+                          <a:cs typeface="Calibri" pitchFamily="34" charset="-120"/>
+                        </a:rPr>
+                        <a:t>PDG (ou Président + DG)</a:t>
+                      </a:r>
+                    </a:p>
+                  </a:txBody>
+                  <a:tcPr>
+                    <a:lnL w="6350" cap="flat" cmpd="sng" algn="ctr">
+                      <a:solidFill>
+                        <a:srgbClr val="D0DCE8"/>
+                      </a:solidFill>
+                      <a:prstDash val="solid"/>
+                      <a:round/>
+                      <a:headEnd type="none" w="med" len="med"/>
+                      <a:tailEnd type="none" w="med" len="med"/>
+                    </a:lnL>
+                    <a:lnR w="6350" cap="flat" cmpd="sng" algn="ctr">
+                      <a:solidFill>
+                        <a:srgbClr val="D0DCE8"/>
+                      </a:solidFill>
+                      <a:prstDash val="solid"/>
+                      <a:round/>
+                      <a:headEnd type="none" w="med" len="med"/>
+                      <a:tailEnd type="none" w="med" len="med"/>
+                    </a:lnR>
+                    <a:lnT w="6350" cap="flat" cmpd="sng" algn="ctr">
+                      <a:solidFill>
+                        <a:srgbClr val="D0DCE8"/>
+                      </a:solidFill>
+                      <a:prstDash val="solid"/>
+                      <a:round/>
+                      <a:headEnd type="none" w="med" len="med"/>
+                      <a:tailEnd type="none" w="med" len="med"/>
+                    </a:lnT>
+                    <a:lnB w="6350" cap="flat" cmpd="sng" algn="ctr">
+                      <a:solidFill>
+                        <a:srgbClr val="D0DCE8"/>
+                      </a:solidFill>
+                      <a:prstDash val="solid"/>
+                      <a:round/>
+                      <a:headEnd type="none" w="med" len="med"/>
+                      <a:tailEnd type="none" w="med" len="med"/>
+                    </a:lnB>
+                    <a:solidFill>
+                      <a:srgbClr val="EBF4FC"/>
+                    </a:solidFill>
+                  </a:tcPr>
+                </a:tc>
+                <a:extLst>
+                  <a:ext uri="{0D108BD9-81ED-4DB2-BD59-A6C34878D82A}">
+                    <a16:rowId xmlns:a16="http://schemas.microsoft.com/office/drawing/2014/main" val="2393136471"/>
+                  </a:ext>
+                </a:extLst>
+              </a:tr>
+              <a:tr h="322000">
+                <a:tc>
+                  <a:txBody>
+                    <a:bodyPr/>
+                    <a:lstStyle/>
+                    <a:p>
+                      <a:pPr marL="0" indent="0" algn="ctr">
+                        <a:buNone/>
+                      </a:pPr>
+                      <a:r>
+                        <a:rPr lang="en-US" sz="700" dirty="0">
+                          <a:solidFill>
+                            <a:srgbClr val="1E2D3D"/>
+                          </a:solidFill>
+                          <a:latin typeface="Calibri" pitchFamily="34" charset="0"/>
+                          <a:ea typeface="Calibri" pitchFamily="34" charset="-122"/>
+                          <a:cs typeface="Calibri" pitchFamily="34" charset="-120"/>
+                        </a:rPr>
+                        <a:t>Nb associés</a:t>
+                      </a:r>
+                      <a:endParaRPr lang="en-US" sz="700" dirty="0">
                         <a:latin typeface="Calibri" charset="0"/>
                         <a:ea typeface="Calibri" charset="0"/>
                         <a:cs typeface="Calibri" charset="0"/>
@@ -49392,7 +50515,7 @@
                         <a:buNone/>
                       </a:pPr>
                       <a:r>
-                        <a:rPr lang="en-US" sz="750" dirty="0">
+                        <a:rPr lang="en-US" sz="700" dirty="0">
                           <a:solidFill>
                             <a:srgbClr val="1E2D3D"/>
                           </a:solidFill>
@@ -49402,7 +50525,7 @@
                         </a:rPr>
                         <a:t>1</a:t>
                       </a:r>
-                      <a:endParaRPr lang="en-US" sz="750" dirty="0">
+                      <a:endParaRPr lang="en-US" sz="700" dirty="0">
                         <a:latin typeface="Calibri" charset="0"/>
                         <a:ea typeface="Calibri" charset="0"/>
                         <a:cs typeface="Calibri" charset="0"/>
@@ -49460,7 +50583,7 @@
                         <a:buNone/>
                       </a:pPr>
                       <a:r>
-                        <a:rPr lang="en-US" sz="750" dirty="0">
+                        <a:rPr lang="en-US" sz="700" dirty="0">
                           <a:solidFill>
                             <a:srgbClr val="1E2D3D"/>
                           </a:solidFill>
@@ -49470,7 +50593,7 @@
                         </a:rPr>
                         <a:t>1</a:t>
                       </a:r>
-                      <a:endParaRPr lang="en-US" sz="750" dirty="0">
+                      <a:endParaRPr lang="en-US" sz="700" dirty="0">
                         <a:latin typeface="Calibri" charset="0"/>
                         <a:ea typeface="Calibri" charset="0"/>
                         <a:cs typeface="Calibri" charset="0"/>
@@ -49528,7 +50651,7 @@
                         <a:buNone/>
                       </a:pPr>
                       <a:r>
-                        <a:rPr lang="en-US" sz="750" dirty="0">
+                        <a:rPr lang="en-US" sz="700" dirty="0">
                           <a:solidFill>
                             <a:srgbClr val="1E2D3D"/>
                           </a:solidFill>
@@ -49536,20 +50659,9 @@
                           <a:ea typeface="Calibri" pitchFamily="34" charset="-122"/>
                           <a:cs typeface="Calibri" pitchFamily="34" charset="-120"/>
                         </a:rPr>
-                        <a:t>2 </a:t>
+                        <a:t>1</a:t>
                       </a:r>
-                      <a:r>
-                        <a:rPr lang="en-US" sz="750">
-                          <a:solidFill>
-                            <a:srgbClr val="1E2D3D"/>
-                          </a:solidFill>
-                          <a:latin typeface="Calibri" pitchFamily="34" charset="0"/>
-                          <a:ea typeface="Calibri" pitchFamily="34" charset="-122"/>
-                          <a:cs typeface="Calibri" pitchFamily="34" charset="-120"/>
-                        </a:rPr>
-                        <a:t>min max 100</a:t>
-                      </a:r>
-                      <a:endParaRPr lang="en-US" sz="750" dirty="0">
+                      <a:endParaRPr lang="en-US" sz="700" dirty="0">
                         <a:latin typeface="Calibri" charset="0"/>
                         <a:ea typeface="Calibri" charset="0"/>
                         <a:cs typeface="Calibri" charset="0"/>
@@ -49607,7 +50719,7 @@
                         <a:buNone/>
                       </a:pPr>
                       <a:r>
-                        <a:rPr lang="en-US" sz="750" dirty="0">
+                        <a:rPr lang="en-US" sz="700" dirty="0">
                           <a:solidFill>
                             <a:srgbClr val="1E2D3D"/>
                           </a:solidFill>
@@ -49615,9 +50727,20 @@
                           <a:ea typeface="Calibri" pitchFamily="34" charset="-122"/>
                           <a:cs typeface="Calibri" pitchFamily="34" charset="-120"/>
                         </a:rPr>
-                        <a:t>1</a:t>
+                        <a:t>2 </a:t>
                       </a:r>
-                      <a:endParaRPr lang="en-US" sz="750" dirty="0">
+                      <a:r>
+                        <a:rPr lang="en-US" sz="700">
+                          <a:solidFill>
+                            <a:srgbClr val="1E2D3D"/>
+                          </a:solidFill>
+                          <a:latin typeface="Calibri" pitchFamily="34" charset="0"/>
+                          <a:ea typeface="Calibri" pitchFamily="34" charset="-122"/>
+                          <a:cs typeface="Calibri" pitchFamily="34" charset="-120"/>
+                        </a:rPr>
+                        <a:t>min max 100</a:t>
+                      </a:r>
+                      <a:endParaRPr lang="en-US" sz="700" dirty="0">
                         <a:latin typeface="Calibri" charset="0"/>
                         <a:ea typeface="Calibri" charset="0"/>
                         <a:cs typeface="Calibri" charset="0"/>
@@ -49675,7 +50798,7 @@
                         <a:buNone/>
                       </a:pPr>
                       <a:r>
-                        <a:rPr lang="en-US" sz="750" dirty="0">
+                        <a:rPr lang="en-US" sz="700" dirty="0">
                           <a:solidFill>
                             <a:srgbClr val="1E2D3D"/>
                           </a:solidFill>
@@ -49683,9 +50806,9 @@
                           <a:ea typeface="Calibri" pitchFamily="34" charset="-122"/>
                           <a:cs typeface="Calibri" pitchFamily="34" charset="-120"/>
                         </a:rPr>
-                        <a:t>2 min</a:t>
+                        <a:t>1</a:t>
                       </a:r>
-                      <a:endParaRPr lang="en-US" sz="750" dirty="0">
+                      <a:endParaRPr lang="en-US" sz="700" dirty="0">
                         <a:latin typeface="Calibri" charset="0"/>
                         <a:ea typeface="Calibri" charset="0"/>
                         <a:cs typeface="Calibri" charset="0"/>
@@ -49743,7 +50866,75 @@
                         <a:buNone/>
                       </a:pPr>
                       <a:r>
-                        <a:rPr lang="en-US" sz="750" dirty="0">
+                        <a:rPr lang="en-US" sz="700" dirty="0">
+                          <a:solidFill>
+                            <a:srgbClr val="1E2D3D"/>
+                          </a:solidFill>
+                          <a:latin typeface="Calibri" pitchFamily="34" charset="0"/>
+                          <a:ea typeface="Calibri" pitchFamily="34" charset="-122"/>
+                          <a:cs typeface="Calibri" pitchFamily="34" charset="-120"/>
+                        </a:rPr>
+                        <a:t>2 min</a:t>
+                      </a:r>
+                      <a:endParaRPr lang="en-US" sz="700" dirty="0">
+                        <a:latin typeface="Calibri" charset="0"/>
+                        <a:ea typeface="Calibri" charset="0"/>
+                        <a:cs typeface="Calibri" charset="0"/>
+                      </a:endParaRPr>
+                    </a:p>
+                  </a:txBody>
+                  <a:tcPr>
+                    <a:lnL w="6350" cap="flat" cmpd="sng" algn="ctr">
+                      <a:solidFill>
+                        <a:srgbClr val="D0DCE8"/>
+                      </a:solidFill>
+                      <a:prstDash val="solid"/>
+                      <a:round/>
+                      <a:headEnd type="none" w="med" len="med"/>
+                      <a:tailEnd type="none" w="med" len="med"/>
+                    </a:lnL>
+                    <a:lnR w="6350" cap="flat" cmpd="sng" algn="ctr">
+                      <a:solidFill>
+                        <a:srgbClr val="D0DCE8"/>
+                      </a:solidFill>
+                      <a:prstDash val="solid"/>
+                      <a:round/>
+                      <a:headEnd type="none" w="med" len="med"/>
+                      <a:tailEnd type="none" w="med" len="med"/>
+                    </a:lnR>
+                    <a:lnT w="6350" cap="flat" cmpd="sng" algn="ctr">
+                      <a:solidFill>
+                        <a:srgbClr val="D0DCE8"/>
+                      </a:solidFill>
+                      <a:prstDash val="solid"/>
+                      <a:round/>
+                      <a:headEnd type="none" w="med" len="med"/>
+                      <a:tailEnd type="none" w="med" len="med"/>
+                    </a:lnT>
+                    <a:lnB w="6350" cap="flat" cmpd="sng" algn="ctr">
+                      <a:solidFill>
+                        <a:srgbClr val="D0DCE8"/>
+                      </a:solidFill>
+                      <a:prstDash val="solid"/>
+                      <a:round/>
+                      <a:headEnd type="none" w="med" len="med"/>
+                      <a:tailEnd type="none" w="med" len="med"/>
+                    </a:lnB>
+                    <a:solidFill>
+                      <a:srgbClr val="FFFFFF"/>
+                    </a:solidFill>
+                  </a:tcPr>
+                </a:tc>
+                <a:tc>
+                  <a:txBody>
+                    <a:bodyPr/>
+                    <a:lstStyle/>
+                    <a:p>
+                      <a:pPr marL="0" indent="0" algn="ctr">
+                        <a:buNone/>
+                      </a:pPr>
+                      <a:r>
+                        <a:rPr lang="en-US" sz="700" dirty="0">
                           <a:solidFill>
                             <a:srgbClr val="1E2D3D"/>
                           </a:solidFill>
@@ -49753,7 +50944,7 @@
                         </a:rPr>
                         <a:t>2 min (7 si cotée)</a:t>
                       </a:r>
-                      <a:endParaRPr lang="en-US" sz="750" dirty="0">
+                      <a:endParaRPr lang="en-US" sz="700" dirty="0">
                         <a:latin typeface="Calibri" charset="0"/>
                         <a:ea typeface="Calibri" charset="0"/>
                         <a:cs typeface="Calibri" charset="0"/>
@@ -49808,7 +50999,7 @@
                   </a:ext>
                 </a:extLst>
               </a:tr>
-              <a:tr h="353000">
+              <a:tr h="322000">
                 <a:tc>
                   <a:txBody>
                     <a:bodyPr/>
@@ -49818,7 +51009,7 @@
                         <a:buNone/>
                       </a:pPr>
                       <a:r>
-                        <a:rPr lang="en-US" sz="750" dirty="0">
+                        <a:rPr lang="en-US" sz="700" dirty="0">
                           <a:solidFill>
                             <a:srgbClr val="1E2D3D"/>
                           </a:solidFill>
@@ -49828,7 +51019,7 @@
                         </a:rPr>
                         <a:t>Capital social</a:t>
                       </a:r>
-                      <a:endParaRPr lang="en-US" sz="750" dirty="0">
+                      <a:endParaRPr lang="en-US" sz="700" dirty="0">
                         <a:latin typeface="Calibri" charset="0"/>
                         <a:ea typeface="Calibri" charset="0"/>
                         <a:cs typeface="Calibri" charset="0"/>
@@ -49886,7 +51077,7 @@
                         <a:buNone/>
                       </a:pPr>
                       <a:r>
-                        <a:rPr lang="en-US" sz="750" dirty="0">
+                        <a:rPr lang="en-US" sz="700" dirty="0">
                           <a:solidFill>
                             <a:srgbClr val="1E2D3D"/>
                           </a:solidFill>
@@ -49896,7 +51087,7 @@
                         </a:rPr>
                         <a:t>—</a:t>
                       </a:r>
-                      <a:endParaRPr lang="en-US" sz="750" dirty="0">
+                      <a:endParaRPr lang="en-US" sz="700" dirty="0">
                         <a:latin typeface="Calibri" charset="0"/>
                         <a:ea typeface="Calibri" charset="0"/>
                         <a:cs typeface="Calibri" charset="0"/>
@@ -49954,7 +51145,7 @@
                         <a:buNone/>
                       </a:pPr>
                       <a:r>
-                        <a:rPr lang="en-US" sz="750" dirty="0">
+                        <a:rPr lang="en-US" sz="700" dirty="0">
                           <a:solidFill>
                             <a:srgbClr val="1E2D3D"/>
                           </a:solidFill>
@@ -49964,7 +51155,7 @@
                         </a:rPr>
                         <a:t>—</a:t>
                       </a:r>
-                      <a:endParaRPr lang="en-US" sz="750" dirty="0">
+                      <a:endParaRPr lang="en-US" sz="700" dirty="0">
                         <a:latin typeface="Calibri" charset="0"/>
                         <a:ea typeface="Calibri" charset="0"/>
                         <a:cs typeface="Calibri" charset="0"/>
@@ -50022,7 +51213,7 @@
                         <a:buNone/>
                       </a:pPr>
                       <a:r>
-                        <a:rPr lang="en-US" sz="750" dirty="0">
+                        <a:rPr lang="en-US" sz="700" dirty="0">
                           <a:solidFill>
                             <a:srgbClr val="1E2D3D"/>
                           </a:solidFill>
@@ -50032,7 +51223,7 @@
                         </a:rPr>
                         <a:t>1 €</a:t>
                       </a:r>
-                      <a:endParaRPr lang="en-US" sz="750" dirty="0">
+                      <a:endParaRPr lang="en-US" sz="700" dirty="0">
                         <a:latin typeface="Calibri" charset="0"/>
                         <a:ea typeface="Calibri" charset="0"/>
                         <a:cs typeface="Calibri" charset="0"/>
@@ -50043,7 +51234,7 @@
                         <a:buNone/>
                       </a:pPr>
                       <a:r>
-                        <a:rPr lang="en-US" sz="750" dirty="0">
+                        <a:rPr lang="en-US" sz="700" dirty="0">
                           <a:solidFill>
                             <a:srgbClr val="1E2D3D"/>
                           </a:solidFill>
@@ -50053,7 +51244,7 @@
                         </a:rPr>
                         <a:t>(libéré 5 ans)</a:t>
                       </a:r>
-                      <a:endParaRPr lang="en-US" sz="750" dirty="0">
+                      <a:endParaRPr lang="en-US" sz="700" dirty="0">
                         <a:latin typeface="Calibri" charset="0"/>
                         <a:ea typeface="Calibri" charset="0"/>
                         <a:cs typeface="Calibri" charset="0"/>
@@ -50111,7 +51302,7 @@
                         <a:buNone/>
                       </a:pPr>
                       <a:r>
-                        <a:rPr lang="en-US" sz="750" dirty="0">
+                        <a:rPr lang="en-US" sz="700" dirty="0">
                           <a:solidFill>
                             <a:srgbClr val="1E2D3D"/>
                           </a:solidFill>
@@ -50121,7 +51312,7 @@
                         </a:rPr>
                         <a:t>1 €</a:t>
                       </a:r>
-                      <a:endParaRPr lang="en-US" sz="750" dirty="0">
+                      <a:endParaRPr lang="en-US" sz="700" dirty="0">
                         <a:latin typeface="Calibri" charset="0"/>
                         <a:ea typeface="Calibri" charset="0"/>
                         <a:cs typeface="Calibri" charset="0"/>
@@ -50132,7 +51323,7 @@
                         <a:buNone/>
                       </a:pPr>
                       <a:r>
-                        <a:rPr lang="en-US" sz="750" dirty="0">
+                        <a:rPr lang="en-US" sz="700" dirty="0">
                           <a:solidFill>
                             <a:srgbClr val="1E2D3D"/>
                           </a:solidFill>
@@ -50142,7 +51333,7 @@
                         </a:rPr>
                         <a:t>(libéré 5 ans)</a:t>
                       </a:r>
-                      <a:endParaRPr lang="en-US" sz="750" dirty="0">
+                      <a:endParaRPr lang="en-US" sz="700" dirty="0">
                         <a:latin typeface="Calibri" charset="0"/>
                         <a:ea typeface="Calibri" charset="0"/>
                         <a:cs typeface="Calibri" charset="0"/>
@@ -50200,7 +51391,7 @@
                         <a:buNone/>
                       </a:pPr>
                       <a:r>
-                        <a:rPr lang="en-US" sz="750" dirty="0">
+                        <a:rPr lang="en-US" sz="700" dirty="0">
                           <a:solidFill>
                             <a:srgbClr val="1E2D3D"/>
                           </a:solidFill>
@@ -50210,7 +51401,7 @@
                         </a:rPr>
                         <a:t>Libre</a:t>
                       </a:r>
-                      <a:endParaRPr lang="en-US" sz="750" dirty="0">
+                      <a:endParaRPr lang="en-US" sz="700" dirty="0">
                         <a:latin typeface="Calibri" charset="0"/>
                         <a:ea typeface="Calibri" charset="0"/>
                         <a:cs typeface="Calibri" charset="0"/>
@@ -50221,7 +51412,7 @@
                         <a:buNone/>
                       </a:pPr>
                       <a:r>
-                        <a:rPr lang="en-US" sz="750" dirty="0">
+                        <a:rPr lang="en-US" sz="700" dirty="0">
                           <a:solidFill>
                             <a:srgbClr val="1E2D3D"/>
                           </a:solidFill>
@@ -50231,7 +51422,7 @@
                         </a:rPr>
                         <a:t>(libéré 5 ans)</a:t>
                       </a:r>
-                      <a:endParaRPr lang="en-US" sz="750" dirty="0">
+                      <a:endParaRPr lang="en-US" sz="700" dirty="0">
                         <a:latin typeface="Calibri" charset="0"/>
                         <a:ea typeface="Calibri" charset="0"/>
                         <a:cs typeface="Calibri" charset="0"/>
@@ -50289,7 +51480,7 @@
                         <a:buNone/>
                       </a:pPr>
                       <a:r>
-                        <a:rPr lang="en-US" sz="750" dirty="0">
+                        <a:rPr lang="en-US" sz="700" dirty="0">
                           <a:solidFill>
                             <a:srgbClr val="1E2D3D"/>
                           </a:solidFill>
@@ -50299,7 +51490,7 @@
                         </a:rPr>
                         <a:t>Libre</a:t>
                       </a:r>
-                      <a:endParaRPr lang="en-US" sz="750" dirty="0">
+                      <a:endParaRPr lang="en-US" sz="700" dirty="0">
                         <a:latin typeface="Calibri" charset="0"/>
                         <a:ea typeface="Calibri" charset="0"/>
                         <a:cs typeface="Calibri" charset="0"/>
@@ -50357,7 +51548,7 @@
                         <a:buNone/>
                       </a:pPr>
                       <a:r>
-                        <a:rPr lang="en-US" sz="750" dirty="0">
+                        <a:rPr lang="en-US" sz="700" dirty="0">
                           <a:solidFill>
                             <a:srgbClr val="1E2D3D"/>
                           </a:solidFill>
@@ -50367,7 +51558,7 @@
                         </a:rPr>
                         <a:t>37 000 €</a:t>
                       </a:r>
-                      <a:endParaRPr lang="en-US" sz="750" dirty="0">
+                      <a:endParaRPr lang="en-US" sz="700" dirty="0">
                         <a:latin typeface="Calibri" charset="0"/>
                         <a:ea typeface="Calibri" charset="0"/>
                         <a:cs typeface="Calibri" charset="0"/>
@@ -50422,7 +51613,7 @@
                   </a:ext>
                 </a:extLst>
               </a:tr>
-              <a:tr h="353000">
+              <a:tr h="322000">
                 <a:tc>
                   <a:txBody>
                     <a:bodyPr/>
@@ -50432,7 +51623,7 @@
                         <a:buNone/>
                       </a:pPr>
                       <a:r>
-                        <a:rPr lang="en-US" sz="750" dirty="0">
+                        <a:rPr lang="en-US" sz="700" dirty="0">
                           <a:solidFill>
                             <a:srgbClr val="1E2D3D"/>
                           </a:solidFill>
@@ -50442,7 +51633,7 @@
                         </a:rPr>
                         <a:t>Capital libéré</a:t>
                       </a:r>
-                      <a:endParaRPr lang="en-US" sz="750" dirty="0">
+                      <a:endParaRPr lang="en-US" sz="700" dirty="0">
                         <a:latin typeface="Calibri" charset="0"/>
                         <a:ea typeface="Calibri" charset="0"/>
                         <a:cs typeface="Calibri" charset="0"/>
@@ -50500,7 +51691,7 @@
                         <a:buNone/>
                       </a:pPr>
                       <a:r>
-                        <a:rPr lang="en-US" sz="750" dirty="0">
+                        <a:rPr lang="en-US" sz="700" dirty="0">
                           <a:solidFill>
                             <a:srgbClr val="1E2D3D"/>
                           </a:solidFill>
@@ -50510,7 +51701,7 @@
                         </a:rPr>
                         <a:t>—</a:t>
                       </a:r>
-                      <a:endParaRPr lang="en-US" sz="750" dirty="0">
+                      <a:endParaRPr lang="en-US" sz="700" dirty="0">
                         <a:latin typeface="Calibri" charset="0"/>
                         <a:ea typeface="Calibri" charset="0"/>
                         <a:cs typeface="Calibri" charset="0"/>
@@ -50568,7 +51759,7 @@
                         <a:buNone/>
                       </a:pPr>
                       <a:r>
-                        <a:rPr lang="en-US" sz="750" dirty="0">
+                        <a:rPr lang="en-US" sz="700" dirty="0">
                           <a:solidFill>
                             <a:srgbClr val="1E2D3D"/>
                           </a:solidFill>
@@ -50578,7 +51769,7 @@
                         </a:rPr>
                         <a:t>—</a:t>
                       </a:r>
-                      <a:endParaRPr lang="en-US" sz="750" dirty="0">
+                      <a:endParaRPr lang="en-US" sz="700" dirty="0">
                         <a:latin typeface="Calibri" charset="0"/>
                         <a:ea typeface="Calibri" charset="0"/>
                         <a:cs typeface="Calibri" charset="0"/>
@@ -50636,7 +51827,7 @@
                         <a:buNone/>
                       </a:pPr>
                       <a:r>
-                        <a:rPr lang="en-US" sz="750" dirty="0">
+                        <a:rPr lang="en-US" sz="700" dirty="0">
                           <a:solidFill>
                             <a:srgbClr val="1E2D3D"/>
                           </a:solidFill>
@@ -50646,7 +51837,7 @@
                         </a:rPr>
                         <a:t>20% à la création</a:t>
                       </a:r>
-                      <a:endParaRPr lang="en-US" sz="750" dirty="0">
+                      <a:endParaRPr lang="en-US" sz="700" dirty="0">
                         <a:latin typeface="Calibri" charset="0"/>
                         <a:ea typeface="Calibri" charset="0"/>
                         <a:cs typeface="Calibri" charset="0"/>
@@ -50657,7 +51848,7 @@
                         <a:buNone/>
                       </a:pPr>
                       <a:r>
-                        <a:rPr lang="en-US" sz="750" dirty="0">
+                        <a:rPr lang="en-US" sz="700" dirty="0">
                           <a:solidFill>
                             <a:srgbClr val="1E2D3D"/>
                           </a:solidFill>
@@ -50667,7 +51858,7 @@
                         </a:rPr>
                         <a:t>80% sur 5 ans</a:t>
                       </a:r>
-                      <a:endParaRPr lang="en-US" sz="750" dirty="0">
+                      <a:endParaRPr lang="en-US" sz="700" dirty="0">
                         <a:latin typeface="Calibri" charset="0"/>
                         <a:ea typeface="Calibri" charset="0"/>
                         <a:cs typeface="Calibri" charset="0"/>
@@ -50725,7 +51916,7 @@
                         <a:buNone/>
                       </a:pPr>
                       <a:r>
-                        <a:rPr lang="en-US" sz="750" dirty="0">
+                        <a:rPr lang="en-US" sz="700" dirty="0">
                           <a:solidFill>
                             <a:srgbClr val="1E2D3D"/>
                           </a:solidFill>
@@ -50735,7 +51926,7 @@
                         </a:rPr>
                         <a:t>20% à la création</a:t>
                       </a:r>
-                      <a:endParaRPr lang="en-US" sz="750" dirty="0">
+                      <a:endParaRPr lang="en-US" sz="700" dirty="0">
                         <a:latin typeface="Calibri" charset="0"/>
                         <a:ea typeface="Calibri" charset="0"/>
                         <a:cs typeface="Calibri" charset="0"/>
@@ -50746,7 +51937,7 @@
                         <a:buNone/>
                       </a:pPr>
                       <a:r>
-                        <a:rPr lang="en-US" sz="750" dirty="0">
+                        <a:rPr lang="en-US" sz="700" dirty="0">
                           <a:solidFill>
                             <a:srgbClr val="1E2D3D"/>
                           </a:solidFill>
@@ -50756,7 +51947,7 @@
                         </a:rPr>
                         <a:t>80% sur 5 ans</a:t>
                       </a:r>
-                      <a:endParaRPr lang="en-US" sz="750" dirty="0">
+                      <a:endParaRPr lang="en-US" sz="700" dirty="0">
                         <a:latin typeface="Calibri" charset="0"/>
                         <a:ea typeface="Calibri" charset="0"/>
                         <a:cs typeface="Calibri" charset="0"/>
@@ -50814,7 +52005,7 @@
                         <a:buNone/>
                       </a:pPr>
                       <a:r>
-                        <a:rPr lang="en-US" sz="750" dirty="0">
+                        <a:rPr lang="en-US" sz="700" dirty="0">
                           <a:solidFill>
                             <a:srgbClr val="1E2D3D"/>
                           </a:solidFill>
@@ -50824,7 +52015,7 @@
                         </a:rPr>
                         <a:t>50% à la création</a:t>
                       </a:r>
-                      <a:endParaRPr lang="en-US" sz="750" dirty="0">
+                      <a:endParaRPr lang="en-US" sz="700" dirty="0">
                         <a:latin typeface="Calibri" charset="0"/>
                         <a:ea typeface="Calibri" charset="0"/>
                         <a:cs typeface="Calibri" charset="0"/>
@@ -50835,7 +52026,7 @@
                         <a:buNone/>
                       </a:pPr>
                       <a:r>
-                        <a:rPr lang="en-US" sz="750" dirty="0">
+                        <a:rPr lang="en-US" sz="700" dirty="0">
                           <a:solidFill>
                             <a:srgbClr val="1E2D3D"/>
                           </a:solidFill>
@@ -50845,7 +52036,7 @@
                         </a:rPr>
                         <a:t>50% sur 5 ans</a:t>
                       </a:r>
-                      <a:endParaRPr lang="en-US" sz="750" dirty="0">
+                      <a:endParaRPr lang="en-US" sz="700" dirty="0">
                         <a:latin typeface="Calibri" charset="0"/>
                         <a:ea typeface="Calibri" charset="0"/>
                         <a:cs typeface="Calibri" charset="0"/>
@@ -50903,7 +52094,7 @@
                         <a:buNone/>
                       </a:pPr>
                       <a:r>
-                        <a:rPr lang="en-US" sz="750" dirty="0">
+                        <a:rPr lang="en-US" sz="700" dirty="0">
                           <a:solidFill>
                             <a:srgbClr val="1E2D3D"/>
                           </a:solidFill>
@@ -50913,7 +52104,7 @@
                         </a:rPr>
                         <a:t>—</a:t>
                       </a:r>
-                      <a:endParaRPr lang="en-US" sz="750" dirty="0">
+                      <a:endParaRPr lang="en-US" sz="700" dirty="0">
                         <a:latin typeface="Calibri" charset="0"/>
                         <a:ea typeface="Calibri" charset="0"/>
                         <a:cs typeface="Calibri" charset="0"/>
@@ -50971,7 +52162,7 @@
                         <a:buNone/>
                       </a:pPr>
                       <a:r>
-                        <a:rPr lang="en-US" sz="750" dirty="0">
+                        <a:rPr lang="en-US" sz="700" dirty="0">
                           <a:solidFill>
                             <a:srgbClr val="1E2D3D"/>
                           </a:solidFill>
@@ -50981,7 +52172,7 @@
                         </a:rPr>
                         <a:t>50% à la création</a:t>
                       </a:r>
-                      <a:endParaRPr lang="en-US" sz="750" dirty="0">
+                      <a:endParaRPr lang="en-US" sz="700" dirty="0">
                         <a:latin typeface="Calibri" charset="0"/>
                         <a:ea typeface="Calibri" charset="0"/>
                         <a:cs typeface="Calibri" charset="0"/>
@@ -50992,7 +52183,7 @@
                         <a:buNone/>
                       </a:pPr>
                       <a:r>
-                        <a:rPr lang="en-US" sz="750" dirty="0">
+                        <a:rPr lang="en-US" sz="700" dirty="0">
                           <a:solidFill>
                             <a:srgbClr val="1E2D3D"/>
                           </a:solidFill>
@@ -51002,7 +52193,7 @@
                         </a:rPr>
                         <a:t>50% sur 5 ans</a:t>
                       </a:r>
-                      <a:endParaRPr lang="en-US" sz="750" dirty="0">
+                      <a:endParaRPr lang="en-US" sz="700" dirty="0">
                         <a:latin typeface="Calibri" charset="0"/>
                         <a:ea typeface="Calibri" charset="0"/>
                         <a:cs typeface="Calibri" charset="0"/>
@@ -51057,7 +52248,7 @@
                   </a:ext>
                 </a:extLst>
               </a:tr>
-              <a:tr h="353000">
+              <a:tr h="322000">
                 <a:tc>
                   <a:txBody>
                     <a:bodyPr/>
@@ -51067,7 +52258,7 @@
                         <a:buNone/>
                       </a:pPr>
                       <a:r>
-                        <a:rPr lang="en-US" sz="750" dirty="0">
+                        <a:rPr lang="en-US" sz="700" dirty="0">
                           <a:solidFill>
                             <a:srgbClr val="1E2D3D"/>
                           </a:solidFill>
@@ -51077,7 +52268,7 @@
                         </a:rPr>
                         <a:t>Responsabilité</a:t>
                       </a:r>
-                      <a:endParaRPr lang="en-US" sz="750" dirty="0">
+                      <a:endParaRPr lang="en-US" sz="700" dirty="0">
                         <a:latin typeface="Calibri" charset="0"/>
                         <a:ea typeface="Calibri" charset="0"/>
                         <a:cs typeface="Calibri" charset="0"/>
@@ -51135,7 +52326,7 @@
                         <a:buNone/>
                       </a:pPr>
                       <a:r>
-                        <a:rPr lang="en-US" sz="750" dirty="0">
+                        <a:rPr lang="en-US" sz="700" dirty="0">
                           <a:solidFill>
                             <a:srgbClr val="1E2D3D"/>
                           </a:solidFill>
@@ -51145,7 +52336,7 @@
                         </a:rPr>
                         <a:t>Illimitée</a:t>
                       </a:r>
-                      <a:endParaRPr lang="en-US" sz="750" dirty="0">
+                      <a:endParaRPr lang="en-US" sz="700" dirty="0">
                         <a:latin typeface="Calibri" charset="0"/>
                         <a:ea typeface="Calibri" charset="0"/>
                         <a:cs typeface="Calibri" charset="0"/>
@@ -51203,7 +52394,7 @@
                         <a:buNone/>
                       </a:pPr>
                       <a:r>
-                        <a:rPr lang="en-US" sz="750" dirty="0">
+                        <a:rPr lang="en-US" sz="700" dirty="0">
                           <a:solidFill>
                             <a:srgbClr val="1E2D3D"/>
                           </a:solidFill>
@@ -51213,7 +52404,7 @@
                         </a:rPr>
                         <a:t>Illimitée</a:t>
                       </a:r>
-                      <a:endParaRPr lang="en-US" sz="750" dirty="0">
+                      <a:endParaRPr lang="en-US" sz="700" dirty="0">
                         <a:latin typeface="Calibri" charset="0"/>
                         <a:ea typeface="Calibri" charset="0"/>
                         <a:cs typeface="Calibri" charset="0"/>
@@ -51271,7 +52462,7 @@
                         <a:buNone/>
                       </a:pPr>
                       <a:r>
-                        <a:rPr lang="en-US" sz="750" dirty="0">
+                        <a:rPr lang="en-US" sz="700" dirty="0">
                           <a:solidFill>
                             <a:srgbClr val="1E2D3D"/>
                           </a:solidFill>
@@ -51281,7 +52472,7 @@
                         </a:rPr>
                         <a:t>Limitée aux apports</a:t>
                       </a:r>
-                      <a:endParaRPr lang="en-US" sz="750" dirty="0">
+                      <a:endParaRPr lang="en-US" sz="700" dirty="0">
                         <a:latin typeface="Calibri" charset="0"/>
                         <a:ea typeface="Calibri" charset="0"/>
                         <a:cs typeface="Calibri" charset="0"/>
@@ -51339,7 +52530,7 @@
                         <a:buNone/>
                       </a:pPr>
                       <a:r>
-                        <a:rPr lang="en-US" sz="750" dirty="0">
+                        <a:rPr lang="en-US" sz="700" dirty="0">
                           <a:solidFill>
                             <a:srgbClr val="1E2D3D"/>
                           </a:solidFill>
@@ -51349,7 +52540,7 @@
                         </a:rPr>
                         <a:t>Limitée aux apports</a:t>
                       </a:r>
-                      <a:endParaRPr lang="en-US" sz="750" dirty="0">
+                      <a:endParaRPr lang="en-US" sz="700" dirty="0">
                         <a:latin typeface="Calibri" charset="0"/>
                         <a:ea typeface="Calibri" charset="0"/>
                         <a:cs typeface="Calibri" charset="0"/>
@@ -51407,7 +52598,7 @@
                         <a:buNone/>
                       </a:pPr>
                       <a:r>
-                        <a:rPr lang="en-US" sz="750" dirty="0">
+                        <a:rPr lang="en-US" sz="700" dirty="0">
                           <a:solidFill>
                             <a:srgbClr val="1E2D3D"/>
                           </a:solidFill>
@@ -51417,7 +52608,7 @@
                         </a:rPr>
                         <a:t>Limitée aux apports</a:t>
                       </a:r>
-                      <a:endParaRPr lang="en-US" sz="750" dirty="0">
+                      <a:endParaRPr lang="en-US" sz="700" dirty="0">
                         <a:latin typeface="Calibri" charset="0"/>
                         <a:ea typeface="Calibri" charset="0"/>
                         <a:cs typeface="Calibri" charset="0"/>
@@ -51475,7 +52666,7 @@
                         <a:buNone/>
                       </a:pPr>
                       <a:r>
-                        <a:rPr lang="en-US" sz="750" dirty="0">
+                        <a:rPr lang="en-US" sz="700" dirty="0">
                           <a:solidFill>
                             <a:srgbClr val="1E2D3D"/>
                           </a:solidFill>
@@ -51485,7 +52676,7 @@
                         </a:rPr>
                         <a:t>Limitée aux apports</a:t>
                       </a:r>
-                      <a:endParaRPr lang="en-US" sz="750" dirty="0">
+                      <a:endParaRPr lang="en-US" sz="700" dirty="0">
                         <a:latin typeface="Calibri" charset="0"/>
                         <a:ea typeface="Calibri" charset="0"/>
                         <a:cs typeface="Calibri" charset="0"/>
@@ -51543,7 +52734,7 @@
                         <a:buNone/>
                       </a:pPr>
                       <a:r>
-                        <a:rPr lang="en-US" sz="750" dirty="0">
+                        <a:rPr lang="en-US" sz="700" dirty="0">
                           <a:solidFill>
                             <a:srgbClr val="1E2D3D"/>
                           </a:solidFill>
@@ -51553,7 +52744,7 @@
                         </a:rPr>
                         <a:t>Limitée aux apports</a:t>
                       </a:r>
-                      <a:endParaRPr lang="en-US" sz="750" dirty="0">
+                      <a:endParaRPr lang="en-US" sz="700" dirty="0">
                         <a:latin typeface="Calibri" charset="0"/>
                         <a:ea typeface="Calibri" charset="0"/>
                         <a:cs typeface="Calibri" charset="0"/>
@@ -51608,7 +52799,7 @@
                   </a:ext>
                 </a:extLst>
               </a:tr>
-              <a:tr h="353000">
+              <a:tr h="322000">
                 <a:tc>
                   <a:txBody>
                     <a:bodyPr/>
@@ -51618,7 +52809,7 @@
                         <a:buNone/>
                       </a:pPr>
                       <a:r>
-                        <a:rPr lang="en-US" sz="750" dirty="0">
+                        <a:rPr lang="en-US" sz="700" dirty="0">
                           <a:solidFill>
                             <a:srgbClr val="1E2D3D"/>
                           </a:solidFill>
@@ -51628,7 +52819,7 @@
                         </a:rPr>
                         <a:t>Régime fiscal</a:t>
                       </a:r>
-                      <a:endParaRPr lang="en-US" sz="750" dirty="0">
+                      <a:endParaRPr lang="en-US" sz="700" dirty="0">
                         <a:latin typeface="Calibri" charset="0"/>
                         <a:ea typeface="Calibri" charset="0"/>
                         <a:cs typeface="Calibri" charset="0"/>
@@ -51686,7 +52877,7 @@
                         <a:buNone/>
                       </a:pPr>
                       <a:r>
-                        <a:rPr lang="en-US" sz="750" dirty="0">
+                        <a:rPr lang="en-US" sz="700" dirty="0">
                           <a:solidFill>
                             <a:srgbClr val="1E2D3D"/>
                           </a:solidFill>
@@ -51696,7 +52887,7 @@
                         </a:rPr>
                         <a:t>IR micro</a:t>
                       </a:r>
-                      <a:endParaRPr lang="en-US" sz="750" dirty="0">
+                      <a:endParaRPr lang="en-US" sz="700" dirty="0">
                         <a:latin typeface="Calibri" charset="0"/>
                         <a:ea typeface="Calibri" charset="0"/>
                         <a:cs typeface="Calibri" charset="0"/>
@@ -51707,7 +52898,7 @@
                         <a:buNone/>
                       </a:pPr>
                       <a:r>
-                        <a:rPr lang="en-US" sz="750" dirty="0">
+                        <a:rPr lang="en-US" sz="700" dirty="0">
                           <a:solidFill>
                             <a:srgbClr val="1E2D3D"/>
                           </a:solidFill>
@@ -51717,7 +52908,7 @@
                         </a:rPr>
                         <a:t>(abatt. 50%)</a:t>
                       </a:r>
-                      <a:endParaRPr lang="en-US" sz="750" dirty="0">
+                      <a:endParaRPr lang="en-US" sz="700" dirty="0">
                         <a:latin typeface="Calibri" charset="0"/>
                         <a:ea typeface="Calibri" charset="0"/>
                         <a:cs typeface="Calibri" charset="0"/>
@@ -51775,7 +52966,7 @@
                         <a:buNone/>
                       </a:pPr>
                       <a:r>
-                        <a:rPr lang="en-US" sz="750" dirty="0">
+                        <a:rPr lang="en-US" sz="700" dirty="0">
                           <a:solidFill>
                             <a:srgbClr val="1E2D3D"/>
                           </a:solidFill>
@@ -51785,7 +52976,7 @@
                         </a:rPr>
                         <a:t>IR BIC</a:t>
                       </a:r>
-                      <a:endParaRPr lang="en-US" sz="750" dirty="0">
+                      <a:endParaRPr lang="en-US" sz="700" dirty="0">
                         <a:latin typeface="Calibri" charset="0"/>
                         <a:ea typeface="Calibri" charset="0"/>
                         <a:cs typeface="Calibri" charset="0"/>
@@ -51796,7 +52987,7 @@
                         <a:buNone/>
                       </a:pPr>
                       <a:r>
-                        <a:rPr lang="en-US" sz="750" dirty="0">
+                        <a:rPr lang="en-US" sz="700" dirty="0">
                           <a:solidFill>
                             <a:srgbClr val="1E2D3D"/>
                           </a:solidFill>
@@ -51806,7 +52997,7 @@
                         </a:rPr>
                         <a:t>(BIC − charges)</a:t>
                       </a:r>
-                      <a:endParaRPr lang="en-US" sz="750" dirty="0">
+                      <a:endParaRPr lang="en-US" sz="700" dirty="0">
                         <a:latin typeface="Calibri" charset="0"/>
                         <a:ea typeface="Calibri" charset="0"/>
                         <a:cs typeface="Calibri" charset="0"/>
@@ -51864,7 +53055,7 @@
                         <a:buNone/>
                       </a:pPr>
                       <a:r>
-                        <a:rPr lang="en-US" sz="750" dirty="0">
+                        <a:rPr lang="en-US" sz="700" dirty="0">
                           <a:solidFill>
                             <a:srgbClr val="1E2D3D"/>
                           </a:solidFill>
@@ -51874,7 +53065,7 @@
                         </a:rPr>
                         <a:t>IR ou IS*</a:t>
                       </a:r>
-                      <a:endParaRPr lang="en-US" sz="750" dirty="0">
+                      <a:endParaRPr lang="en-US" sz="700" dirty="0">
                         <a:latin typeface="Calibri" charset="0"/>
                         <a:ea typeface="Calibri" charset="0"/>
                         <a:cs typeface="Calibri" charset="0"/>
@@ -51885,7 +53076,7 @@
                         <a:buNone/>
                       </a:pPr>
                       <a:r>
-                        <a:rPr lang="en-US" sz="750" dirty="0">
+                        <a:rPr lang="en-US" sz="700" dirty="0">
                           <a:solidFill>
                             <a:srgbClr val="1E2D3D"/>
                           </a:solidFill>
@@ -51895,7 +53086,7 @@
                         </a:rPr>
                         <a:t>(option 5 ans)</a:t>
                       </a:r>
-                      <a:endParaRPr lang="en-US" sz="750" dirty="0">
+                      <a:endParaRPr lang="en-US" sz="700" dirty="0">
                         <a:latin typeface="Calibri" charset="0"/>
                         <a:ea typeface="Calibri" charset="0"/>
                         <a:cs typeface="Calibri" charset="0"/>
@@ -51953,7 +53144,7 @@
                         <a:buNone/>
                       </a:pPr>
                       <a:r>
-                        <a:rPr lang="en-US" sz="750" dirty="0">
+                        <a:rPr lang="en-US" sz="700" dirty="0">
                           <a:solidFill>
                             <a:srgbClr val="1E2D3D"/>
                           </a:solidFill>
@@ -51963,7 +53154,7 @@
                         </a:rPr>
                         <a:t>IR ou IS*</a:t>
                       </a:r>
-                      <a:endParaRPr lang="en-US" sz="750" dirty="0">
+                      <a:endParaRPr lang="en-US" sz="700" dirty="0">
                         <a:latin typeface="Calibri" charset="0"/>
                         <a:ea typeface="Calibri" charset="0"/>
                         <a:cs typeface="Calibri" charset="0"/>
@@ -51974,7 +53165,7 @@
                         <a:buNone/>
                       </a:pPr>
                       <a:r>
-                        <a:rPr lang="en-US" sz="750" dirty="0">
+                        <a:rPr lang="en-US" sz="700" dirty="0">
                           <a:solidFill>
                             <a:srgbClr val="1E2D3D"/>
                           </a:solidFill>
@@ -51984,7 +53175,7 @@
                         </a:rPr>
                         <a:t>(option 5 ans)</a:t>
                       </a:r>
-                      <a:endParaRPr lang="en-US" sz="750" dirty="0">
+                      <a:endParaRPr lang="en-US" sz="700" dirty="0">
                         <a:latin typeface="Calibri" charset="0"/>
                         <a:ea typeface="Calibri" charset="0"/>
                         <a:cs typeface="Calibri" charset="0"/>
@@ -52042,7 +53233,7 @@
                         <a:buNone/>
                       </a:pPr>
                       <a:r>
-                        <a:rPr lang="en-US" sz="750" dirty="0">
+                        <a:rPr lang="en-US" sz="700" dirty="0">
                           <a:solidFill>
                             <a:srgbClr val="1E2D3D"/>
                           </a:solidFill>
@@ -52052,7 +53243,7 @@
                         </a:rPr>
                         <a:t>IS de droit</a:t>
                       </a:r>
-                      <a:endParaRPr lang="en-US" sz="750" dirty="0">
+                      <a:endParaRPr lang="en-US" sz="700" dirty="0">
                         <a:latin typeface="Calibri" charset="0"/>
                         <a:ea typeface="Calibri" charset="0"/>
                         <a:cs typeface="Calibri" charset="0"/>
@@ -52063,7 +53254,7 @@
                         <a:buNone/>
                       </a:pPr>
                       <a:r>
-                        <a:rPr lang="en-US" sz="750" dirty="0">
+                        <a:rPr lang="en-US" sz="700" dirty="0">
                           <a:solidFill>
                             <a:srgbClr val="1E2D3D"/>
                           </a:solidFill>
@@ -52073,7 +53264,7 @@
                         </a:rPr>
                         <a:t>(option IR 5 ans)</a:t>
                       </a:r>
-                      <a:endParaRPr lang="en-US" sz="750" dirty="0">
+                      <a:endParaRPr lang="en-US" sz="700" dirty="0">
                         <a:latin typeface="Calibri" charset="0"/>
                         <a:ea typeface="Calibri" charset="0"/>
                         <a:cs typeface="Calibri" charset="0"/>
@@ -52131,7 +53322,7 @@
                         <a:buNone/>
                       </a:pPr>
                       <a:r>
-                        <a:rPr lang="en-US" sz="750" dirty="0">
+                        <a:rPr lang="en-US" sz="700" dirty="0">
                           <a:solidFill>
                             <a:srgbClr val="1E2D3D"/>
                           </a:solidFill>
@@ -52141,7 +53332,7 @@
                         </a:rPr>
                         <a:t>IS de droit</a:t>
                       </a:r>
-                      <a:endParaRPr lang="en-US" sz="750" dirty="0">
+                      <a:endParaRPr lang="en-US" sz="700" dirty="0">
                         <a:latin typeface="Calibri" charset="0"/>
                         <a:ea typeface="Calibri" charset="0"/>
                         <a:cs typeface="Calibri" charset="0"/>
@@ -52152,7 +53343,7 @@
                         <a:buNone/>
                       </a:pPr>
                       <a:r>
-                        <a:rPr lang="en-US" sz="750" dirty="0">
+                        <a:rPr lang="en-US" sz="700" dirty="0">
                           <a:solidFill>
                             <a:srgbClr val="1E2D3D"/>
                           </a:solidFill>
@@ -52162,7 +53353,7 @@
                         </a:rPr>
                         <a:t>(option IR 5 ans)</a:t>
                       </a:r>
-                      <a:endParaRPr lang="en-US" sz="750" dirty="0">
+                      <a:endParaRPr lang="en-US" sz="700" dirty="0">
                         <a:latin typeface="Calibri" charset="0"/>
                         <a:ea typeface="Calibri" charset="0"/>
                         <a:cs typeface="Calibri" charset="0"/>
@@ -52220,7 +53411,7 @@
                         <a:buNone/>
                       </a:pPr>
                       <a:r>
-                        <a:rPr lang="en-US" sz="750" dirty="0">
+                        <a:rPr lang="en-US" sz="700" dirty="0">
                           <a:solidFill>
                             <a:srgbClr val="1E2D3D"/>
                           </a:solidFill>
@@ -52230,7 +53421,7 @@
                         </a:rPr>
                         <a:t>IS de droit</a:t>
                       </a:r>
-                      <a:endParaRPr lang="en-US" sz="750" dirty="0">
+                      <a:endParaRPr lang="en-US" sz="700" dirty="0">
                         <a:latin typeface="Calibri" charset="0"/>
                         <a:ea typeface="Calibri" charset="0"/>
                         <a:cs typeface="Calibri" charset="0"/>
@@ -52285,7 +53476,7 @@
                   </a:ext>
                 </a:extLst>
               </a:tr>
-              <a:tr h="353000">
+              <a:tr h="322000">
                 <a:tc>
                   <a:txBody>
                     <a:bodyPr/>
@@ -52295,7 +53486,7 @@
                         <a:buNone/>
                       </a:pPr>
                       <a:r>
-                        <a:rPr lang="en-US" sz="750" b="1" dirty="0">
+                        <a:rPr lang="en-US" sz="700" b="1" dirty="0">
                           <a:solidFill>
                             <a:srgbClr val="6B3FA0"/>
                           </a:solidFill>
@@ -52305,7 +53496,7 @@
                         </a:rPr>
                         <a:t>Régime social</a:t>
                       </a:r>
-                      <a:endParaRPr lang="en-US" sz="750" dirty="0">
+                      <a:endParaRPr lang="en-US" sz="700" dirty="0">
                         <a:latin typeface="Calibri" charset="0"/>
                         <a:ea typeface="Calibri" charset="0"/>
                         <a:cs typeface="Calibri" charset="0"/>
@@ -52363,7 +53554,7 @@
                         <a:buNone/>
                       </a:pPr>
                       <a:r>
-                        <a:rPr lang="en-US" sz="750" b="1" dirty="0">
+                        <a:rPr lang="en-US" sz="700" b="1" dirty="0">
                           <a:solidFill>
                             <a:srgbClr val="6B3FA0"/>
                           </a:solidFill>
@@ -52373,7 +53564,7 @@
                         </a:rPr>
                         <a:t>TNS</a:t>
                       </a:r>
-                      <a:endParaRPr lang="en-US" sz="750" dirty="0">
+                      <a:endParaRPr lang="en-US" sz="700" dirty="0">
                         <a:latin typeface="Calibri" charset="0"/>
                         <a:ea typeface="Calibri" charset="0"/>
                         <a:cs typeface="Calibri" charset="0"/>
@@ -52431,7 +53622,7 @@
                         <a:buNone/>
                       </a:pPr>
                       <a:r>
-                        <a:rPr lang="en-US" sz="750" b="1" dirty="0">
+                        <a:rPr lang="en-US" sz="700" b="1" dirty="0">
                           <a:solidFill>
                             <a:srgbClr val="6B3FA0"/>
                           </a:solidFill>
@@ -52441,7 +53632,7 @@
                         </a:rPr>
                         <a:t>TNS</a:t>
                       </a:r>
-                      <a:endParaRPr lang="en-US" sz="750" dirty="0">
+                      <a:endParaRPr lang="en-US" sz="700" dirty="0">
                         <a:latin typeface="Calibri" charset="0"/>
                         <a:ea typeface="Calibri" charset="0"/>
                         <a:cs typeface="Calibri" charset="0"/>
@@ -52499,7 +53690,7 @@
                         <a:buNone/>
                       </a:pPr>
                       <a:r>
-                        <a:rPr lang="en-US" sz="750" b="1" dirty="0">
+                        <a:rPr lang="en-US" sz="700" b="1" dirty="0">
                           <a:solidFill>
                             <a:srgbClr val="6B3FA0"/>
                           </a:solidFill>
@@ -52509,7 +53700,7 @@
                         </a:rPr>
                         <a:t>TNS</a:t>
                       </a:r>
-                      <a:endParaRPr lang="en-US" sz="750" dirty="0">
+                      <a:endParaRPr lang="en-US" sz="700" dirty="0">
                         <a:latin typeface="Calibri" charset="0"/>
                         <a:ea typeface="Calibri" charset="0"/>
                         <a:cs typeface="Calibri" charset="0"/>
@@ -52567,7 +53758,7 @@
                         <a:buNone/>
                       </a:pPr>
                       <a:r>
-                        <a:rPr lang="en-US" sz="750" b="1" dirty="0">
+                        <a:rPr lang="en-US" sz="700" b="1" dirty="0">
                           <a:solidFill>
                             <a:srgbClr val="6B3FA0"/>
                           </a:solidFill>
@@ -52577,7 +53768,7 @@
                         </a:rPr>
                         <a:t>SARL maj. → TNS</a:t>
                       </a:r>
-                      <a:endParaRPr lang="en-US" sz="750" dirty="0">
+                      <a:endParaRPr lang="en-US" sz="700" dirty="0">
                         <a:latin typeface="Calibri" charset="0"/>
                         <a:ea typeface="Calibri" charset="0"/>
                         <a:cs typeface="Calibri" charset="0"/>
@@ -52588,7 +53779,7 @@
                         <a:buNone/>
                       </a:pPr>
                       <a:r>
-                        <a:rPr lang="en-US" sz="750" b="1" dirty="0">
+                        <a:rPr lang="en-US" sz="700" b="1" dirty="0">
                           <a:solidFill>
                             <a:srgbClr val="6B3FA0"/>
                           </a:solidFill>
@@ -52598,7 +53789,7 @@
                         </a:rPr>
                         <a:t>Égalit./minor. → Assim.</a:t>
                       </a:r>
-                      <a:endParaRPr lang="en-US" sz="750" dirty="0">
+                      <a:endParaRPr lang="en-US" sz="700" dirty="0">
                         <a:latin typeface="Calibri" charset="0"/>
                         <a:ea typeface="Calibri" charset="0"/>
                         <a:cs typeface="Calibri" charset="0"/>
@@ -52656,7 +53847,7 @@
                         <a:buNone/>
                       </a:pPr>
                       <a:r>
-                        <a:rPr lang="en-US" sz="750" b="1" dirty="0">
+                        <a:rPr lang="en-US" sz="700" b="1" dirty="0">
                           <a:solidFill>
                             <a:srgbClr val="6B3FA0"/>
                           </a:solidFill>
@@ -52666,7 +53857,7 @@
                         </a:rPr>
                         <a:t>Assimilé salarié</a:t>
                       </a:r>
-                      <a:endParaRPr lang="en-US" sz="750" dirty="0">
+                      <a:endParaRPr lang="en-US" sz="700" dirty="0">
                         <a:latin typeface="Calibri" charset="0"/>
                         <a:ea typeface="Calibri" charset="0"/>
                         <a:cs typeface="Calibri" charset="0"/>
@@ -52724,7 +53915,7 @@
                         <a:buNone/>
                       </a:pPr>
                       <a:r>
-                        <a:rPr lang="en-US" sz="750" b="1" dirty="0">
+                        <a:rPr lang="en-US" sz="700" b="1" dirty="0">
                           <a:solidFill>
                             <a:srgbClr val="6B3FA0"/>
                           </a:solidFill>
@@ -52734,7 +53925,7 @@
                         </a:rPr>
                         <a:t>Assimilé salarié</a:t>
                       </a:r>
-                      <a:endParaRPr lang="en-US" sz="750" dirty="0">
+                      <a:endParaRPr lang="en-US" sz="700" dirty="0">
                         <a:latin typeface="Calibri" charset="0"/>
                         <a:ea typeface="Calibri" charset="0"/>
                         <a:cs typeface="Calibri" charset="0"/>
@@ -52792,7 +53983,7 @@
                         <a:buNone/>
                       </a:pPr>
                       <a:r>
-                        <a:rPr lang="en-US" sz="750" b="1" dirty="0">
+                        <a:rPr lang="en-US" sz="700" b="1" dirty="0">
                           <a:solidFill>
                             <a:srgbClr val="6B3FA0"/>
                           </a:solidFill>
@@ -52802,7 +53993,7 @@
                         </a:rPr>
                         <a:t>Assimilé salarié</a:t>
                       </a:r>
-                      <a:endParaRPr lang="en-US" sz="750" dirty="0">
+                      <a:endParaRPr lang="en-US" sz="700" dirty="0">
                         <a:latin typeface="Calibri" charset="0"/>
                         <a:ea typeface="Calibri" charset="0"/>
                         <a:cs typeface="Calibri" charset="0"/>
@@ -52857,7 +54048,7 @@
                   </a:ext>
                 </a:extLst>
               </a:tr>
-              <a:tr h="353000">
+              <a:tr h="322000">
                 <a:tc>
                   <a:txBody>
                     <a:bodyPr/>
@@ -52867,7 +54058,7 @@
                         <a:buNone/>
                       </a:pPr>
                       <a:r>
-                        <a:rPr lang="en-US" sz="750" dirty="0">
+                        <a:rPr lang="en-US" sz="700" dirty="0">
                           <a:solidFill>
                             <a:srgbClr val="1E2D3D"/>
                           </a:solidFill>
@@ -52877,7 +54068,7 @@
                         </a:rPr>
                         <a:t>Fiche de paie</a:t>
                       </a:r>
-                      <a:endParaRPr lang="en-US" sz="750" dirty="0">
+                      <a:endParaRPr lang="en-US" sz="700" dirty="0">
                         <a:latin typeface="Calibri" charset="0"/>
                         <a:ea typeface="Calibri" charset="0"/>
                         <a:cs typeface="Calibri" charset="0"/>
@@ -52935,7 +54126,7 @@
                         <a:buNone/>
                       </a:pPr>
                       <a:r>
-                        <a:rPr lang="en-US" sz="750" dirty="0">
+                        <a:rPr lang="en-US" sz="700" dirty="0">
                           <a:solidFill>
                             <a:srgbClr val="1E2D3D"/>
                           </a:solidFill>
@@ -52945,7 +54136,7 @@
                         </a:rPr>
                         <a:t>Non (TNS)</a:t>
                       </a:r>
-                      <a:endParaRPr lang="en-US" sz="750" dirty="0">
+                      <a:endParaRPr lang="en-US" sz="700" dirty="0">
                         <a:latin typeface="Calibri" charset="0"/>
                         <a:ea typeface="Calibri" charset="0"/>
                         <a:cs typeface="Calibri" charset="0"/>
@@ -53003,7 +54194,7 @@
                         <a:buNone/>
                       </a:pPr>
                       <a:r>
-                        <a:rPr lang="en-US" sz="750" dirty="0">
+                        <a:rPr lang="en-US" sz="700" dirty="0">
                           <a:solidFill>
                             <a:srgbClr val="1E2D3D"/>
                           </a:solidFill>
@@ -53013,7 +54204,7 @@
                         </a:rPr>
                         <a:t>Non (TNS)</a:t>
                       </a:r>
-                      <a:endParaRPr lang="en-US" sz="750" dirty="0">
+                      <a:endParaRPr lang="en-US" sz="700" dirty="0">
                         <a:latin typeface="Calibri" charset="0"/>
                         <a:ea typeface="Calibri" charset="0"/>
                         <a:cs typeface="Calibri" charset="0"/>
@@ -53071,7 +54262,7 @@
                         <a:buNone/>
                       </a:pPr>
                       <a:r>
-                        <a:rPr lang="en-US" sz="750" dirty="0">
+                        <a:rPr lang="en-US" sz="700" dirty="0">
                           <a:solidFill>
                             <a:srgbClr val="1E2D3D"/>
                           </a:solidFill>
@@ -53081,7 +54272,7 @@
                         </a:rPr>
                         <a:t>Non (TNS)</a:t>
                       </a:r>
-                      <a:endParaRPr lang="en-US" sz="750" dirty="0">
+                      <a:endParaRPr lang="en-US" sz="700" dirty="0">
                         <a:latin typeface="Calibri" charset="0"/>
                         <a:ea typeface="Calibri" charset="0"/>
                         <a:cs typeface="Calibri" charset="0"/>
@@ -53139,7 +54330,7 @@
                         <a:buNone/>
                       </a:pPr>
                       <a:r>
-                        <a:rPr lang="en-US" sz="750" dirty="0">
+                        <a:rPr lang="en-US" sz="700" dirty="0">
                           <a:solidFill>
                             <a:srgbClr val="1E2D3D"/>
                           </a:solidFill>
@@ -53149,7 +54340,7 @@
                         </a:rPr>
                         <a:t>TNS → Non</a:t>
                       </a:r>
-                      <a:endParaRPr lang="en-US" sz="750" dirty="0">
+                      <a:endParaRPr lang="en-US" sz="700" dirty="0">
                         <a:latin typeface="Calibri" charset="0"/>
                         <a:ea typeface="Calibri" charset="0"/>
                         <a:cs typeface="Calibri" charset="0"/>
@@ -53160,7 +54351,7 @@
                         <a:buNone/>
                       </a:pPr>
                       <a:r>
-                        <a:rPr lang="en-US" sz="750" dirty="0">
+                        <a:rPr lang="en-US" sz="700" dirty="0">
                           <a:solidFill>
                             <a:srgbClr val="1E2D3D"/>
                           </a:solidFill>
@@ -53170,7 +54361,7 @@
                         </a:rPr>
                         <a:t>Assim. → Oui</a:t>
                       </a:r>
-                      <a:endParaRPr lang="en-US" sz="750" dirty="0">
+                      <a:endParaRPr lang="en-US" sz="700" dirty="0">
                         <a:latin typeface="Calibri" charset="0"/>
                         <a:ea typeface="Calibri" charset="0"/>
                         <a:cs typeface="Calibri" charset="0"/>
@@ -53228,7 +54419,7 @@
                         <a:buNone/>
                       </a:pPr>
                       <a:r>
-                        <a:rPr lang="en-US" sz="750" dirty="0">
+                        <a:rPr lang="en-US" sz="700" dirty="0">
                           <a:solidFill>
                             <a:srgbClr val="1E2D3D"/>
                           </a:solidFill>
@@ -53238,7 +54429,7 @@
                         </a:rPr>
                         <a:t>Oui</a:t>
                       </a:r>
-                      <a:endParaRPr lang="en-US" sz="750" dirty="0">
+                      <a:endParaRPr lang="en-US" sz="700" dirty="0">
                         <a:latin typeface="Calibri" charset="0"/>
                         <a:ea typeface="Calibri" charset="0"/>
                         <a:cs typeface="Calibri" charset="0"/>
@@ -53296,7 +54487,7 @@
                         <a:buNone/>
                       </a:pPr>
                       <a:r>
-                        <a:rPr lang="en-US" sz="750" dirty="0">
+                        <a:rPr lang="en-US" sz="700" dirty="0">
                           <a:solidFill>
                             <a:srgbClr val="1E2D3D"/>
                           </a:solidFill>
@@ -53306,7 +54497,7 @@
                         </a:rPr>
                         <a:t>Oui</a:t>
                       </a:r>
-                      <a:endParaRPr lang="en-US" sz="750" dirty="0">
+                      <a:endParaRPr lang="en-US" sz="700" dirty="0">
                         <a:latin typeface="Calibri" charset="0"/>
                         <a:ea typeface="Calibri" charset="0"/>
                         <a:cs typeface="Calibri" charset="0"/>
@@ -53364,7 +54555,7 @@
                         <a:buNone/>
                       </a:pPr>
                       <a:r>
-                        <a:rPr lang="en-US" sz="750" dirty="0">
+                        <a:rPr lang="en-US" sz="700" dirty="0">
                           <a:solidFill>
                             <a:srgbClr val="1E2D3D"/>
                           </a:solidFill>
@@ -53374,7 +54565,7 @@
                         </a:rPr>
                         <a:t>Oui</a:t>
                       </a:r>
-                      <a:endParaRPr lang="en-US" sz="750" dirty="0">
+                      <a:endParaRPr lang="en-US" sz="700" dirty="0">
                         <a:latin typeface="Calibri" charset="0"/>
                         <a:ea typeface="Calibri" charset="0"/>
                         <a:cs typeface="Calibri" charset="0"/>
@@ -53429,7 +54620,7 @@
                   </a:ext>
                 </a:extLst>
               </a:tr>
-              <a:tr h="353000">
+              <a:tr h="322000">
                 <a:tc>
                   <a:txBody>
                     <a:bodyPr/>
@@ -53439,7 +54630,7 @@
                         <a:buNone/>
                       </a:pPr>
                       <a:r>
-                        <a:rPr lang="en-US" sz="750" dirty="0">
+                        <a:rPr lang="en-US" sz="700" dirty="0">
                           <a:solidFill>
                             <a:srgbClr val="1E2D3D"/>
                           </a:solidFill>
@@ -53449,7 +54640,7 @@
                         </a:rPr>
                         <a:t>Base cotisations</a:t>
                       </a:r>
-                      <a:endParaRPr lang="en-US" sz="750" dirty="0">
+                      <a:endParaRPr lang="en-US" sz="700" dirty="0">
                         <a:latin typeface="Calibri" charset="0"/>
                         <a:ea typeface="Calibri" charset="0"/>
                         <a:cs typeface="Calibri" charset="0"/>
@@ -53507,7 +54698,7 @@
                         <a:buNone/>
                       </a:pPr>
                       <a:r>
-                        <a:rPr lang="en-US" sz="750" dirty="0">
+                        <a:rPr lang="en-US" sz="700" dirty="0">
                           <a:solidFill>
                             <a:srgbClr val="1E2D3D"/>
                           </a:solidFill>
@@ -53517,7 +54708,7 @@
                         </a:rPr>
                         <a:t>~22% du CA HT</a:t>
                       </a:r>
-                      <a:endParaRPr lang="en-US" sz="750" dirty="0">
+                      <a:endParaRPr lang="en-US" sz="700" dirty="0">
                         <a:latin typeface="Calibri" charset="0"/>
                         <a:ea typeface="Calibri" charset="0"/>
                         <a:cs typeface="Calibri" charset="0"/>
@@ -53575,7 +54766,7 @@
                         <a:buNone/>
                       </a:pPr>
                       <a:r>
-                        <a:rPr lang="en-US" sz="750" dirty="0">
+                        <a:rPr lang="en-US" sz="700" dirty="0">
                           <a:solidFill>
                             <a:srgbClr val="1E2D3D"/>
                           </a:solidFill>
@@ -53585,7 +54776,7 @@
                         </a:rPr>
                         <a:t>~45% du BIC</a:t>
                       </a:r>
-                      <a:endParaRPr lang="en-US" sz="750" dirty="0">
+                      <a:endParaRPr lang="en-US" sz="700" dirty="0">
                         <a:latin typeface="Calibri" charset="0"/>
                         <a:ea typeface="Calibri" charset="0"/>
                         <a:cs typeface="Calibri" charset="0"/>
@@ -53643,7 +54834,7 @@
                         <a:buNone/>
                       </a:pPr>
                       <a:r>
-                        <a:rPr lang="en-US" sz="750" dirty="0">
+                        <a:rPr lang="en-US" sz="700" dirty="0">
                           <a:solidFill>
                             <a:srgbClr val="1E2D3D"/>
                           </a:solidFill>
@@ -53653,7 +54844,7 @@
                         </a:rPr>
                         <a:t>~45% du BIC</a:t>
                       </a:r>
-                      <a:endParaRPr lang="en-US" sz="750" dirty="0">
+                      <a:endParaRPr lang="en-US" sz="700" dirty="0">
                         <a:latin typeface="Calibri" charset="0"/>
                         <a:ea typeface="Calibri" charset="0"/>
                         <a:cs typeface="Calibri" charset="0"/>
@@ -53711,7 +54902,7 @@
                         <a:buNone/>
                       </a:pPr>
                       <a:r>
-                        <a:rPr lang="en-US" sz="750" dirty="0">
+                        <a:rPr lang="en-US" sz="700" dirty="0">
                           <a:solidFill>
                             <a:srgbClr val="1E2D3D"/>
                           </a:solidFill>
@@ -53721,7 +54912,7 @@
                         </a:rPr>
                         <a:t>TNS: 45% BIC</a:t>
                       </a:r>
-                      <a:endParaRPr lang="en-US" sz="750" dirty="0">
+                      <a:endParaRPr lang="en-US" sz="700" dirty="0">
                         <a:latin typeface="Calibri" charset="0"/>
                         <a:ea typeface="Calibri" charset="0"/>
                         <a:cs typeface="Calibri" charset="0"/>
@@ -53732,7 +54923,7 @@
                         <a:buNone/>
                       </a:pPr>
                       <a:r>
-                        <a:rPr lang="en-US" sz="750" dirty="0">
+                        <a:rPr lang="en-US" sz="700" dirty="0">
                           <a:solidFill>
                             <a:srgbClr val="1E2D3D"/>
                           </a:solidFill>
@@ -53742,7 +54933,7 @@
                         </a:rPr>
                         <a:t>Assim: 75% sal. brut</a:t>
                       </a:r>
-                      <a:endParaRPr lang="en-US" sz="750" dirty="0">
+                      <a:endParaRPr lang="en-US" sz="700" dirty="0">
                         <a:latin typeface="Calibri" charset="0"/>
                         <a:ea typeface="Calibri" charset="0"/>
                         <a:cs typeface="Calibri" charset="0"/>
@@ -53800,7 +54991,7 @@
                         <a:buNone/>
                       </a:pPr>
                       <a:r>
-                        <a:rPr lang="en-US" sz="750" dirty="0">
+                        <a:rPr lang="en-US" sz="700" dirty="0">
                           <a:solidFill>
                             <a:srgbClr val="1E2D3D"/>
                           </a:solidFill>
@@ -53810,7 +55001,7 @@
                         </a:rPr>
                         <a:t>~75% sal. brut</a:t>
                       </a:r>
-                      <a:endParaRPr lang="en-US" sz="750" dirty="0">
+                      <a:endParaRPr lang="en-US" sz="700" dirty="0">
                         <a:latin typeface="Calibri" charset="0"/>
                         <a:ea typeface="Calibri" charset="0"/>
                         <a:cs typeface="Calibri" charset="0"/>
@@ -53868,7 +55059,7 @@
                         <a:buNone/>
                       </a:pPr>
                       <a:r>
-                        <a:rPr lang="en-US" sz="750" dirty="0">
+                        <a:rPr lang="en-US" sz="700" dirty="0">
                           <a:solidFill>
                             <a:srgbClr val="1E2D3D"/>
                           </a:solidFill>
@@ -53878,7 +55069,7 @@
                         </a:rPr>
                         <a:t>~75% sal. brut</a:t>
                       </a:r>
-                      <a:endParaRPr lang="en-US" sz="750" dirty="0">
+                      <a:endParaRPr lang="en-US" sz="700" dirty="0">
                         <a:latin typeface="Calibri" charset="0"/>
                         <a:ea typeface="Calibri" charset="0"/>
                         <a:cs typeface="Calibri" charset="0"/>
@@ -53936,7 +55127,7 @@
                         <a:buNone/>
                       </a:pPr>
                       <a:r>
-                        <a:rPr lang="en-US" sz="750" dirty="0">
+                        <a:rPr lang="en-US" sz="700" dirty="0">
                           <a:solidFill>
                             <a:srgbClr val="1E2D3D"/>
                           </a:solidFill>
@@ -53946,7 +55137,7 @@
                         </a:rPr>
                         <a:t>~75% sal. brut</a:t>
                       </a:r>
-                      <a:endParaRPr lang="en-US" sz="750" dirty="0">
+                      <a:endParaRPr lang="en-US" sz="700" dirty="0">
                         <a:latin typeface="Calibri" charset="0"/>
                         <a:ea typeface="Calibri" charset="0"/>
                         <a:cs typeface="Calibri" charset="0"/>
@@ -54001,7 +55192,7 @@
                   </a:ext>
                 </a:extLst>
               </a:tr>
-              <a:tr h="353000">
+              <a:tr h="322000">
                 <a:tc>
                   <a:txBody>
                     <a:bodyPr/>
@@ -54011,7 +55202,7 @@
                         <a:buNone/>
                       </a:pPr>
                       <a:r>
-                        <a:rPr lang="en-US" sz="750" dirty="0">
+                        <a:rPr lang="en-US" sz="700" dirty="0">
                           <a:solidFill>
                             <a:srgbClr val="1E2D3D"/>
                           </a:solidFill>
@@ -54021,7 +55212,7 @@
                         </a:rPr>
                         <a:t>CA max</a:t>
                       </a:r>
-                      <a:endParaRPr lang="en-US" sz="750" dirty="0">
+                      <a:endParaRPr lang="en-US" sz="700" dirty="0">
                         <a:latin typeface="Calibri" charset="0"/>
                         <a:ea typeface="Calibri" charset="0"/>
                         <a:cs typeface="Calibri" charset="0"/>
@@ -54079,7 +55270,7 @@
                         <a:buNone/>
                       </a:pPr>
                       <a:r>
-                        <a:rPr lang="en-US" sz="750" dirty="0">
+                        <a:rPr lang="en-US" sz="700" dirty="0">
                           <a:solidFill>
                             <a:srgbClr val="1E2D3D"/>
                           </a:solidFill>
@@ -54089,7 +55280,7 @@
                         </a:rPr>
                         <a:t>83 600€ HT</a:t>
                       </a:r>
-                      <a:endParaRPr lang="en-US" sz="750" dirty="0">
+                      <a:endParaRPr lang="en-US" sz="700" dirty="0">
                         <a:latin typeface="Calibri" charset="0"/>
                         <a:ea typeface="Calibri" charset="0"/>
                         <a:cs typeface="Calibri" charset="0"/>
@@ -54147,7 +55338,7 @@
                         <a:buNone/>
                       </a:pPr>
                       <a:r>
-                        <a:rPr lang="en-US" sz="750" dirty="0">
+                        <a:rPr lang="en-US" sz="700" dirty="0">
                           <a:solidFill>
                             <a:srgbClr val="1E2D3D"/>
                           </a:solidFill>
@@ -54157,7 +55348,7 @@
                         </a:rPr>
                         <a:t>Illimité</a:t>
                       </a:r>
-                      <a:endParaRPr lang="en-US" sz="750" dirty="0">
+                      <a:endParaRPr lang="en-US" sz="700" dirty="0">
                         <a:latin typeface="Calibri" charset="0"/>
                         <a:ea typeface="Calibri" charset="0"/>
                         <a:cs typeface="Calibri" charset="0"/>
@@ -54215,7 +55406,7 @@
                         <a:buNone/>
                       </a:pPr>
                       <a:r>
-                        <a:rPr lang="en-US" sz="750" dirty="0">
+                        <a:rPr lang="en-US" sz="700" dirty="0">
                           <a:solidFill>
                             <a:srgbClr val="1E2D3D"/>
                           </a:solidFill>
@@ -54225,7 +55416,7 @@
                         </a:rPr>
                         <a:t>Illimité</a:t>
                       </a:r>
-                      <a:endParaRPr lang="en-US" sz="750" dirty="0">
+                      <a:endParaRPr lang="en-US" sz="700" dirty="0">
                         <a:latin typeface="Calibri" charset="0"/>
                         <a:ea typeface="Calibri" charset="0"/>
                         <a:cs typeface="Calibri" charset="0"/>
@@ -54283,7 +55474,7 @@
                         <a:buNone/>
                       </a:pPr>
                       <a:r>
-                        <a:rPr lang="en-US" sz="750" dirty="0">
+                        <a:rPr lang="en-US" sz="700" dirty="0">
                           <a:solidFill>
                             <a:srgbClr val="1E2D3D"/>
                           </a:solidFill>
@@ -54293,7 +55484,7 @@
                         </a:rPr>
                         <a:t>Illimité</a:t>
                       </a:r>
-                      <a:endParaRPr lang="en-US" sz="750" dirty="0">
+                      <a:endParaRPr lang="en-US" sz="700" dirty="0">
                         <a:latin typeface="Calibri" charset="0"/>
                         <a:ea typeface="Calibri" charset="0"/>
                         <a:cs typeface="Calibri" charset="0"/>
@@ -54351,7 +55542,7 @@
                         <a:buNone/>
                       </a:pPr>
                       <a:r>
-                        <a:rPr lang="en-US" sz="750" dirty="0">
+                        <a:rPr lang="en-US" sz="700" dirty="0">
                           <a:solidFill>
                             <a:srgbClr val="1E2D3D"/>
                           </a:solidFill>
@@ -54361,7 +55552,7 @@
                         </a:rPr>
                         <a:t>Illimité</a:t>
                       </a:r>
-                      <a:endParaRPr lang="en-US" sz="750" dirty="0">
+                      <a:endParaRPr lang="en-US" sz="700" dirty="0">
                         <a:latin typeface="Calibri" charset="0"/>
                         <a:ea typeface="Calibri" charset="0"/>
                         <a:cs typeface="Calibri" charset="0"/>
@@ -54419,7 +55610,7 @@
                         <a:buNone/>
                       </a:pPr>
                       <a:r>
-                        <a:rPr lang="en-US" sz="750" dirty="0">
+                        <a:rPr lang="en-US" sz="700" dirty="0">
                           <a:solidFill>
                             <a:srgbClr val="1E2D3D"/>
                           </a:solidFill>
@@ -54429,7 +55620,7 @@
                         </a:rPr>
                         <a:t>Illimité</a:t>
                       </a:r>
-                      <a:endParaRPr lang="en-US" sz="750" dirty="0">
+                      <a:endParaRPr lang="en-US" sz="700" dirty="0">
                         <a:latin typeface="Calibri" charset="0"/>
                         <a:ea typeface="Calibri" charset="0"/>
                         <a:cs typeface="Calibri" charset="0"/>
@@ -54487,7 +55678,7 @@
                         <a:buNone/>
                       </a:pPr>
                       <a:r>
-                        <a:rPr lang="en-US" sz="750" dirty="0">
+                        <a:rPr lang="en-US" sz="700" dirty="0">
                           <a:solidFill>
                             <a:srgbClr val="1E2D3D"/>
                           </a:solidFill>
@@ -54497,7 +55688,7 @@
                         </a:rPr>
                         <a:t>Illimité</a:t>
                       </a:r>
-                      <a:endParaRPr lang="en-US" sz="750" dirty="0">
+                      <a:endParaRPr lang="en-US" sz="700" dirty="0">
                         <a:latin typeface="Calibri" charset="0"/>
                         <a:ea typeface="Calibri" charset="0"/>
                         <a:cs typeface="Calibri" charset="0"/>
